--- a/units/unit04_procif/procif.pptx
+++ b/units/unit04_procif/procif.pptx
@@ -5,7 +5,7 @@
     <p:sldMasterId id="2147483648" r:id="rId1"/>
   </p:sldMasterIdLst>
   <p:notesMasterIdLst>
-    <p:notesMasterId r:id="rId50"/>
+    <p:notesMasterId r:id="rId51"/>
   </p:notesMasterIdLst>
   <p:sldIdLst>
     <p:sldId id="258" r:id="rId2"/>
@@ -29,33 +29,34 @@
     <p:sldId id="294" r:id="rId20"/>
     <p:sldId id="295" r:id="rId21"/>
     <p:sldId id="296" r:id="rId22"/>
-    <p:sldId id="292" r:id="rId23"/>
-    <p:sldId id="300" r:id="rId24"/>
-    <p:sldId id="301" r:id="rId25"/>
-    <p:sldId id="302" r:id="rId26"/>
-    <p:sldId id="303" r:id="rId27"/>
-    <p:sldId id="304" r:id="rId28"/>
-    <p:sldId id="305" r:id="rId29"/>
-    <p:sldId id="299" r:id="rId30"/>
-    <p:sldId id="310" r:id="rId31"/>
-    <p:sldId id="306" r:id="rId32"/>
-    <p:sldId id="308" r:id="rId33"/>
-    <p:sldId id="312" r:id="rId34"/>
-    <p:sldId id="307" r:id="rId35"/>
-    <p:sldId id="311" r:id="rId36"/>
-    <p:sldId id="309" r:id="rId37"/>
-    <p:sldId id="313" r:id="rId38"/>
-    <p:sldId id="314" r:id="rId39"/>
-    <p:sldId id="315" r:id="rId40"/>
-    <p:sldId id="316" r:id="rId41"/>
-    <p:sldId id="317" r:id="rId42"/>
-    <p:sldId id="319" r:id="rId43"/>
-    <p:sldId id="320" r:id="rId44"/>
-    <p:sldId id="318" r:id="rId45"/>
-    <p:sldId id="321" r:id="rId46"/>
-    <p:sldId id="322" r:id="rId47"/>
-    <p:sldId id="323" r:id="rId48"/>
-    <p:sldId id="324" r:id="rId49"/>
+    <p:sldId id="325" r:id="rId23"/>
+    <p:sldId id="292" r:id="rId24"/>
+    <p:sldId id="300" r:id="rId25"/>
+    <p:sldId id="301" r:id="rId26"/>
+    <p:sldId id="302" r:id="rId27"/>
+    <p:sldId id="303" r:id="rId28"/>
+    <p:sldId id="304" r:id="rId29"/>
+    <p:sldId id="305" r:id="rId30"/>
+    <p:sldId id="299" r:id="rId31"/>
+    <p:sldId id="310" r:id="rId32"/>
+    <p:sldId id="306" r:id="rId33"/>
+    <p:sldId id="308" r:id="rId34"/>
+    <p:sldId id="312" r:id="rId35"/>
+    <p:sldId id="307" r:id="rId36"/>
+    <p:sldId id="311" r:id="rId37"/>
+    <p:sldId id="309" r:id="rId38"/>
+    <p:sldId id="313" r:id="rId39"/>
+    <p:sldId id="314" r:id="rId40"/>
+    <p:sldId id="315" r:id="rId41"/>
+    <p:sldId id="316" r:id="rId42"/>
+    <p:sldId id="317" r:id="rId43"/>
+    <p:sldId id="319" r:id="rId44"/>
+    <p:sldId id="320" r:id="rId45"/>
+    <p:sldId id="318" r:id="rId46"/>
+    <p:sldId id="321" r:id="rId47"/>
+    <p:sldId id="322" r:id="rId48"/>
+    <p:sldId id="323" r:id="rId49"/>
+    <p:sldId id="324" r:id="rId50"/>
   </p:sldIdLst>
   <p:sldSz cx="12192000" cy="6858000"/>
   <p:notesSz cx="7315200" cy="9601200"/>
@@ -255,7 +256,7 @@
           <a:p>
             <a:fld id="{B7D6DDD3-D7E9-488B-B626-1E8285E424D8}" type="datetimeFigureOut">
               <a:rPr lang="en-US" smtClean="0"/>
-              <a:t>3/31/2026</a:t>
+              <a:t>4/15/2026</a:t>
             </a:fld>
             <a:endParaRPr lang="en-US"/>
           </a:p>
@@ -12968,7 +12969,7 @@
           <a:p>
             <a:r>
               <a:rPr lang="en-US" dirty="0"/>
-              <a:t>AXI4-Lite Write Protocol</a:t>
+              <a:t>Review:  AXI4-Lite Write Protocol</a:t>
             </a:r>
           </a:p>
         </p:txBody>
@@ -14005,6 +14006,837 @@
   <p:cSld>
     <p:spTree>
       <p:nvGrpSpPr>
+        <p:cNvPr id="1" name="">
+          <a:extLst>
+            <a:ext uri="{FF2B5EF4-FFF2-40B4-BE49-F238E27FC236}">
+              <a16:creationId xmlns:a16="http://schemas.microsoft.com/office/drawing/2014/main" id="{47AFC023-B6D3-726A-29C1-715664257A3B}"/>
+            </a:ext>
+          </a:extLst>
+        </p:cNvPr>
+        <p:cNvGrpSpPr/>
+        <p:nvPr/>
+      </p:nvGrpSpPr>
+      <p:grpSpPr>
+        <a:xfrm>
+          <a:off x="0" y="0"/>
+          <a:ext cx="0" cy="0"/>
+          <a:chOff x="0" y="0"/>
+          <a:chExt cx="0" cy="0"/>
+        </a:xfrm>
+      </p:grpSpPr>
+      <p:sp>
+        <p:nvSpPr>
+          <p:cNvPr id="2" name="Title 1">
+            <a:extLst>
+              <a:ext uri="{FF2B5EF4-FFF2-40B4-BE49-F238E27FC236}">
+                <a16:creationId xmlns:a16="http://schemas.microsoft.com/office/drawing/2014/main" id="{40914921-028E-3067-2752-4F64292CF065}"/>
+              </a:ext>
+            </a:extLst>
+          </p:cNvPr>
+          <p:cNvSpPr>
+            <a:spLocks noGrp="1"/>
+          </p:cNvSpPr>
+          <p:nvPr>
+            <p:ph type="title"/>
+          </p:nvPr>
+        </p:nvSpPr>
+        <p:spPr/>
+        <p:txBody>
+          <a:bodyPr/>
+          <a:lstStyle/>
+          <a:p>
+            <a:r>
+              <a:rPr lang="en-US" dirty="0"/>
+              <a:t>Additional AXI4-Full Signals</a:t>
+            </a:r>
+          </a:p>
+        </p:txBody>
+      </p:sp>
+      <p:sp>
+        <p:nvSpPr>
+          <p:cNvPr id="3" name="Content Placeholder 2">
+            <a:extLst>
+              <a:ext uri="{FF2B5EF4-FFF2-40B4-BE49-F238E27FC236}">
+                <a16:creationId xmlns:a16="http://schemas.microsoft.com/office/drawing/2014/main" id="{072B9711-D7B7-3E57-8178-CA8A8BC13B1E}"/>
+              </a:ext>
+            </a:extLst>
+          </p:cNvPr>
+          <p:cNvSpPr>
+            <a:spLocks noGrp="1"/>
+          </p:cNvSpPr>
+          <p:nvPr>
+            <p:ph idx="1"/>
+          </p:nvPr>
+        </p:nvSpPr>
+        <p:spPr>
+          <a:xfrm>
+            <a:off x="1097280" y="1539277"/>
+            <a:ext cx="6101726" cy="4329817"/>
+          </a:xfrm>
+        </p:spPr>
+        <p:txBody>
+          <a:bodyPr>
+            <a:normAutofit/>
+          </a:bodyPr>
+          <a:lstStyle/>
+          <a:p>
+            <a:endParaRPr lang="en-US" dirty="0"/>
+          </a:p>
+        </p:txBody>
+      </p:sp>
+      <p:sp>
+        <p:nvSpPr>
+          <p:cNvPr id="4" name="Slide Number Placeholder 3">
+            <a:extLst>
+              <a:ext uri="{FF2B5EF4-FFF2-40B4-BE49-F238E27FC236}">
+                <a16:creationId xmlns:a16="http://schemas.microsoft.com/office/drawing/2014/main" id="{66F23C6F-244F-B085-8F29-03F6A7292E25}"/>
+              </a:ext>
+            </a:extLst>
+          </p:cNvPr>
+          <p:cNvSpPr>
+            <a:spLocks noGrp="1"/>
+          </p:cNvSpPr>
+          <p:nvPr>
+            <p:ph type="sldNum" sz="quarter" idx="12"/>
+          </p:nvPr>
+        </p:nvSpPr>
+        <p:spPr/>
+        <p:txBody>
+          <a:bodyPr/>
+          <a:lstStyle/>
+          <a:p>
+            <a:fld id="{629637A9-119A-49DA-BD12-AAC58B377D80}" type="slidenum">
+              <a:rPr lang="en-US" smtClean="0"/>
+              <a:t>22</a:t>
+            </a:fld>
+            <a:endParaRPr lang="en-US" dirty="0"/>
+          </a:p>
+        </p:txBody>
+      </p:sp>
+      <p:sp>
+        <p:nvSpPr>
+          <p:cNvPr id="5" name="Rectangle 4">
+            <a:extLst>
+              <a:ext uri="{FF2B5EF4-FFF2-40B4-BE49-F238E27FC236}">
+                <a16:creationId xmlns:a16="http://schemas.microsoft.com/office/drawing/2014/main" id="{684A4DA3-6D6E-8F06-FA9B-9CD2D05A1E3C}"/>
+              </a:ext>
+            </a:extLst>
+          </p:cNvPr>
+          <p:cNvSpPr/>
+          <p:nvPr/>
+        </p:nvSpPr>
+        <p:spPr>
+          <a:xfrm>
+            <a:off x="10531359" y="1985409"/>
+            <a:ext cx="906219" cy="3607082"/>
+          </a:xfrm>
+          <a:prstGeom prst="rect">
+            <a:avLst/>
+          </a:prstGeom>
+          <a:solidFill>
+            <a:schemeClr val="accent4">
+              <a:lumMod val="20000"/>
+              <a:lumOff val="80000"/>
+            </a:schemeClr>
+          </a:solidFill>
+        </p:spPr>
+        <p:style>
+          <a:lnRef idx="2">
+            <a:schemeClr val="accent1">
+              <a:shade val="15000"/>
+            </a:schemeClr>
+          </a:lnRef>
+          <a:fillRef idx="1">
+            <a:schemeClr val="accent1"/>
+          </a:fillRef>
+          <a:effectRef idx="0">
+            <a:schemeClr val="accent1"/>
+          </a:effectRef>
+          <a:fontRef idx="minor">
+            <a:schemeClr val="lt1"/>
+          </a:fontRef>
+        </p:style>
+        <p:txBody>
+          <a:bodyPr rtlCol="0" anchor="ctr"/>
+          <a:lstStyle/>
+          <a:p>
+            <a:pPr algn="ctr"/>
+            <a:endParaRPr lang="en-US"/>
+          </a:p>
+        </p:txBody>
+      </p:sp>
+      <p:sp>
+        <p:nvSpPr>
+          <p:cNvPr id="6" name="Rectangle 5">
+            <a:extLst>
+              <a:ext uri="{FF2B5EF4-FFF2-40B4-BE49-F238E27FC236}">
+                <a16:creationId xmlns:a16="http://schemas.microsoft.com/office/drawing/2014/main" id="{E2665B21-89B9-07E8-C8E7-CF9CE00FFCFF}"/>
+              </a:ext>
+            </a:extLst>
+          </p:cNvPr>
+          <p:cNvSpPr/>
+          <p:nvPr/>
+        </p:nvSpPr>
+        <p:spPr>
+          <a:xfrm>
+            <a:off x="7272862" y="1924786"/>
+            <a:ext cx="906219" cy="3667705"/>
+          </a:xfrm>
+          <a:prstGeom prst="rect">
+            <a:avLst/>
+          </a:prstGeom>
+          <a:solidFill>
+            <a:schemeClr val="accent5">
+              <a:lumMod val="40000"/>
+              <a:lumOff val="60000"/>
+            </a:schemeClr>
+          </a:solidFill>
+        </p:spPr>
+        <p:style>
+          <a:lnRef idx="2">
+            <a:schemeClr val="accent1">
+              <a:shade val="15000"/>
+            </a:schemeClr>
+          </a:lnRef>
+          <a:fillRef idx="1">
+            <a:schemeClr val="accent1"/>
+          </a:fillRef>
+          <a:effectRef idx="0">
+            <a:schemeClr val="accent1"/>
+          </a:effectRef>
+          <a:fontRef idx="minor">
+            <a:schemeClr val="lt1"/>
+          </a:fontRef>
+        </p:style>
+        <p:txBody>
+          <a:bodyPr rtlCol="0" anchor="ctr"/>
+          <a:lstStyle/>
+          <a:p>
+            <a:pPr algn="ctr"/>
+            <a:endParaRPr lang="en-US"/>
+          </a:p>
+        </p:txBody>
+      </p:sp>
+      <p:cxnSp>
+        <p:nvCxnSpPr>
+          <p:cNvPr id="8" name="Straight Arrow Connector 7">
+            <a:extLst>
+              <a:ext uri="{FF2B5EF4-FFF2-40B4-BE49-F238E27FC236}">
+                <a16:creationId xmlns:a16="http://schemas.microsoft.com/office/drawing/2014/main" id="{BD5B424B-2336-1ADC-6DCB-396E3CAF10EF}"/>
+              </a:ext>
+            </a:extLst>
+          </p:cNvPr>
+          <p:cNvCxnSpPr>
+            <a:cxnSpLocks/>
+          </p:cNvCxnSpPr>
+          <p:nvPr/>
+        </p:nvCxnSpPr>
+        <p:spPr>
+          <a:xfrm>
+            <a:off x="8234652" y="2207695"/>
+            <a:ext cx="2222851" cy="0"/>
+          </a:xfrm>
+          <a:prstGeom prst="straightConnector1">
+            <a:avLst/>
+          </a:prstGeom>
+          <a:ln w="25400">
+            <a:solidFill>
+              <a:srgbClr val="0070C0"/>
+            </a:solidFill>
+            <a:tailEnd type="triangle"/>
+          </a:ln>
+        </p:spPr>
+        <p:style>
+          <a:lnRef idx="1">
+            <a:schemeClr val="accent1"/>
+          </a:lnRef>
+          <a:fillRef idx="0">
+            <a:schemeClr val="accent1"/>
+          </a:fillRef>
+          <a:effectRef idx="0">
+            <a:schemeClr val="accent1"/>
+          </a:effectRef>
+          <a:fontRef idx="minor">
+            <a:schemeClr val="tx1"/>
+          </a:fontRef>
+        </p:style>
+      </p:cxnSp>
+      <p:sp>
+        <p:nvSpPr>
+          <p:cNvPr id="9" name="TextBox 8">
+            <a:extLst>
+              <a:ext uri="{FF2B5EF4-FFF2-40B4-BE49-F238E27FC236}">
+                <a16:creationId xmlns:a16="http://schemas.microsoft.com/office/drawing/2014/main" id="{6DE13331-EB6F-469E-8E4B-F0F771369C4E}"/>
+              </a:ext>
+            </a:extLst>
+          </p:cNvPr>
+          <p:cNvSpPr txBox="1"/>
+          <p:nvPr/>
+        </p:nvSpPr>
+        <p:spPr>
+          <a:xfrm>
+            <a:off x="8870701" y="2360095"/>
+            <a:ext cx="1132105" cy="369332"/>
+          </a:xfrm>
+          <a:prstGeom prst="rect">
+            <a:avLst/>
+          </a:prstGeom>
+          <a:noFill/>
+        </p:spPr>
+        <p:txBody>
+          <a:bodyPr wrap="none" rtlCol="0">
+            <a:spAutoFit/>
+          </a:bodyPr>
+          <a:lstStyle/>
+          <a:p>
+            <a:r>
+              <a:rPr lang="en-US" dirty="0">
+                <a:solidFill>
+                  <a:srgbClr val="7030A0"/>
+                </a:solidFill>
+              </a:rPr>
+              <a:t>AWREADY</a:t>
+            </a:r>
+          </a:p>
+        </p:txBody>
+      </p:sp>
+      <p:cxnSp>
+        <p:nvCxnSpPr>
+          <p:cNvPr id="15" name="Straight Arrow Connector 14">
+            <a:extLst>
+              <a:ext uri="{FF2B5EF4-FFF2-40B4-BE49-F238E27FC236}">
+                <a16:creationId xmlns:a16="http://schemas.microsoft.com/office/drawing/2014/main" id="{B4CB7332-51ED-AE60-4F17-659EA940D8FA}"/>
+              </a:ext>
+            </a:extLst>
+          </p:cNvPr>
+          <p:cNvCxnSpPr>
+            <a:cxnSpLocks/>
+          </p:cNvCxnSpPr>
+          <p:nvPr/>
+        </p:nvCxnSpPr>
+        <p:spPr>
+          <a:xfrm flipH="1">
+            <a:off x="8252937" y="2698574"/>
+            <a:ext cx="2204566" cy="0"/>
+          </a:xfrm>
+          <a:prstGeom prst="straightConnector1">
+            <a:avLst/>
+          </a:prstGeom>
+          <a:ln w="25400">
+            <a:solidFill>
+              <a:srgbClr val="7030A0"/>
+            </a:solidFill>
+            <a:tailEnd type="triangle"/>
+          </a:ln>
+        </p:spPr>
+        <p:style>
+          <a:lnRef idx="1">
+            <a:schemeClr val="accent1"/>
+          </a:lnRef>
+          <a:fillRef idx="0">
+            <a:schemeClr val="accent1"/>
+          </a:fillRef>
+          <a:effectRef idx="0">
+            <a:schemeClr val="accent1"/>
+          </a:effectRef>
+          <a:fontRef idx="minor">
+            <a:schemeClr val="tx1"/>
+          </a:fontRef>
+        </p:style>
+      </p:cxnSp>
+      <p:sp>
+        <p:nvSpPr>
+          <p:cNvPr id="19" name="TextBox 18">
+            <a:extLst>
+              <a:ext uri="{FF2B5EF4-FFF2-40B4-BE49-F238E27FC236}">
+                <a16:creationId xmlns:a16="http://schemas.microsoft.com/office/drawing/2014/main" id="{24B483E6-A345-E226-D1A0-026994B27088}"/>
+              </a:ext>
+            </a:extLst>
+          </p:cNvPr>
+          <p:cNvSpPr txBox="1"/>
+          <p:nvPr/>
+        </p:nvSpPr>
+        <p:spPr>
+          <a:xfrm>
+            <a:off x="8419060" y="1838363"/>
+            <a:ext cx="2038443" cy="369332"/>
+          </a:xfrm>
+          <a:prstGeom prst="rect">
+            <a:avLst/>
+          </a:prstGeom>
+          <a:noFill/>
+        </p:spPr>
+        <p:txBody>
+          <a:bodyPr wrap="none" rtlCol="0">
+            <a:spAutoFit/>
+          </a:bodyPr>
+          <a:lstStyle/>
+          <a:p>
+            <a:r>
+              <a:rPr lang="en-US" dirty="0">
+                <a:solidFill>
+                  <a:schemeClr val="accent6">
+                    <a:lumMod val="75000"/>
+                  </a:schemeClr>
+                </a:solidFill>
+              </a:rPr>
+              <a:t>AWADDR, AWVALID</a:t>
+            </a:r>
+          </a:p>
+        </p:txBody>
+      </p:sp>
+      <p:cxnSp>
+        <p:nvCxnSpPr>
+          <p:cNvPr id="20" name="Straight Arrow Connector 19">
+            <a:extLst>
+              <a:ext uri="{FF2B5EF4-FFF2-40B4-BE49-F238E27FC236}">
+                <a16:creationId xmlns:a16="http://schemas.microsoft.com/office/drawing/2014/main" id="{5B33FA50-C562-2BFB-79BE-1B72C671CBDF}"/>
+              </a:ext>
+            </a:extLst>
+          </p:cNvPr>
+          <p:cNvCxnSpPr>
+            <a:cxnSpLocks/>
+          </p:cNvCxnSpPr>
+          <p:nvPr/>
+        </p:nvCxnSpPr>
+        <p:spPr>
+          <a:xfrm>
+            <a:off x="8234652" y="3406386"/>
+            <a:ext cx="2222851" cy="0"/>
+          </a:xfrm>
+          <a:prstGeom prst="straightConnector1">
+            <a:avLst/>
+          </a:prstGeom>
+          <a:ln w="25400">
+            <a:solidFill>
+              <a:srgbClr val="0070C0"/>
+            </a:solidFill>
+            <a:tailEnd type="triangle"/>
+          </a:ln>
+        </p:spPr>
+        <p:style>
+          <a:lnRef idx="1">
+            <a:schemeClr val="accent1"/>
+          </a:lnRef>
+          <a:fillRef idx="0">
+            <a:schemeClr val="accent1"/>
+          </a:fillRef>
+          <a:effectRef idx="0">
+            <a:schemeClr val="accent1"/>
+          </a:effectRef>
+          <a:fontRef idx="minor">
+            <a:schemeClr val="tx1"/>
+          </a:fontRef>
+        </p:style>
+      </p:cxnSp>
+      <p:sp>
+        <p:nvSpPr>
+          <p:cNvPr id="21" name="TextBox 20">
+            <a:extLst>
+              <a:ext uri="{FF2B5EF4-FFF2-40B4-BE49-F238E27FC236}">
+                <a16:creationId xmlns:a16="http://schemas.microsoft.com/office/drawing/2014/main" id="{FF117F83-4218-F876-0CB0-A74FAEAAA826}"/>
+              </a:ext>
+            </a:extLst>
+          </p:cNvPr>
+          <p:cNvSpPr txBox="1"/>
+          <p:nvPr/>
+        </p:nvSpPr>
+        <p:spPr>
+          <a:xfrm>
+            <a:off x="9007404" y="4217568"/>
+            <a:ext cx="858697" cy="369332"/>
+          </a:xfrm>
+          <a:prstGeom prst="rect">
+            <a:avLst/>
+          </a:prstGeom>
+          <a:noFill/>
+        </p:spPr>
+        <p:txBody>
+          <a:bodyPr wrap="none" rtlCol="0">
+            <a:spAutoFit/>
+          </a:bodyPr>
+          <a:lstStyle/>
+          <a:p>
+            <a:r>
+              <a:rPr lang="en-US" dirty="0">
+                <a:solidFill>
+                  <a:srgbClr val="7030A0"/>
+                </a:solidFill>
+              </a:rPr>
+              <a:t>BVALID</a:t>
+            </a:r>
+          </a:p>
+        </p:txBody>
+      </p:sp>
+      <p:cxnSp>
+        <p:nvCxnSpPr>
+          <p:cNvPr id="22" name="Straight Arrow Connector 21">
+            <a:extLst>
+              <a:ext uri="{FF2B5EF4-FFF2-40B4-BE49-F238E27FC236}">
+                <a16:creationId xmlns:a16="http://schemas.microsoft.com/office/drawing/2014/main" id="{70562993-A560-E050-B500-227FEC21A31D}"/>
+              </a:ext>
+            </a:extLst>
+          </p:cNvPr>
+          <p:cNvCxnSpPr>
+            <a:cxnSpLocks/>
+          </p:cNvCxnSpPr>
+          <p:nvPr/>
+        </p:nvCxnSpPr>
+        <p:spPr>
+          <a:xfrm flipH="1">
+            <a:off x="8252937" y="3897265"/>
+            <a:ext cx="2204566" cy="0"/>
+          </a:xfrm>
+          <a:prstGeom prst="straightConnector1">
+            <a:avLst/>
+          </a:prstGeom>
+          <a:ln w="25400">
+            <a:solidFill>
+              <a:srgbClr val="7030A0"/>
+            </a:solidFill>
+            <a:tailEnd type="triangle"/>
+          </a:ln>
+        </p:spPr>
+        <p:style>
+          <a:lnRef idx="1">
+            <a:schemeClr val="accent1"/>
+          </a:lnRef>
+          <a:fillRef idx="0">
+            <a:schemeClr val="accent1"/>
+          </a:fillRef>
+          <a:effectRef idx="0">
+            <a:schemeClr val="accent1"/>
+          </a:effectRef>
+          <a:fontRef idx="minor">
+            <a:schemeClr val="tx1"/>
+          </a:fontRef>
+        </p:style>
+      </p:cxnSp>
+      <p:sp>
+        <p:nvSpPr>
+          <p:cNvPr id="23" name="TextBox 22">
+            <a:extLst>
+              <a:ext uri="{FF2B5EF4-FFF2-40B4-BE49-F238E27FC236}">
+                <a16:creationId xmlns:a16="http://schemas.microsoft.com/office/drawing/2014/main" id="{75E63DAE-8AB8-AF75-1B29-B200ED4E2D41}"/>
+              </a:ext>
+            </a:extLst>
+          </p:cNvPr>
+          <p:cNvSpPr txBox="1"/>
+          <p:nvPr/>
+        </p:nvSpPr>
+        <p:spPr>
+          <a:xfrm>
+            <a:off x="8419060" y="3037054"/>
+            <a:ext cx="1740669" cy="369332"/>
+          </a:xfrm>
+          <a:prstGeom prst="rect">
+            <a:avLst/>
+          </a:prstGeom>
+          <a:noFill/>
+        </p:spPr>
+        <p:txBody>
+          <a:bodyPr wrap="none" rtlCol="0">
+            <a:spAutoFit/>
+          </a:bodyPr>
+          <a:lstStyle/>
+          <a:p>
+            <a:r>
+              <a:rPr lang="en-US" dirty="0">
+                <a:solidFill>
+                  <a:schemeClr val="accent6">
+                    <a:lumMod val="75000"/>
+                  </a:schemeClr>
+                </a:solidFill>
+              </a:rPr>
+              <a:t>WDATA, WVALID</a:t>
+            </a:r>
+          </a:p>
+        </p:txBody>
+      </p:sp>
+      <p:cxnSp>
+        <p:nvCxnSpPr>
+          <p:cNvPr id="24" name="Straight Arrow Connector 23">
+            <a:extLst>
+              <a:ext uri="{FF2B5EF4-FFF2-40B4-BE49-F238E27FC236}">
+                <a16:creationId xmlns:a16="http://schemas.microsoft.com/office/drawing/2014/main" id="{5AB4258A-3731-A6F7-1227-FF77916A3736}"/>
+              </a:ext>
+            </a:extLst>
+          </p:cNvPr>
+          <p:cNvCxnSpPr>
+            <a:cxnSpLocks/>
+          </p:cNvCxnSpPr>
+          <p:nvPr/>
+        </p:nvCxnSpPr>
+        <p:spPr>
+          <a:xfrm flipH="1">
+            <a:off x="8252937" y="4570015"/>
+            <a:ext cx="2204566" cy="0"/>
+          </a:xfrm>
+          <a:prstGeom prst="straightConnector1">
+            <a:avLst/>
+          </a:prstGeom>
+          <a:ln w="25400">
+            <a:solidFill>
+              <a:srgbClr val="7030A0"/>
+            </a:solidFill>
+            <a:tailEnd type="triangle"/>
+          </a:ln>
+        </p:spPr>
+        <p:style>
+          <a:lnRef idx="1">
+            <a:schemeClr val="accent1"/>
+          </a:lnRef>
+          <a:fillRef idx="0">
+            <a:schemeClr val="accent1"/>
+          </a:fillRef>
+          <a:effectRef idx="0">
+            <a:schemeClr val="accent1"/>
+          </a:effectRef>
+          <a:fontRef idx="minor">
+            <a:schemeClr val="tx1"/>
+          </a:fontRef>
+        </p:style>
+      </p:cxnSp>
+      <p:sp>
+        <p:nvSpPr>
+          <p:cNvPr id="25" name="TextBox 24">
+            <a:extLst>
+              <a:ext uri="{FF2B5EF4-FFF2-40B4-BE49-F238E27FC236}">
+                <a16:creationId xmlns:a16="http://schemas.microsoft.com/office/drawing/2014/main" id="{57A1F57A-4D77-A7EC-3C8B-C80B4F850ED0}"/>
+              </a:ext>
+            </a:extLst>
+          </p:cNvPr>
+          <p:cNvSpPr txBox="1"/>
+          <p:nvPr/>
+        </p:nvSpPr>
+        <p:spPr>
+          <a:xfrm>
+            <a:off x="8870701" y="3542024"/>
+            <a:ext cx="1008096" cy="369332"/>
+          </a:xfrm>
+          <a:prstGeom prst="rect">
+            <a:avLst/>
+          </a:prstGeom>
+          <a:noFill/>
+        </p:spPr>
+        <p:txBody>
+          <a:bodyPr wrap="none" rtlCol="0">
+            <a:spAutoFit/>
+          </a:bodyPr>
+          <a:lstStyle/>
+          <a:p>
+            <a:r>
+              <a:rPr lang="en-US" dirty="0">
+                <a:solidFill>
+                  <a:srgbClr val="7030A0"/>
+                </a:solidFill>
+              </a:rPr>
+              <a:t>WREADY</a:t>
+            </a:r>
+          </a:p>
+        </p:txBody>
+      </p:sp>
+      <p:cxnSp>
+        <p:nvCxnSpPr>
+          <p:cNvPr id="26" name="Straight Arrow Connector 25">
+            <a:extLst>
+              <a:ext uri="{FF2B5EF4-FFF2-40B4-BE49-F238E27FC236}">
+                <a16:creationId xmlns:a16="http://schemas.microsoft.com/office/drawing/2014/main" id="{B7229FA3-5309-94CD-425C-A03030D3ACCE}"/>
+              </a:ext>
+            </a:extLst>
+          </p:cNvPr>
+          <p:cNvCxnSpPr>
+            <a:cxnSpLocks/>
+          </p:cNvCxnSpPr>
+          <p:nvPr/>
+        </p:nvCxnSpPr>
+        <p:spPr>
+          <a:xfrm>
+            <a:off x="8285322" y="5228675"/>
+            <a:ext cx="2222851" cy="0"/>
+          </a:xfrm>
+          <a:prstGeom prst="straightConnector1">
+            <a:avLst/>
+          </a:prstGeom>
+          <a:ln w="25400">
+            <a:solidFill>
+              <a:srgbClr val="0070C0"/>
+            </a:solidFill>
+            <a:tailEnd type="triangle"/>
+          </a:ln>
+        </p:spPr>
+        <p:style>
+          <a:lnRef idx="1">
+            <a:schemeClr val="accent1"/>
+          </a:lnRef>
+          <a:fillRef idx="0">
+            <a:schemeClr val="accent1"/>
+          </a:fillRef>
+          <a:effectRef idx="0">
+            <a:schemeClr val="accent1"/>
+          </a:effectRef>
+          <a:fontRef idx="minor">
+            <a:schemeClr val="tx1"/>
+          </a:fontRef>
+        </p:style>
+      </p:cxnSp>
+      <p:sp>
+        <p:nvSpPr>
+          <p:cNvPr id="27" name="TextBox 26">
+            <a:extLst>
+              <a:ext uri="{FF2B5EF4-FFF2-40B4-BE49-F238E27FC236}">
+                <a16:creationId xmlns:a16="http://schemas.microsoft.com/office/drawing/2014/main" id="{2768E453-8B20-1770-033E-BC6E3F0319A6}"/>
+              </a:ext>
+            </a:extLst>
+          </p:cNvPr>
+          <p:cNvSpPr txBox="1"/>
+          <p:nvPr/>
+        </p:nvSpPr>
+        <p:spPr>
+          <a:xfrm>
+            <a:off x="8950851" y="4812282"/>
+            <a:ext cx="927946" cy="369332"/>
+          </a:xfrm>
+          <a:prstGeom prst="rect">
+            <a:avLst/>
+          </a:prstGeom>
+          <a:noFill/>
+        </p:spPr>
+        <p:txBody>
+          <a:bodyPr wrap="none" rtlCol="0">
+            <a:spAutoFit/>
+          </a:bodyPr>
+          <a:lstStyle/>
+          <a:p>
+            <a:r>
+              <a:rPr lang="en-US" dirty="0">
+                <a:solidFill>
+                  <a:schemeClr val="accent6">
+                    <a:lumMod val="75000"/>
+                  </a:schemeClr>
+                </a:solidFill>
+              </a:rPr>
+              <a:t>BREADY</a:t>
+            </a:r>
+          </a:p>
+        </p:txBody>
+      </p:sp>
+      <p:sp>
+        <p:nvSpPr>
+          <p:cNvPr id="28" name="TextBox 27">
+            <a:extLst>
+              <a:ext uri="{FF2B5EF4-FFF2-40B4-BE49-F238E27FC236}">
+                <a16:creationId xmlns:a16="http://schemas.microsoft.com/office/drawing/2014/main" id="{8F3C2E96-7B82-8E50-FA24-1A0981D06B21}"/>
+              </a:ext>
+            </a:extLst>
+          </p:cNvPr>
+          <p:cNvSpPr txBox="1"/>
+          <p:nvPr/>
+        </p:nvSpPr>
+        <p:spPr>
+          <a:xfrm>
+            <a:off x="7199006" y="1453717"/>
+            <a:ext cx="1490321" cy="400110"/>
+          </a:xfrm>
+          <a:prstGeom prst="rect">
+            <a:avLst/>
+          </a:prstGeom>
+          <a:noFill/>
+        </p:spPr>
+        <p:txBody>
+          <a:bodyPr wrap="square" rtlCol="0">
+            <a:spAutoFit/>
+          </a:bodyPr>
+          <a:lstStyle/>
+          <a:p>
+            <a:r>
+              <a:rPr lang="en-US" sz="2000" dirty="0">
+                <a:solidFill>
+                  <a:schemeClr val="accent5">
+                    <a:lumMod val="75000"/>
+                  </a:schemeClr>
+                </a:solidFill>
+              </a:rPr>
+              <a:t>MASTER</a:t>
+            </a:r>
+            <a:endParaRPr lang="en-US" dirty="0">
+              <a:solidFill>
+                <a:schemeClr val="accent5">
+                  <a:lumMod val="75000"/>
+                </a:schemeClr>
+              </a:solidFill>
+            </a:endParaRPr>
+          </a:p>
+        </p:txBody>
+      </p:sp>
+      <p:sp>
+        <p:nvSpPr>
+          <p:cNvPr id="29" name="TextBox 28">
+            <a:extLst>
+              <a:ext uri="{FF2B5EF4-FFF2-40B4-BE49-F238E27FC236}">
+                <a16:creationId xmlns:a16="http://schemas.microsoft.com/office/drawing/2014/main" id="{56370B95-4F75-1775-C4C8-E67F4121738B}"/>
+              </a:ext>
+            </a:extLst>
+          </p:cNvPr>
+          <p:cNvSpPr txBox="1"/>
+          <p:nvPr/>
+        </p:nvSpPr>
+        <p:spPr>
+          <a:xfrm>
+            <a:off x="10609902" y="1499958"/>
+            <a:ext cx="1490321" cy="400110"/>
+          </a:xfrm>
+          <a:prstGeom prst="rect">
+            <a:avLst/>
+          </a:prstGeom>
+          <a:noFill/>
+        </p:spPr>
+        <p:txBody>
+          <a:bodyPr wrap="square" rtlCol="0">
+            <a:spAutoFit/>
+          </a:bodyPr>
+          <a:lstStyle/>
+          <a:p>
+            <a:r>
+              <a:rPr lang="en-US" sz="2000" dirty="0">
+                <a:solidFill>
+                  <a:schemeClr val="tx2">
+                    <a:lumMod val="60000"/>
+                    <a:lumOff val="40000"/>
+                  </a:schemeClr>
+                </a:solidFill>
+              </a:rPr>
+              <a:t>SLAVE</a:t>
+            </a:r>
+            <a:endParaRPr lang="en-US" dirty="0">
+              <a:solidFill>
+                <a:schemeClr val="tx2">
+                  <a:lumMod val="60000"/>
+                  <a:lumOff val="40000"/>
+                </a:schemeClr>
+              </a:solidFill>
+            </a:endParaRPr>
+          </a:p>
+        </p:txBody>
+      </p:sp>
+    </p:spTree>
+    <p:extLst>
+      <p:ext uri="{BB962C8B-B14F-4D97-AF65-F5344CB8AC3E}">
+        <p14:creationId xmlns:p14="http://schemas.microsoft.com/office/powerpoint/2010/main" val="3953912976"/>
+      </p:ext>
+    </p:extLst>
+  </p:cSld>
+  <p:clrMapOvr>
+    <a:masterClrMapping/>
+  </p:clrMapOvr>
+</p:sld>
+</file>
+
+<file path=ppt/slides/slide23.xml><?xml version="1.0" encoding="utf-8"?>
+<p:sld xmlns:a="http://schemas.openxmlformats.org/drawingml/2006/main" xmlns:r="http://schemas.openxmlformats.org/officeDocument/2006/relationships" xmlns:p="http://schemas.openxmlformats.org/presentationml/2006/main">
+  <p:cSld>
+    <p:spTree>
+      <p:nvGrpSpPr>
         <p:cNvPr id="1" name=""/>
         <p:cNvGrpSpPr/>
         <p:nvPr/>
@@ -14098,7 +14930,7 @@
           <a:p>
             <a:fld id="{629637A9-119A-49DA-BD12-AAC58B377D80}" type="slidenum">
               <a:rPr lang="en-US" smtClean="0"/>
-              <a:t>22</a:t>
+              <a:t>23</a:t>
             </a:fld>
             <a:endParaRPr lang="en-US" dirty="0"/>
           </a:p>
@@ -14296,7 +15128,7 @@
 </p:sld>
 </file>
 
-<file path=ppt/slides/slide23.xml><?xml version="1.0" encoding="utf-8"?>
+<file path=ppt/slides/slide24.xml><?xml version="1.0" encoding="utf-8"?>
 <p:sld xmlns:a="http://schemas.openxmlformats.org/drawingml/2006/main" xmlns:r="http://schemas.openxmlformats.org/officeDocument/2006/relationships" xmlns:p="http://schemas.openxmlformats.org/presentationml/2006/main">
   <p:cSld>
     <p:spTree>
@@ -14400,7 +15232,7 @@
           <a:p>
             <a:fld id="{629637A9-119A-49DA-BD12-AAC58B377D80}" type="slidenum">
               <a:rPr lang="en-US" smtClean="0"/>
-              <a:t>23</a:t>
+              <a:t>24</a:t>
             </a:fld>
             <a:endParaRPr lang="en-US" dirty="0"/>
           </a:p>
@@ -14630,7 +15462,7 @@
 </p:sld>
 </file>
 
-<file path=ppt/slides/slide24.xml><?xml version="1.0" encoding="utf-8"?>
+<file path=ppt/slides/slide25.xml><?xml version="1.0" encoding="utf-8"?>
 <p:sld xmlns:a="http://schemas.openxmlformats.org/drawingml/2006/main" xmlns:r="http://schemas.openxmlformats.org/officeDocument/2006/relationships" xmlns:p="http://schemas.openxmlformats.org/presentationml/2006/main">
   <p:cSld>
     <p:spTree>
@@ -14894,7 +15726,7 @@
           <a:p>
             <a:fld id="{629637A9-119A-49DA-BD12-AAC58B377D80}" type="slidenum">
               <a:rPr lang="en-US" smtClean="0"/>
-              <a:t>24</a:t>
+              <a:t>25</a:t>
             </a:fld>
             <a:endParaRPr lang="en-US" dirty="0"/>
           </a:p>
@@ -14913,7 +15745,7 @@
 </p:sld>
 </file>
 
-<file path=ppt/slides/slide25.xml><?xml version="1.0" encoding="utf-8"?>
+<file path=ppt/slides/slide26.xml><?xml version="1.0" encoding="utf-8"?>
 <p:sld xmlns:a="http://schemas.openxmlformats.org/drawingml/2006/main" xmlns:r="http://schemas.openxmlformats.org/officeDocument/2006/relationships" xmlns:p="http://schemas.openxmlformats.org/presentationml/2006/main">
   <p:cSld>
     <p:spTree>
@@ -15042,7 +15874,7 @@
           <a:p>
             <a:fld id="{629637A9-119A-49DA-BD12-AAC58B377D80}" type="slidenum">
               <a:rPr lang="en-US" smtClean="0"/>
-              <a:t>25</a:t>
+              <a:t>26</a:t>
             </a:fld>
             <a:endParaRPr lang="en-US" dirty="0"/>
           </a:p>
@@ -15128,7 +15960,7 @@
 </p:sld>
 </file>
 
-<file path=ppt/slides/slide26.xml><?xml version="1.0" encoding="utf-8"?>
+<file path=ppt/slides/slide27.xml><?xml version="1.0" encoding="utf-8"?>
 <p:sld xmlns:a="http://schemas.openxmlformats.org/drawingml/2006/main" xmlns:r="http://schemas.openxmlformats.org/officeDocument/2006/relationships" xmlns:p="http://schemas.openxmlformats.org/presentationml/2006/main">
   <p:cSld>
     <p:spTree>
@@ -15422,7 +16254,7 @@
           <a:p>
             <a:fld id="{629637A9-119A-49DA-BD12-AAC58B377D80}" type="slidenum">
               <a:rPr lang="en-US" smtClean="0"/>
-              <a:t>26</a:t>
+              <a:t>27</a:t>
             </a:fld>
             <a:endParaRPr lang="en-US" dirty="0"/>
           </a:p>
@@ -16062,7 +16894,7 @@
 </p:sld>
 </file>
 
-<file path=ppt/slides/slide27.xml><?xml version="1.0" encoding="utf-8"?>
+<file path=ppt/slides/slide28.xml><?xml version="1.0" encoding="utf-8"?>
 <p:sld xmlns:a="http://schemas.openxmlformats.org/drawingml/2006/main" xmlns:r="http://schemas.openxmlformats.org/officeDocument/2006/relationships" xmlns:p="http://schemas.openxmlformats.org/presentationml/2006/main">
   <p:cSld>
     <p:spTree>
@@ -16204,7 +17036,7 @@
           <a:p>
             <a:fld id="{629637A9-119A-49DA-BD12-AAC58B377D80}" type="slidenum">
               <a:rPr lang="en-US" smtClean="0"/>
-              <a:t>27</a:t>
+              <a:t>28</a:t>
             </a:fld>
             <a:endParaRPr lang="en-US" dirty="0"/>
           </a:p>
@@ -16253,7 +17085,7 @@
 </p:sld>
 </file>
 
-<file path=ppt/slides/slide28.xml><?xml version="1.0" encoding="utf-8"?>
+<file path=ppt/slides/slide29.xml><?xml version="1.0" encoding="utf-8"?>
 <p:sld xmlns:a="http://schemas.openxmlformats.org/drawingml/2006/main" xmlns:r="http://schemas.openxmlformats.org/officeDocument/2006/relationships" xmlns:p="http://schemas.openxmlformats.org/presentationml/2006/main">
   <p:cSld>
     <p:spTree>
@@ -16513,7 +17345,7 @@
           <a:p>
             <a:fld id="{629637A9-119A-49DA-BD12-AAC58B377D80}" type="slidenum">
               <a:rPr lang="en-US" smtClean="0"/>
-              <a:t>28</a:t>
+              <a:t>29</a:t>
             </a:fld>
             <a:endParaRPr lang="en-US" dirty="0"/>
           </a:p>
@@ -16523,196 +17355,6 @@
     <p:extLst>
       <p:ext uri="{BB962C8B-B14F-4D97-AF65-F5344CB8AC3E}">
         <p14:creationId xmlns:p14="http://schemas.microsoft.com/office/powerpoint/2010/main" val="2586704120"/>
-      </p:ext>
-    </p:extLst>
-  </p:cSld>
-  <p:clrMapOvr>
-    <a:masterClrMapping/>
-  </p:clrMapOvr>
-</p:sld>
-</file>
-
-<file path=ppt/slides/slide29.xml><?xml version="1.0" encoding="utf-8"?>
-<p:sld xmlns:a="http://schemas.openxmlformats.org/drawingml/2006/main" xmlns:r="http://schemas.openxmlformats.org/officeDocument/2006/relationships" xmlns:p="http://schemas.openxmlformats.org/presentationml/2006/main">
-  <p:cSld>
-    <p:spTree>
-      <p:nvGrpSpPr>
-        <p:cNvPr id="1" name="">
-          <a:extLst>
-            <a:ext uri="{FF2B5EF4-FFF2-40B4-BE49-F238E27FC236}">
-              <a16:creationId xmlns:a16="http://schemas.microsoft.com/office/drawing/2014/main" id="{B5F3C04C-9E18-063F-CC87-04193799857C}"/>
-            </a:ext>
-          </a:extLst>
-        </p:cNvPr>
-        <p:cNvGrpSpPr/>
-        <p:nvPr/>
-      </p:nvGrpSpPr>
-      <p:grpSpPr>
-        <a:xfrm>
-          <a:off x="0" y="0"/>
-          <a:ext cx="0" cy="0"/>
-          <a:chOff x="0" y="0"/>
-          <a:chExt cx="0" cy="0"/>
-        </a:xfrm>
-      </p:grpSpPr>
-      <p:sp>
-        <p:nvSpPr>
-          <p:cNvPr id="2" name="Title 1">
-            <a:extLst>
-              <a:ext uri="{FF2B5EF4-FFF2-40B4-BE49-F238E27FC236}">
-                <a16:creationId xmlns:a16="http://schemas.microsoft.com/office/drawing/2014/main" id="{91C66036-A7DA-9928-FBF3-456DBED59FA6}"/>
-              </a:ext>
-            </a:extLst>
-          </p:cNvPr>
-          <p:cNvSpPr>
-            <a:spLocks noGrp="1"/>
-          </p:cNvSpPr>
-          <p:nvPr>
-            <p:ph type="title"/>
-          </p:nvPr>
-        </p:nvSpPr>
-        <p:spPr/>
-        <p:txBody>
-          <a:bodyPr/>
-          <a:lstStyle/>
-          <a:p>
-            <a:r>
-              <a:rPr lang="en-US" dirty="0"/>
-              <a:t>Outline</a:t>
-            </a:r>
-          </a:p>
-        </p:txBody>
-      </p:sp>
-      <p:sp>
-        <p:nvSpPr>
-          <p:cNvPr id="3" name="Content Placeholder 2">
-            <a:extLst>
-              <a:ext uri="{FF2B5EF4-FFF2-40B4-BE49-F238E27FC236}">
-                <a16:creationId xmlns:a16="http://schemas.microsoft.com/office/drawing/2014/main" id="{BD0E5DEB-8119-61CA-0F89-916C38C3423E}"/>
-              </a:ext>
-            </a:extLst>
-          </p:cNvPr>
-          <p:cNvSpPr>
-            <a:spLocks noGrp="1"/>
-          </p:cNvSpPr>
-          <p:nvPr>
-            <p:ph idx="1"/>
-          </p:nvPr>
-        </p:nvSpPr>
-        <p:spPr/>
-        <p:txBody>
-          <a:bodyPr>
-            <a:normAutofit/>
-          </a:bodyPr>
-          <a:lstStyle/>
-          <a:p>
-            <a:r>
-              <a:rPr lang="en-US" sz="2400" dirty="0"/>
-              <a:t>Random Access Memory and Memory-Mapped Registers</a:t>
-            </a:r>
-          </a:p>
-          <a:p>
-            <a:r>
-              <a:rPr lang="en-US" sz="2400" dirty="0"/>
-              <a:t>Processor Interfaces with AXI-Lite</a:t>
-            </a:r>
-          </a:p>
-          <a:p>
-            <a:r>
-              <a:rPr lang="en-US" sz="2400" dirty="0"/>
-              <a:t>Implementing AXI-Lite Interface in Vitis HLS</a:t>
-            </a:r>
-          </a:p>
-          <a:p>
-            <a:endParaRPr lang="en-US" sz="2400" dirty="0"/>
-          </a:p>
-        </p:txBody>
-      </p:sp>
-      <p:sp>
-        <p:nvSpPr>
-          <p:cNvPr id="4" name="Slide Number Placeholder 3">
-            <a:extLst>
-              <a:ext uri="{FF2B5EF4-FFF2-40B4-BE49-F238E27FC236}">
-                <a16:creationId xmlns:a16="http://schemas.microsoft.com/office/drawing/2014/main" id="{024DBF04-821A-B2C8-41F7-2B90C026B067}"/>
-              </a:ext>
-            </a:extLst>
-          </p:cNvPr>
-          <p:cNvSpPr>
-            <a:spLocks noGrp="1"/>
-          </p:cNvSpPr>
-          <p:nvPr>
-            <p:ph type="sldNum" sz="quarter" idx="12"/>
-          </p:nvPr>
-        </p:nvSpPr>
-        <p:spPr/>
-        <p:txBody>
-          <a:bodyPr/>
-          <a:lstStyle/>
-          <a:p>
-            <a:fld id="{629637A9-119A-49DA-BD12-AAC58B377D80}" type="slidenum">
-              <a:rPr lang="en-US" smtClean="0"/>
-              <a:t>29</a:t>
-            </a:fld>
-            <a:endParaRPr lang="en-US" dirty="0"/>
-          </a:p>
-        </p:txBody>
-      </p:sp>
-      <p:sp>
-        <p:nvSpPr>
-          <p:cNvPr id="5" name="Arrow: Right 4">
-            <a:extLst>
-              <a:ext uri="{FF2B5EF4-FFF2-40B4-BE49-F238E27FC236}">
-                <a16:creationId xmlns:a16="http://schemas.microsoft.com/office/drawing/2014/main" id="{D9E64F44-20E5-CE3A-8A11-76A3BCB19B05}"/>
-              </a:ext>
-            </a:extLst>
-          </p:cNvPr>
-          <p:cNvSpPr/>
-          <p:nvPr/>
-        </p:nvSpPr>
-        <p:spPr>
-          <a:xfrm>
-            <a:off x="381162" y="2506333"/>
-            <a:ext cx="938784" cy="484632"/>
-          </a:xfrm>
-          <a:prstGeom prst="rightArrow">
-            <a:avLst/>
-          </a:prstGeom>
-          <a:solidFill>
-            <a:schemeClr val="accent1">
-              <a:lumMod val="40000"/>
-              <a:lumOff val="60000"/>
-            </a:schemeClr>
-          </a:solidFill>
-        </p:spPr>
-        <p:style>
-          <a:lnRef idx="2">
-            <a:schemeClr val="accent1">
-              <a:shade val="50000"/>
-            </a:schemeClr>
-          </a:lnRef>
-          <a:fillRef idx="1">
-            <a:schemeClr val="accent1"/>
-          </a:fillRef>
-          <a:effectRef idx="0">
-            <a:schemeClr val="accent1"/>
-          </a:effectRef>
-          <a:fontRef idx="minor">
-            <a:schemeClr val="lt1"/>
-          </a:fontRef>
-        </p:style>
-        <p:txBody>
-          <a:bodyPr rtlCol="0" anchor="ctr"/>
-          <a:lstStyle/>
-          <a:p>
-            <a:pPr algn="ctr"/>
-            <a:endParaRPr lang="en-US"/>
-          </a:p>
-        </p:txBody>
-      </p:sp>
-    </p:spTree>
-    <p:extLst>
-      <p:ext uri="{BB962C8B-B14F-4D97-AF65-F5344CB8AC3E}">
-        <p14:creationId xmlns:p14="http://schemas.microsoft.com/office/powerpoint/2010/main" val="2189979385"/>
       </p:ext>
     </p:extLst>
   </p:cSld>
@@ -16913,6 +17555,196 @@
 </file>
 
 <file path=ppt/slides/slide30.xml><?xml version="1.0" encoding="utf-8"?>
+<p:sld xmlns:a="http://schemas.openxmlformats.org/drawingml/2006/main" xmlns:r="http://schemas.openxmlformats.org/officeDocument/2006/relationships" xmlns:p="http://schemas.openxmlformats.org/presentationml/2006/main">
+  <p:cSld>
+    <p:spTree>
+      <p:nvGrpSpPr>
+        <p:cNvPr id="1" name="">
+          <a:extLst>
+            <a:ext uri="{FF2B5EF4-FFF2-40B4-BE49-F238E27FC236}">
+              <a16:creationId xmlns:a16="http://schemas.microsoft.com/office/drawing/2014/main" id="{B5F3C04C-9E18-063F-CC87-04193799857C}"/>
+            </a:ext>
+          </a:extLst>
+        </p:cNvPr>
+        <p:cNvGrpSpPr/>
+        <p:nvPr/>
+      </p:nvGrpSpPr>
+      <p:grpSpPr>
+        <a:xfrm>
+          <a:off x="0" y="0"/>
+          <a:ext cx="0" cy="0"/>
+          <a:chOff x="0" y="0"/>
+          <a:chExt cx="0" cy="0"/>
+        </a:xfrm>
+      </p:grpSpPr>
+      <p:sp>
+        <p:nvSpPr>
+          <p:cNvPr id="2" name="Title 1">
+            <a:extLst>
+              <a:ext uri="{FF2B5EF4-FFF2-40B4-BE49-F238E27FC236}">
+                <a16:creationId xmlns:a16="http://schemas.microsoft.com/office/drawing/2014/main" id="{91C66036-A7DA-9928-FBF3-456DBED59FA6}"/>
+              </a:ext>
+            </a:extLst>
+          </p:cNvPr>
+          <p:cNvSpPr>
+            <a:spLocks noGrp="1"/>
+          </p:cNvSpPr>
+          <p:nvPr>
+            <p:ph type="title"/>
+          </p:nvPr>
+        </p:nvSpPr>
+        <p:spPr/>
+        <p:txBody>
+          <a:bodyPr/>
+          <a:lstStyle/>
+          <a:p>
+            <a:r>
+              <a:rPr lang="en-US" dirty="0"/>
+              <a:t>Outline</a:t>
+            </a:r>
+          </a:p>
+        </p:txBody>
+      </p:sp>
+      <p:sp>
+        <p:nvSpPr>
+          <p:cNvPr id="3" name="Content Placeholder 2">
+            <a:extLst>
+              <a:ext uri="{FF2B5EF4-FFF2-40B4-BE49-F238E27FC236}">
+                <a16:creationId xmlns:a16="http://schemas.microsoft.com/office/drawing/2014/main" id="{BD0E5DEB-8119-61CA-0F89-916C38C3423E}"/>
+              </a:ext>
+            </a:extLst>
+          </p:cNvPr>
+          <p:cNvSpPr>
+            <a:spLocks noGrp="1"/>
+          </p:cNvSpPr>
+          <p:nvPr>
+            <p:ph idx="1"/>
+          </p:nvPr>
+        </p:nvSpPr>
+        <p:spPr/>
+        <p:txBody>
+          <a:bodyPr>
+            <a:normAutofit/>
+          </a:bodyPr>
+          <a:lstStyle/>
+          <a:p>
+            <a:r>
+              <a:rPr lang="en-US" sz="2400" dirty="0"/>
+              <a:t>Random Access Memory and Memory-Mapped Registers</a:t>
+            </a:r>
+          </a:p>
+          <a:p>
+            <a:r>
+              <a:rPr lang="en-US" sz="2400" dirty="0"/>
+              <a:t>Processor Interfaces with AXI-Lite</a:t>
+            </a:r>
+          </a:p>
+          <a:p>
+            <a:r>
+              <a:rPr lang="en-US" sz="2400" dirty="0"/>
+              <a:t>Implementing AXI-Lite Interface in Vitis HLS</a:t>
+            </a:r>
+          </a:p>
+          <a:p>
+            <a:endParaRPr lang="en-US" sz="2400" dirty="0"/>
+          </a:p>
+        </p:txBody>
+      </p:sp>
+      <p:sp>
+        <p:nvSpPr>
+          <p:cNvPr id="4" name="Slide Number Placeholder 3">
+            <a:extLst>
+              <a:ext uri="{FF2B5EF4-FFF2-40B4-BE49-F238E27FC236}">
+                <a16:creationId xmlns:a16="http://schemas.microsoft.com/office/drawing/2014/main" id="{024DBF04-821A-B2C8-41F7-2B90C026B067}"/>
+              </a:ext>
+            </a:extLst>
+          </p:cNvPr>
+          <p:cNvSpPr>
+            <a:spLocks noGrp="1"/>
+          </p:cNvSpPr>
+          <p:nvPr>
+            <p:ph type="sldNum" sz="quarter" idx="12"/>
+          </p:nvPr>
+        </p:nvSpPr>
+        <p:spPr/>
+        <p:txBody>
+          <a:bodyPr/>
+          <a:lstStyle/>
+          <a:p>
+            <a:fld id="{629637A9-119A-49DA-BD12-AAC58B377D80}" type="slidenum">
+              <a:rPr lang="en-US" smtClean="0"/>
+              <a:t>30</a:t>
+            </a:fld>
+            <a:endParaRPr lang="en-US" dirty="0"/>
+          </a:p>
+        </p:txBody>
+      </p:sp>
+      <p:sp>
+        <p:nvSpPr>
+          <p:cNvPr id="5" name="Arrow: Right 4">
+            <a:extLst>
+              <a:ext uri="{FF2B5EF4-FFF2-40B4-BE49-F238E27FC236}">
+                <a16:creationId xmlns:a16="http://schemas.microsoft.com/office/drawing/2014/main" id="{D9E64F44-20E5-CE3A-8A11-76A3BCB19B05}"/>
+              </a:ext>
+            </a:extLst>
+          </p:cNvPr>
+          <p:cNvSpPr/>
+          <p:nvPr/>
+        </p:nvSpPr>
+        <p:spPr>
+          <a:xfrm>
+            <a:off x="381162" y="2506333"/>
+            <a:ext cx="938784" cy="484632"/>
+          </a:xfrm>
+          <a:prstGeom prst="rightArrow">
+            <a:avLst/>
+          </a:prstGeom>
+          <a:solidFill>
+            <a:schemeClr val="accent1">
+              <a:lumMod val="40000"/>
+              <a:lumOff val="60000"/>
+            </a:schemeClr>
+          </a:solidFill>
+        </p:spPr>
+        <p:style>
+          <a:lnRef idx="2">
+            <a:schemeClr val="accent1">
+              <a:shade val="50000"/>
+            </a:schemeClr>
+          </a:lnRef>
+          <a:fillRef idx="1">
+            <a:schemeClr val="accent1"/>
+          </a:fillRef>
+          <a:effectRef idx="0">
+            <a:schemeClr val="accent1"/>
+          </a:effectRef>
+          <a:fontRef idx="minor">
+            <a:schemeClr val="lt1"/>
+          </a:fontRef>
+        </p:style>
+        <p:txBody>
+          <a:bodyPr rtlCol="0" anchor="ctr"/>
+          <a:lstStyle/>
+          <a:p>
+            <a:pPr algn="ctr"/>
+            <a:endParaRPr lang="en-US"/>
+          </a:p>
+        </p:txBody>
+      </p:sp>
+    </p:spTree>
+    <p:extLst>
+      <p:ext uri="{BB962C8B-B14F-4D97-AF65-F5344CB8AC3E}">
+        <p14:creationId xmlns:p14="http://schemas.microsoft.com/office/powerpoint/2010/main" val="2189979385"/>
+      </p:ext>
+    </p:extLst>
+  </p:cSld>
+  <p:clrMapOvr>
+    <a:masterClrMapping/>
+  </p:clrMapOvr>
+</p:sld>
+</file>
+
+<file path=ppt/slides/slide31.xml><?xml version="1.0" encoding="utf-8"?>
 <p:sld xmlns:a="http://schemas.openxmlformats.org/drawingml/2006/main" xmlns:r="http://schemas.openxmlformats.org/officeDocument/2006/relationships" xmlns:p="http://schemas.openxmlformats.org/presentationml/2006/main">
   <p:cSld>
     <p:spTree>
@@ -17210,7 +18042,7 @@
           <a:p>
             <a:fld id="{629637A9-119A-49DA-BD12-AAC58B377D80}" type="slidenum">
               <a:rPr lang="en-US" smtClean="0"/>
-              <a:t>30</a:t>
+              <a:t>31</a:t>
             </a:fld>
             <a:endParaRPr lang="en-US" dirty="0"/>
           </a:p>
@@ -18521,510 +19353,6 @@
 </p:sld>
 </file>
 
-<file path=ppt/slides/slide31.xml><?xml version="1.0" encoding="utf-8"?>
-<p:sld xmlns:a="http://schemas.openxmlformats.org/drawingml/2006/main" xmlns:r="http://schemas.openxmlformats.org/officeDocument/2006/relationships" xmlns:p="http://schemas.openxmlformats.org/presentationml/2006/main">
-  <p:cSld>
-    <p:spTree>
-      <p:nvGrpSpPr>
-        <p:cNvPr id="1" name=""/>
-        <p:cNvGrpSpPr/>
-        <p:nvPr/>
-      </p:nvGrpSpPr>
-      <p:grpSpPr>
-        <a:xfrm>
-          <a:off x="0" y="0"/>
-          <a:ext cx="0" cy="0"/>
-          <a:chOff x="0" y="0"/>
-          <a:chExt cx="0" cy="0"/>
-        </a:xfrm>
-      </p:grpSpPr>
-      <p:sp>
-        <p:nvSpPr>
-          <p:cNvPr id="2" name="Title 1">
-            <a:extLst>
-              <a:ext uri="{FF2B5EF4-FFF2-40B4-BE49-F238E27FC236}">
-                <a16:creationId xmlns:a16="http://schemas.microsoft.com/office/drawing/2014/main" id="{8106DCBE-017A-2D20-1A2E-80B827B2F4D1}"/>
-              </a:ext>
-            </a:extLst>
-          </p:cNvPr>
-          <p:cNvSpPr>
-            <a:spLocks noGrp="1"/>
-          </p:cNvSpPr>
-          <p:nvPr>
-            <p:ph type="title"/>
-          </p:nvPr>
-        </p:nvSpPr>
-        <p:spPr/>
-        <p:txBody>
-          <a:bodyPr/>
-          <a:lstStyle/>
-          <a:p>
-            <a:r>
-              <a:rPr lang="en-US" dirty="0"/>
-              <a:t>HLS vs. RTL</a:t>
-            </a:r>
-          </a:p>
-        </p:txBody>
-      </p:sp>
-      <p:sp>
-        <p:nvSpPr>
-          <p:cNvPr id="3" name="Content Placeholder 2">
-            <a:extLst>
-              <a:ext uri="{FF2B5EF4-FFF2-40B4-BE49-F238E27FC236}">
-                <a16:creationId xmlns:a16="http://schemas.microsoft.com/office/drawing/2014/main" id="{A2A6C4DC-EA63-C1AE-66E5-7E45955A9B31}"/>
-              </a:ext>
-            </a:extLst>
-          </p:cNvPr>
-          <p:cNvSpPr>
-            <a:spLocks noGrp="1"/>
-          </p:cNvSpPr>
-          <p:nvPr>
-            <p:ph idx="1"/>
-          </p:nvPr>
-        </p:nvSpPr>
-        <p:spPr>
-          <a:xfrm>
-            <a:off x="1097279" y="1539277"/>
-            <a:ext cx="6484051" cy="4049481"/>
-          </a:xfrm>
-        </p:spPr>
-        <p:txBody>
-          <a:bodyPr>
-            <a:normAutofit lnSpcReduction="10000"/>
-          </a:bodyPr>
-          <a:lstStyle/>
-          <a:p>
-            <a:r>
-              <a:rPr lang="en-US" dirty="0">
-                <a:solidFill>
-                  <a:schemeClr val="accent1">
-                    <a:lumMod val="60000"/>
-                    <a:lumOff val="40000"/>
-                  </a:schemeClr>
-                </a:solidFill>
-              </a:rPr>
-              <a:t>RTL: Register Transfer Language</a:t>
-            </a:r>
-          </a:p>
-          <a:p>
-            <a:pPr lvl="1"/>
-            <a:r>
-              <a:rPr lang="en-US" dirty="0">
-                <a:solidFill>
-                  <a:schemeClr val="tx1"/>
-                </a:solidFill>
-              </a:rPr>
-              <a:t>Use specialized languages (e.g., </a:t>
-            </a:r>
-            <a:r>
-              <a:rPr lang="en-US" dirty="0" err="1">
-                <a:solidFill>
-                  <a:schemeClr val="tx1"/>
-                </a:solidFill>
-              </a:rPr>
-              <a:t>SystemVerilog</a:t>
-            </a:r>
-            <a:r>
-              <a:rPr lang="en-US" dirty="0">
-                <a:solidFill>
-                  <a:schemeClr val="tx1"/>
-                </a:solidFill>
-              </a:rPr>
-              <a:t>)</a:t>
-            </a:r>
-          </a:p>
-          <a:p>
-            <a:pPr lvl="1"/>
-            <a:r>
-              <a:rPr lang="en-US" dirty="0">
-                <a:solidFill>
-                  <a:schemeClr val="tx1"/>
-                </a:solidFill>
-              </a:rPr>
-              <a:t>Manually schedule action in each clock cycle</a:t>
-            </a:r>
-          </a:p>
-          <a:p>
-            <a:pPr lvl="1"/>
-            <a:r>
-              <a:rPr lang="en-US" dirty="0">
-                <a:solidFill>
-                  <a:schemeClr val="tx1"/>
-                </a:solidFill>
-              </a:rPr>
-              <a:t>Interfaces designed from scratch</a:t>
-            </a:r>
-          </a:p>
-          <a:p>
-            <a:pPr lvl="1"/>
-            <a:r>
-              <a:rPr lang="en-US" dirty="0"/>
-              <a:t>High control, supports custom interfaces</a:t>
-            </a:r>
-          </a:p>
-          <a:p>
-            <a:pPr lvl="1"/>
-            <a:r>
-              <a:rPr lang="en-US" dirty="0"/>
-              <a:t>But time-consuming, difficult to maintain</a:t>
-            </a:r>
-          </a:p>
-          <a:p>
-            <a:pPr lvl="1"/>
-            <a:endParaRPr lang="en-US" dirty="0"/>
-          </a:p>
-          <a:p>
-            <a:r>
-              <a:rPr lang="en-US" dirty="0">
-                <a:solidFill>
-                  <a:schemeClr val="accent1">
-                    <a:lumMod val="60000"/>
-                    <a:lumOff val="40000"/>
-                  </a:schemeClr>
-                </a:solidFill>
-              </a:rPr>
-              <a:t>HLS:  High-Level Synthesis</a:t>
-            </a:r>
-          </a:p>
-          <a:p>
-            <a:pPr lvl="1"/>
-            <a:r>
-              <a:rPr lang="en-US" dirty="0">
-                <a:solidFill>
-                  <a:schemeClr val="tx1"/>
-                </a:solidFill>
-              </a:rPr>
-              <a:t>Write in general purpose languages (e.g., C++)</a:t>
-            </a:r>
-          </a:p>
-          <a:p>
-            <a:pPr lvl="1"/>
-            <a:r>
-              <a:rPr lang="en-US" dirty="0"/>
-              <a:t>Clock-level schedule determined automatically by compiler</a:t>
-            </a:r>
-          </a:p>
-          <a:p>
-            <a:pPr lvl="1"/>
-            <a:r>
-              <a:rPr lang="en-US" dirty="0"/>
-              <a:t>API support for common interfaces (e.g., AXI)</a:t>
-            </a:r>
-          </a:p>
-          <a:p>
-            <a:pPr lvl="1"/>
-            <a:r>
-              <a:rPr lang="en-US" dirty="0"/>
-              <a:t>Sacrifice some performance and flexibility</a:t>
-            </a:r>
-          </a:p>
-          <a:p>
-            <a:pPr lvl="1"/>
-            <a:r>
-              <a:rPr lang="en-US" dirty="0"/>
-              <a:t>But enables rapid development</a:t>
-            </a:r>
-          </a:p>
-          <a:p>
-            <a:pPr lvl="1"/>
-            <a:endParaRPr lang="en-US" dirty="0"/>
-          </a:p>
-          <a:p>
-            <a:pPr lvl="1"/>
-            <a:endParaRPr lang="en-US" dirty="0"/>
-          </a:p>
-        </p:txBody>
-      </p:sp>
-      <p:sp>
-        <p:nvSpPr>
-          <p:cNvPr id="4" name="Slide Number Placeholder 3">
-            <a:extLst>
-              <a:ext uri="{FF2B5EF4-FFF2-40B4-BE49-F238E27FC236}">
-                <a16:creationId xmlns:a16="http://schemas.microsoft.com/office/drawing/2014/main" id="{1E341509-EEE1-4DD7-6915-99914D6B6271}"/>
-              </a:ext>
-            </a:extLst>
-          </p:cNvPr>
-          <p:cNvSpPr>
-            <a:spLocks noGrp="1"/>
-          </p:cNvSpPr>
-          <p:nvPr>
-            <p:ph type="sldNum" sz="quarter" idx="12"/>
-          </p:nvPr>
-        </p:nvSpPr>
-        <p:spPr/>
-        <p:txBody>
-          <a:bodyPr/>
-          <a:lstStyle/>
-          <a:p>
-            <a:fld id="{629637A9-119A-49DA-BD12-AAC58B377D80}" type="slidenum">
-              <a:rPr lang="en-US" smtClean="0"/>
-              <a:t>31</a:t>
-            </a:fld>
-            <a:endParaRPr lang="en-US" dirty="0"/>
-          </a:p>
-        </p:txBody>
-      </p:sp>
-      <p:pic>
-        <p:nvPicPr>
-          <p:cNvPr id="6" name="Picture 5">
-            <a:extLst>
-              <a:ext uri="{FF2B5EF4-FFF2-40B4-BE49-F238E27FC236}">
-                <a16:creationId xmlns:a16="http://schemas.microsoft.com/office/drawing/2014/main" id="{273B6D1C-45EA-A34F-2214-5F65D6BB1ED1}"/>
-              </a:ext>
-            </a:extLst>
-          </p:cNvPr>
-          <p:cNvPicPr>
-            <a:picLocks noChangeAspect="1"/>
-          </p:cNvPicPr>
-          <p:nvPr/>
-        </p:nvPicPr>
-        <p:blipFill>
-          <a:blip r:embed="rId2"/>
-          <a:stretch>
-            <a:fillRect/>
-          </a:stretch>
-        </p:blipFill>
-        <p:spPr>
-          <a:xfrm>
-            <a:off x="8217273" y="1126836"/>
-            <a:ext cx="2657110" cy="1962318"/>
-          </a:xfrm>
-          <a:prstGeom prst="rect">
-            <a:avLst/>
-          </a:prstGeom>
-        </p:spPr>
-      </p:pic>
-      <p:pic>
-        <p:nvPicPr>
-          <p:cNvPr id="8" name="Picture 7">
-            <a:extLst>
-              <a:ext uri="{FF2B5EF4-FFF2-40B4-BE49-F238E27FC236}">
-                <a16:creationId xmlns:a16="http://schemas.microsoft.com/office/drawing/2014/main" id="{8A94BD8F-D771-FB12-37E4-DBDC887B1744}"/>
-              </a:ext>
-            </a:extLst>
-          </p:cNvPr>
-          <p:cNvPicPr>
-            <a:picLocks noChangeAspect="1"/>
-          </p:cNvPicPr>
-          <p:nvPr/>
-        </p:nvPicPr>
-        <p:blipFill>
-          <a:blip r:embed="rId3"/>
-          <a:stretch>
-            <a:fillRect/>
-          </a:stretch>
-        </p:blipFill>
-        <p:spPr>
-          <a:xfrm>
-            <a:off x="8217273" y="4085347"/>
-            <a:ext cx="3172268" cy="1362265"/>
-          </a:xfrm>
-          <a:prstGeom prst="rect">
-            <a:avLst/>
-          </a:prstGeom>
-        </p:spPr>
-      </p:pic>
-      <p:pic>
-        <p:nvPicPr>
-          <p:cNvPr id="9" name="Picture 2" descr="Green checkmark icon - Free green check mark icons">
-            <a:extLst>
-              <a:ext uri="{FF2B5EF4-FFF2-40B4-BE49-F238E27FC236}">
-                <a16:creationId xmlns:a16="http://schemas.microsoft.com/office/drawing/2014/main" id="{B02B2037-F555-C091-B2B7-6A3458076A6B}"/>
-              </a:ext>
-            </a:extLst>
-          </p:cNvPr>
-          <p:cNvPicPr>
-            <a:picLocks noChangeAspect="1" noChangeArrowheads="1"/>
-          </p:cNvPicPr>
-          <p:nvPr/>
-        </p:nvPicPr>
-        <p:blipFill>
-          <a:blip r:embed="rId4">
-            <a:extLst>
-              <a:ext uri="{28A0092B-C50C-407E-A947-70E740481C1C}">
-                <a14:useLocalDpi xmlns:a14="http://schemas.microsoft.com/office/drawing/2010/main" val="0"/>
-              </a:ext>
-            </a:extLst>
-          </a:blip>
-          <a:srcRect/>
-          <a:stretch>
-            <a:fillRect/>
-          </a:stretch>
-        </p:blipFill>
-        <p:spPr bwMode="auto">
-          <a:xfrm>
-            <a:off x="1065919" y="5260754"/>
-            <a:ext cx="350167" cy="328004"/>
-          </a:xfrm>
-          <a:prstGeom prst="rect">
-            <a:avLst/>
-          </a:prstGeom>
-          <a:noFill/>
-          <a:extLst>
-            <a:ext uri="{909E8E84-426E-40DD-AFC4-6F175D3DCCD1}">
-              <a14:hiddenFill xmlns:a14="http://schemas.microsoft.com/office/drawing/2010/main">
-                <a:solidFill>
-                  <a:srgbClr val="FFFFFF"/>
-                </a:solidFill>
-              </a14:hiddenFill>
-            </a:ext>
-          </a:extLst>
-        </p:spPr>
-      </p:pic>
-      <p:pic>
-        <p:nvPicPr>
-          <p:cNvPr id="10" name="Picture 2" descr="Green checkmark icon - Free green check mark icons">
-            <a:extLst>
-              <a:ext uri="{FF2B5EF4-FFF2-40B4-BE49-F238E27FC236}">
-                <a16:creationId xmlns:a16="http://schemas.microsoft.com/office/drawing/2014/main" id="{2C45185E-8095-BB51-5D6B-5C0DC28BD80F}"/>
-              </a:ext>
-            </a:extLst>
-          </p:cNvPr>
-          <p:cNvPicPr>
-            <a:picLocks noChangeAspect="1" noChangeArrowheads="1"/>
-          </p:cNvPicPr>
-          <p:nvPr/>
-        </p:nvPicPr>
-        <p:blipFill>
-          <a:blip r:embed="rId4">
-            <a:extLst>
-              <a:ext uri="{28A0092B-C50C-407E-A947-70E740481C1C}">
-                <a14:useLocalDpi xmlns:a14="http://schemas.microsoft.com/office/drawing/2010/main" val="0"/>
-              </a:ext>
-            </a:extLst>
-          </a:blip>
-          <a:srcRect/>
-          <a:stretch>
-            <a:fillRect/>
-          </a:stretch>
-        </p:blipFill>
-        <p:spPr bwMode="auto">
-          <a:xfrm>
-            <a:off x="1097279" y="2667000"/>
-            <a:ext cx="350167" cy="328004"/>
-          </a:xfrm>
-          <a:prstGeom prst="rect">
-            <a:avLst/>
-          </a:prstGeom>
-          <a:noFill/>
-          <a:extLst>
-            <a:ext uri="{909E8E84-426E-40DD-AFC4-6F175D3DCCD1}">
-              <a14:hiddenFill xmlns:a14="http://schemas.microsoft.com/office/drawing/2010/main">
-                <a:solidFill>
-                  <a:srgbClr val="FFFFFF"/>
-                </a:solidFill>
-              </a14:hiddenFill>
-            </a:ext>
-          </a:extLst>
-        </p:spPr>
-      </p:pic>
-      <p:pic>
-        <p:nvPicPr>
-          <p:cNvPr id="1028" name="Picture 4" descr="Simple red cross mark icon. Vector. 26529438 Vector Art at ...">
-            <a:extLst>
-              <a:ext uri="{FF2B5EF4-FFF2-40B4-BE49-F238E27FC236}">
-                <a16:creationId xmlns:a16="http://schemas.microsoft.com/office/drawing/2014/main" id="{7448EC3D-7C91-6845-3651-B23C5312D4FC}"/>
-              </a:ext>
-            </a:extLst>
-          </p:cNvPr>
-          <p:cNvPicPr>
-            <a:picLocks noChangeAspect="1" noChangeArrowheads="1"/>
-          </p:cNvPicPr>
-          <p:nvPr/>
-        </p:nvPicPr>
-        <p:blipFill>
-          <a:blip r:embed="rId5">
-            <a:extLst>
-              <a:ext uri="{28A0092B-C50C-407E-A947-70E740481C1C}">
-                <a14:useLocalDpi xmlns:a14="http://schemas.microsoft.com/office/drawing/2010/main" val="0"/>
-              </a:ext>
-            </a:extLst>
-          </a:blip>
-          <a:srcRect/>
-          <a:stretch>
-            <a:fillRect/>
-          </a:stretch>
-        </p:blipFill>
-        <p:spPr bwMode="auto">
-          <a:xfrm>
-            <a:off x="1065919" y="2995004"/>
-            <a:ext cx="348506" cy="328005"/>
-          </a:xfrm>
-          <a:prstGeom prst="rect">
-            <a:avLst/>
-          </a:prstGeom>
-          <a:noFill/>
-          <a:extLst>
-            <a:ext uri="{909E8E84-426E-40DD-AFC4-6F175D3DCCD1}">
-              <a14:hiddenFill xmlns:a14="http://schemas.microsoft.com/office/drawing/2010/main">
-                <a:solidFill>
-                  <a:srgbClr val="FFFFFF"/>
-                </a:solidFill>
-              </a14:hiddenFill>
-            </a:ext>
-          </a:extLst>
-        </p:spPr>
-      </p:pic>
-      <p:pic>
-        <p:nvPicPr>
-          <p:cNvPr id="11" name="Picture 4" descr="Simple red cross mark icon. Vector. 26529438 Vector Art at ...">
-            <a:extLst>
-              <a:ext uri="{FF2B5EF4-FFF2-40B4-BE49-F238E27FC236}">
-                <a16:creationId xmlns:a16="http://schemas.microsoft.com/office/drawing/2014/main" id="{BB50B1A3-24C7-6B17-07AD-9BD671397E01}"/>
-              </a:ext>
-            </a:extLst>
-          </p:cNvPr>
-          <p:cNvPicPr>
-            <a:picLocks noChangeAspect="1" noChangeArrowheads="1"/>
-          </p:cNvPicPr>
-          <p:nvPr/>
-        </p:nvPicPr>
-        <p:blipFill>
-          <a:blip r:embed="rId5">
-            <a:extLst>
-              <a:ext uri="{28A0092B-C50C-407E-A947-70E740481C1C}">
-                <a14:useLocalDpi xmlns:a14="http://schemas.microsoft.com/office/drawing/2010/main" val="0"/>
-              </a:ext>
-            </a:extLst>
-          </a:blip>
-          <a:srcRect/>
-          <a:stretch>
-            <a:fillRect/>
-          </a:stretch>
-        </p:blipFill>
-        <p:spPr bwMode="auto">
-          <a:xfrm>
-            <a:off x="1065919" y="4932749"/>
-            <a:ext cx="348506" cy="328005"/>
-          </a:xfrm>
-          <a:prstGeom prst="rect">
-            <a:avLst/>
-          </a:prstGeom>
-          <a:noFill/>
-          <a:extLst>
-            <a:ext uri="{909E8E84-426E-40DD-AFC4-6F175D3DCCD1}">
-              <a14:hiddenFill xmlns:a14="http://schemas.microsoft.com/office/drawing/2010/main">
-                <a:solidFill>
-                  <a:srgbClr val="FFFFFF"/>
-                </a:solidFill>
-              </a14:hiddenFill>
-            </a:ext>
-          </a:extLst>
-        </p:spPr>
-      </p:pic>
-    </p:spTree>
-    <p:extLst>
-      <p:ext uri="{BB962C8B-B14F-4D97-AF65-F5344CB8AC3E}">
-        <p14:creationId xmlns:p14="http://schemas.microsoft.com/office/powerpoint/2010/main" val="2782569486"/>
-      </p:ext>
-    </p:extLst>
-  </p:cSld>
-  <p:clrMapOvr>
-    <a:masterClrMapping/>
-  </p:clrMapOvr>
-</p:sld>
-</file>
-
 <file path=ppt/slides/slide32.xml><?xml version="1.0" encoding="utf-8"?>
 <p:sld xmlns:a="http://schemas.openxmlformats.org/drawingml/2006/main" xmlns:r="http://schemas.openxmlformats.org/officeDocument/2006/relationships" xmlns:p="http://schemas.openxmlformats.org/presentationml/2006/main">
   <p:cSld>
@@ -19047,7 +19375,7 @@
           <p:cNvPr id="2" name="Title 1">
             <a:extLst>
               <a:ext uri="{FF2B5EF4-FFF2-40B4-BE49-F238E27FC236}">
-                <a16:creationId xmlns:a16="http://schemas.microsoft.com/office/drawing/2014/main" id="{B934EC2F-14BA-9782-883A-7CD2C94786E0}"/>
+                <a16:creationId xmlns:a16="http://schemas.microsoft.com/office/drawing/2014/main" id="{8106DCBE-017A-2D20-1A2E-80B827B2F4D1}"/>
               </a:ext>
             </a:extLst>
           </p:cNvPr>
@@ -19065,7 +19393,7 @@
           <a:p>
             <a:r>
               <a:rPr lang="en-US" dirty="0"/>
-              <a:t>HLS vs. RTL FPGA Design Flow</a:t>
+              <a:t>HLS vs. RTL</a:t>
             </a:r>
           </a:p>
         </p:txBody>
@@ -19075,7 +19403,7 @@
           <p:cNvPr id="3" name="Content Placeholder 2">
             <a:extLst>
               <a:ext uri="{FF2B5EF4-FFF2-40B4-BE49-F238E27FC236}">
-                <a16:creationId xmlns:a16="http://schemas.microsoft.com/office/drawing/2014/main" id="{509E281C-63C7-8DA4-3BA6-8A0AC958FD10}"/>
+                <a16:creationId xmlns:a16="http://schemas.microsoft.com/office/drawing/2014/main" id="{A2A6C4DC-EA63-C1AE-66E5-7E45955A9B31}"/>
               </a:ext>
             </a:extLst>
           </p:cNvPr>
@@ -19088,31 +19416,89 @@
         </p:nvSpPr>
         <p:spPr>
           <a:xfrm>
-            <a:off x="7635922" y="1539277"/>
-            <a:ext cx="4060778" cy="4329817"/>
-          </a:xfrm>
-        </p:spPr>
-        <p:txBody>
-          <a:bodyPr/>
-          <a:lstStyle/>
-          <a:p>
+            <a:off x="1097279" y="1539277"/>
+            <a:ext cx="6484051" cy="4049481"/>
+          </a:xfrm>
+        </p:spPr>
+        <p:txBody>
+          <a:bodyPr>
+            <a:normAutofit lnSpcReduction="10000"/>
+          </a:bodyPr>
+          <a:lstStyle/>
+          <a:p>
+            <a:r>
+              <a:rPr lang="en-US" dirty="0">
+                <a:solidFill>
+                  <a:schemeClr val="accent1">
+                    <a:lumMod val="60000"/>
+                    <a:lumOff val="40000"/>
+                  </a:schemeClr>
+                </a:solidFill>
+              </a:rPr>
+              <a:t>RTL: Register Transfer Language</a:t>
+            </a:r>
+          </a:p>
+          <a:p>
+            <a:pPr lvl="1"/>
+            <a:r>
+              <a:rPr lang="en-US" dirty="0">
+                <a:solidFill>
+                  <a:schemeClr val="tx1"/>
+                </a:solidFill>
+              </a:rPr>
+              <a:t>Use specialized languages (e.g., </a:t>
+            </a:r>
+            <a:r>
+              <a:rPr lang="en-US" dirty="0" err="1">
+                <a:solidFill>
+                  <a:schemeClr val="tx1"/>
+                </a:solidFill>
+              </a:rPr>
+              <a:t>SystemVerilog</a:t>
+            </a:r>
+            <a:r>
+              <a:rPr lang="en-US" dirty="0">
+                <a:solidFill>
+                  <a:schemeClr val="tx1"/>
+                </a:solidFill>
+              </a:rPr>
+              <a:t>)</a:t>
+            </a:r>
+          </a:p>
+          <a:p>
+            <a:pPr lvl="1"/>
+            <a:r>
+              <a:rPr lang="en-US" dirty="0">
+                <a:solidFill>
+                  <a:schemeClr val="tx1"/>
+                </a:solidFill>
+              </a:rPr>
+              <a:t>Manually schedule action in each clock cycle</a:t>
+            </a:r>
+          </a:p>
+          <a:p>
+            <a:pPr lvl="1"/>
+            <a:r>
+              <a:rPr lang="en-US" dirty="0">
+                <a:solidFill>
+                  <a:schemeClr val="tx1"/>
+                </a:solidFill>
+              </a:rPr>
+              <a:t>Interfaces designed from scratch</a:t>
+            </a:r>
+          </a:p>
+          <a:p>
+            <a:pPr lvl="1"/>
             <a:r>
               <a:rPr lang="en-US" dirty="0"/>
-              <a:t>Traditional RTL Design Flow</a:t>
+              <a:t>High control, supports custom interfaces</a:t>
             </a:r>
           </a:p>
           <a:p>
             <a:pPr lvl="1"/>
             <a:r>
               <a:rPr lang="en-US" dirty="0"/>
-              <a:t>Designer directly writes RTL</a:t>
-            </a:r>
-          </a:p>
-          <a:p>
-            <a:pPr lvl="1"/>
-            <a:r>
-              <a:rPr lang="en-US" dirty="0"/>
-              <a:t>Tools simulate and synthesize</a:t>
+              <a:t>But time-consuming, difficult to maintain</a:t>
             </a:r>
           </a:p>
           <a:p>
@@ -19121,35 +19507,64 @@
           </a:p>
           <a:p>
             <a:r>
+              <a:rPr lang="en-US" dirty="0">
+                <a:solidFill>
+                  <a:schemeClr val="accent1">
+                    <a:lumMod val="60000"/>
+                    <a:lumOff val="40000"/>
+                  </a:schemeClr>
+                </a:solidFill>
+              </a:rPr>
+              <a:t>HLS:  High-Level Synthesis</a:t>
+            </a:r>
+          </a:p>
+          <a:p>
+            <a:pPr lvl="1"/>
+            <a:r>
+              <a:rPr lang="en-US" dirty="0">
+                <a:solidFill>
+                  <a:schemeClr val="tx1"/>
+                </a:solidFill>
+              </a:rPr>
+              <a:t>Write in general purpose languages (e.g., C++)</a:t>
+            </a:r>
+          </a:p>
+          <a:p>
+            <a:pPr lvl="1"/>
+            <a:r>
               <a:rPr lang="en-US" dirty="0"/>
-              <a:t>HLS Flow</a:t>
+              <a:t>Clock-level schedule determined automatically by compiler</a:t>
             </a:r>
           </a:p>
           <a:p>
             <a:pPr lvl="1"/>
             <a:r>
               <a:rPr lang="en-US" dirty="0"/>
-              <a:t>Designer write high-level language (e.g., C)</a:t>
+              <a:t>API support for common interfaces (e.g., AXI)</a:t>
             </a:r>
           </a:p>
           <a:p>
             <a:pPr lvl="1"/>
             <a:r>
               <a:rPr lang="en-US" dirty="0"/>
-              <a:t>Standard software compile-synthesis</a:t>
+              <a:t>Sacrifice some performance and flexibility</a:t>
             </a:r>
           </a:p>
           <a:p>
             <a:pPr lvl="1"/>
             <a:r>
               <a:rPr lang="en-US" dirty="0"/>
-              <a:t>RTL files auto-generated</a:t>
+              <a:t>But enables rapid development</a:t>
             </a:r>
           </a:p>
           <a:p>
             <a:pPr lvl="1"/>
             <a:endParaRPr lang="en-US" dirty="0"/>
           </a:p>
+          <a:p>
+            <a:pPr lvl="1"/>
+            <a:endParaRPr lang="en-US" dirty="0"/>
+          </a:p>
         </p:txBody>
       </p:sp>
       <p:sp>
@@ -19157,7 +19572,7 @@
           <p:cNvPr id="4" name="Slide Number Placeholder 3">
             <a:extLst>
               <a:ext uri="{FF2B5EF4-FFF2-40B4-BE49-F238E27FC236}">
-                <a16:creationId xmlns:a16="http://schemas.microsoft.com/office/drawing/2014/main" id="{A995E58B-51A0-CB16-A594-7A4FEE422E1A}"/>
+                <a16:creationId xmlns:a16="http://schemas.microsoft.com/office/drawing/2014/main" id="{1E341509-EEE1-4DD7-6915-99914D6B6271}"/>
               </a:ext>
             </a:extLst>
           </p:cNvPr>
@@ -19176,6 +19591,423 @@
             <a:fld id="{629637A9-119A-49DA-BD12-AAC58B377D80}" type="slidenum">
               <a:rPr lang="en-US" smtClean="0"/>
               <a:t>32</a:t>
+            </a:fld>
+            <a:endParaRPr lang="en-US" dirty="0"/>
+          </a:p>
+        </p:txBody>
+      </p:sp>
+      <p:pic>
+        <p:nvPicPr>
+          <p:cNvPr id="6" name="Picture 5">
+            <a:extLst>
+              <a:ext uri="{FF2B5EF4-FFF2-40B4-BE49-F238E27FC236}">
+                <a16:creationId xmlns:a16="http://schemas.microsoft.com/office/drawing/2014/main" id="{273B6D1C-45EA-A34F-2214-5F65D6BB1ED1}"/>
+              </a:ext>
+            </a:extLst>
+          </p:cNvPr>
+          <p:cNvPicPr>
+            <a:picLocks noChangeAspect="1"/>
+          </p:cNvPicPr>
+          <p:nvPr/>
+        </p:nvPicPr>
+        <p:blipFill>
+          <a:blip r:embed="rId2"/>
+          <a:stretch>
+            <a:fillRect/>
+          </a:stretch>
+        </p:blipFill>
+        <p:spPr>
+          <a:xfrm>
+            <a:off x="8217273" y="1126836"/>
+            <a:ext cx="2657110" cy="1962318"/>
+          </a:xfrm>
+          <a:prstGeom prst="rect">
+            <a:avLst/>
+          </a:prstGeom>
+        </p:spPr>
+      </p:pic>
+      <p:pic>
+        <p:nvPicPr>
+          <p:cNvPr id="8" name="Picture 7">
+            <a:extLst>
+              <a:ext uri="{FF2B5EF4-FFF2-40B4-BE49-F238E27FC236}">
+                <a16:creationId xmlns:a16="http://schemas.microsoft.com/office/drawing/2014/main" id="{8A94BD8F-D771-FB12-37E4-DBDC887B1744}"/>
+              </a:ext>
+            </a:extLst>
+          </p:cNvPr>
+          <p:cNvPicPr>
+            <a:picLocks noChangeAspect="1"/>
+          </p:cNvPicPr>
+          <p:nvPr/>
+        </p:nvPicPr>
+        <p:blipFill>
+          <a:blip r:embed="rId3"/>
+          <a:stretch>
+            <a:fillRect/>
+          </a:stretch>
+        </p:blipFill>
+        <p:spPr>
+          <a:xfrm>
+            <a:off x="8217273" y="4085347"/>
+            <a:ext cx="3172268" cy="1362265"/>
+          </a:xfrm>
+          <a:prstGeom prst="rect">
+            <a:avLst/>
+          </a:prstGeom>
+        </p:spPr>
+      </p:pic>
+      <p:pic>
+        <p:nvPicPr>
+          <p:cNvPr id="9" name="Picture 2" descr="Green checkmark icon - Free green check mark icons">
+            <a:extLst>
+              <a:ext uri="{FF2B5EF4-FFF2-40B4-BE49-F238E27FC236}">
+                <a16:creationId xmlns:a16="http://schemas.microsoft.com/office/drawing/2014/main" id="{B02B2037-F555-C091-B2B7-6A3458076A6B}"/>
+              </a:ext>
+            </a:extLst>
+          </p:cNvPr>
+          <p:cNvPicPr>
+            <a:picLocks noChangeAspect="1" noChangeArrowheads="1"/>
+          </p:cNvPicPr>
+          <p:nvPr/>
+        </p:nvPicPr>
+        <p:blipFill>
+          <a:blip r:embed="rId4">
+            <a:extLst>
+              <a:ext uri="{28A0092B-C50C-407E-A947-70E740481C1C}">
+                <a14:useLocalDpi xmlns:a14="http://schemas.microsoft.com/office/drawing/2010/main" val="0"/>
+              </a:ext>
+            </a:extLst>
+          </a:blip>
+          <a:srcRect/>
+          <a:stretch>
+            <a:fillRect/>
+          </a:stretch>
+        </p:blipFill>
+        <p:spPr bwMode="auto">
+          <a:xfrm>
+            <a:off x="1065919" y="5260754"/>
+            <a:ext cx="350167" cy="328004"/>
+          </a:xfrm>
+          <a:prstGeom prst="rect">
+            <a:avLst/>
+          </a:prstGeom>
+          <a:noFill/>
+          <a:extLst>
+            <a:ext uri="{909E8E84-426E-40DD-AFC4-6F175D3DCCD1}">
+              <a14:hiddenFill xmlns:a14="http://schemas.microsoft.com/office/drawing/2010/main">
+                <a:solidFill>
+                  <a:srgbClr val="FFFFFF"/>
+                </a:solidFill>
+              </a14:hiddenFill>
+            </a:ext>
+          </a:extLst>
+        </p:spPr>
+      </p:pic>
+      <p:pic>
+        <p:nvPicPr>
+          <p:cNvPr id="10" name="Picture 2" descr="Green checkmark icon - Free green check mark icons">
+            <a:extLst>
+              <a:ext uri="{FF2B5EF4-FFF2-40B4-BE49-F238E27FC236}">
+                <a16:creationId xmlns:a16="http://schemas.microsoft.com/office/drawing/2014/main" id="{2C45185E-8095-BB51-5D6B-5C0DC28BD80F}"/>
+              </a:ext>
+            </a:extLst>
+          </p:cNvPr>
+          <p:cNvPicPr>
+            <a:picLocks noChangeAspect="1" noChangeArrowheads="1"/>
+          </p:cNvPicPr>
+          <p:nvPr/>
+        </p:nvPicPr>
+        <p:blipFill>
+          <a:blip r:embed="rId4">
+            <a:extLst>
+              <a:ext uri="{28A0092B-C50C-407E-A947-70E740481C1C}">
+                <a14:useLocalDpi xmlns:a14="http://schemas.microsoft.com/office/drawing/2010/main" val="0"/>
+              </a:ext>
+            </a:extLst>
+          </a:blip>
+          <a:srcRect/>
+          <a:stretch>
+            <a:fillRect/>
+          </a:stretch>
+        </p:blipFill>
+        <p:spPr bwMode="auto">
+          <a:xfrm>
+            <a:off x="1097279" y="2667000"/>
+            <a:ext cx="350167" cy="328004"/>
+          </a:xfrm>
+          <a:prstGeom prst="rect">
+            <a:avLst/>
+          </a:prstGeom>
+          <a:noFill/>
+          <a:extLst>
+            <a:ext uri="{909E8E84-426E-40DD-AFC4-6F175D3DCCD1}">
+              <a14:hiddenFill xmlns:a14="http://schemas.microsoft.com/office/drawing/2010/main">
+                <a:solidFill>
+                  <a:srgbClr val="FFFFFF"/>
+                </a:solidFill>
+              </a14:hiddenFill>
+            </a:ext>
+          </a:extLst>
+        </p:spPr>
+      </p:pic>
+      <p:pic>
+        <p:nvPicPr>
+          <p:cNvPr id="1028" name="Picture 4" descr="Simple red cross mark icon. Vector. 26529438 Vector Art at ...">
+            <a:extLst>
+              <a:ext uri="{FF2B5EF4-FFF2-40B4-BE49-F238E27FC236}">
+                <a16:creationId xmlns:a16="http://schemas.microsoft.com/office/drawing/2014/main" id="{7448EC3D-7C91-6845-3651-B23C5312D4FC}"/>
+              </a:ext>
+            </a:extLst>
+          </p:cNvPr>
+          <p:cNvPicPr>
+            <a:picLocks noChangeAspect="1" noChangeArrowheads="1"/>
+          </p:cNvPicPr>
+          <p:nvPr/>
+        </p:nvPicPr>
+        <p:blipFill>
+          <a:blip r:embed="rId5">
+            <a:extLst>
+              <a:ext uri="{28A0092B-C50C-407E-A947-70E740481C1C}">
+                <a14:useLocalDpi xmlns:a14="http://schemas.microsoft.com/office/drawing/2010/main" val="0"/>
+              </a:ext>
+            </a:extLst>
+          </a:blip>
+          <a:srcRect/>
+          <a:stretch>
+            <a:fillRect/>
+          </a:stretch>
+        </p:blipFill>
+        <p:spPr bwMode="auto">
+          <a:xfrm>
+            <a:off x="1065919" y="2995004"/>
+            <a:ext cx="348506" cy="328005"/>
+          </a:xfrm>
+          <a:prstGeom prst="rect">
+            <a:avLst/>
+          </a:prstGeom>
+          <a:noFill/>
+          <a:extLst>
+            <a:ext uri="{909E8E84-426E-40DD-AFC4-6F175D3DCCD1}">
+              <a14:hiddenFill xmlns:a14="http://schemas.microsoft.com/office/drawing/2010/main">
+                <a:solidFill>
+                  <a:srgbClr val="FFFFFF"/>
+                </a:solidFill>
+              </a14:hiddenFill>
+            </a:ext>
+          </a:extLst>
+        </p:spPr>
+      </p:pic>
+      <p:pic>
+        <p:nvPicPr>
+          <p:cNvPr id="11" name="Picture 4" descr="Simple red cross mark icon. Vector. 26529438 Vector Art at ...">
+            <a:extLst>
+              <a:ext uri="{FF2B5EF4-FFF2-40B4-BE49-F238E27FC236}">
+                <a16:creationId xmlns:a16="http://schemas.microsoft.com/office/drawing/2014/main" id="{BB50B1A3-24C7-6B17-07AD-9BD671397E01}"/>
+              </a:ext>
+            </a:extLst>
+          </p:cNvPr>
+          <p:cNvPicPr>
+            <a:picLocks noChangeAspect="1" noChangeArrowheads="1"/>
+          </p:cNvPicPr>
+          <p:nvPr/>
+        </p:nvPicPr>
+        <p:blipFill>
+          <a:blip r:embed="rId5">
+            <a:extLst>
+              <a:ext uri="{28A0092B-C50C-407E-A947-70E740481C1C}">
+                <a14:useLocalDpi xmlns:a14="http://schemas.microsoft.com/office/drawing/2010/main" val="0"/>
+              </a:ext>
+            </a:extLst>
+          </a:blip>
+          <a:srcRect/>
+          <a:stretch>
+            <a:fillRect/>
+          </a:stretch>
+        </p:blipFill>
+        <p:spPr bwMode="auto">
+          <a:xfrm>
+            <a:off x="1065919" y="4932749"/>
+            <a:ext cx="348506" cy="328005"/>
+          </a:xfrm>
+          <a:prstGeom prst="rect">
+            <a:avLst/>
+          </a:prstGeom>
+          <a:noFill/>
+          <a:extLst>
+            <a:ext uri="{909E8E84-426E-40DD-AFC4-6F175D3DCCD1}">
+              <a14:hiddenFill xmlns:a14="http://schemas.microsoft.com/office/drawing/2010/main">
+                <a:solidFill>
+                  <a:srgbClr val="FFFFFF"/>
+                </a:solidFill>
+              </a14:hiddenFill>
+            </a:ext>
+          </a:extLst>
+        </p:spPr>
+      </p:pic>
+    </p:spTree>
+    <p:extLst>
+      <p:ext uri="{BB962C8B-B14F-4D97-AF65-F5344CB8AC3E}">
+        <p14:creationId xmlns:p14="http://schemas.microsoft.com/office/powerpoint/2010/main" val="2782569486"/>
+      </p:ext>
+    </p:extLst>
+  </p:cSld>
+  <p:clrMapOvr>
+    <a:masterClrMapping/>
+  </p:clrMapOvr>
+</p:sld>
+</file>
+
+<file path=ppt/slides/slide33.xml><?xml version="1.0" encoding="utf-8"?>
+<p:sld xmlns:a="http://schemas.openxmlformats.org/drawingml/2006/main" xmlns:r="http://schemas.openxmlformats.org/officeDocument/2006/relationships" xmlns:p="http://schemas.openxmlformats.org/presentationml/2006/main">
+  <p:cSld>
+    <p:spTree>
+      <p:nvGrpSpPr>
+        <p:cNvPr id="1" name=""/>
+        <p:cNvGrpSpPr/>
+        <p:nvPr/>
+      </p:nvGrpSpPr>
+      <p:grpSpPr>
+        <a:xfrm>
+          <a:off x="0" y="0"/>
+          <a:ext cx="0" cy="0"/>
+          <a:chOff x="0" y="0"/>
+          <a:chExt cx="0" cy="0"/>
+        </a:xfrm>
+      </p:grpSpPr>
+      <p:sp>
+        <p:nvSpPr>
+          <p:cNvPr id="2" name="Title 1">
+            <a:extLst>
+              <a:ext uri="{FF2B5EF4-FFF2-40B4-BE49-F238E27FC236}">
+                <a16:creationId xmlns:a16="http://schemas.microsoft.com/office/drawing/2014/main" id="{B934EC2F-14BA-9782-883A-7CD2C94786E0}"/>
+              </a:ext>
+            </a:extLst>
+          </p:cNvPr>
+          <p:cNvSpPr>
+            <a:spLocks noGrp="1"/>
+          </p:cNvSpPr>
+          <p:nvPr>
+            <p:ph type="title"/>
+          </p:nvPr>
+        </p:nvSpPr>
+        <p:spPr/>
+        <p:txBody>
+          <a:bodyPr/>
+          <a:lstStyle/>
+          <a:p>
+            <a:r>
+              <a:rPr lang="en-US" dirty="0"/>
+              <a:t>HLS vs. RTL FPGA Design Flow</a:t>
+            </a:r>
+          </a:p>
+        </p:txBody>
+      </p:sp>
+      <p:sp>
+        <p:nvSpPr>
+          <p:cNvPr id="3" name="Content Placeholder 2">
+            <a:extLst>
+              <a:ext uri="{FF2B5EF4-FFF2-40B4-BE49-F238E27FC236}">
+                <a16:creationId xmlns:a16="http://schemas.microsoft.com/office/drawing/2014/main" id="{509E281C-63C7-8DA4-3BA6-8A0AC958FD10}"/>
+              </a:ext>
+            </a:extLst>
+          </p:cNvPr>
+          <p:cNvSpPr>
+            <a:spLocks noGrp="1"/>
+          </p:cNvSpPr>
+          <p:nvPr>
+            <p:ph idx="1"/>
+          </p:nvPr>
+        </p:nvSpPr>
+        <p:spPr>
+          <a:xfrm>
+            <a:off x="7635922" y="1539277"/>
+            <a:ext cx="4060778" cy="4329817"/>
+          </a:xfrm>
+        </p:spPr>
+        <p:txBody>
+          <a:bodyPr/>
+          <a:lstStyle/>
+          <a:p>
+            <a:r>
+              <a:rPr lang="en-US" dirty="0"/>
+              <a:t>Traditional RTL Design Flow</a:t>
+            </a:r>
+          </a:p>
+          <a:p>
+            <a:pPr lvl="1"/>
+            <a:r>
+              <a:rPr lang="en-US" dirty="0"/>
+              <a:t>Designer directly writes RTL</a:t>
+            </a:r>
+          </a:p>
+          <a:p>
+            <a:pPr lvl="1"/>
+            <a:r>
+              <a:rPr lang="en-US" dirty="0"/>
+              <a:t>Tools simulate and synthesize</a:t>
+            </a:r>
+          </a:p>
+          <a:p>
+            <a:pPr lvl="1"/>
+            <a:endParaRPr lang="en-US" dirty="0"/>
+          </a:p>
+          <a:p>
+            <a:r>
+              <a:rPr lang="en-US" dirty="0"/>
+              <a:t>HLS Flow</a:t>
+            </a:r>
+          </a:p>
+          <a:p>
+            <a:pPr lvl="1"/>
+            <a:r>
+              <a:rPr lang="en-US" dirty="0"/>
+              <a:t>Designer write high-level language (e.g., C)</a:t>
+            </a:r>
+          </a:p>
+          <a:p>
+            <a:pPr lvl="1"/>
+            <a:r>
+              <a:rPr lang="en-US" dirty="0"/>
+              <a:t>Standard software compile-synthesis</a:t>
+            </a:r>
+          </a:p>
+          <a:p>
+            <a:pPr lvl="1"/>
+            <a:r>
+              <a:rPr lang="en-US" dirty="0"/>
+              <a:t>RTL files auto-generated</a:t>
+            </a:r>
+          </a:p>
+          <a:p>
+            <a:pPr lvl="1"/>
+            <a:endParaRPr lang="en-US" dirty="0"/>
+          </a:p>
+        </p:txBody>
+      </p:sp>
+      <p:sp>
+        <p:nvSpPr>
+          <p:cNvPr id="4" name="Slide Number Placeholder 3">
+            <a:extLst>
+              <a:ext uri="{FF2B5EF4-FFF2-40B4-BE49-F238E27FC236}">
+                <a16:creationId xmlns:a16="http://schemas.microsoft.com/office/drawing/2014/main" id="{A995E58B-51A0-CB16-A594-7A4FEE422E1A}"/>
+              </a:ext>
+            </a:extLst>
+          </p:cNvPr>
+          <p:cNvSpPr>
+            <a:spLocks noGrp="1"/>
+          </p:cNvSpPr>
+          <p:nvPr>
+            <p:ph type="sldNum" sz="quarter" idx="12"/>
+          </p:nvPr>
+        </p:nvSpPr>
+        <p:spPr/>
+        <p:txBody>
+          <a:bodyPr/>
+          <a:lstStyle/>
+          <a:p>
+            <a:fld id="{629637A9-119A-49DA-BD12-AAC58B377D80}" type="slidenum">
+              <a:rPr lang="en-US" smtClean="0"/>
+              <a:t>33</a:t>
             </a:fld>
             <a:endParaRPr lang="en-US" dirty="0"/>
           </a:p>
@@ -20401,1171 +21233,6 @@
 </p:sld>
 </file>
 
-<file path=ppt/slides/slide33.xml><?xml version="1.0" encoding="utf-8"?>
-<p:sld xmlns:a="http://schemas.openxmlformats.org/drawingml/2006/main" xmlns:r="http://schemas.openxmlformats.org/officeDocument/2006/relationships" xmlns:p="http://schemas.openxmlformats.org/presentationml/2006/main">
-  <p:cSld>
-    <p:spTree>
-      <p:nvGrpSpPr>
-        <p:cNvPr id="1" name=""/>
-        <p:cNvGrpSpPr/>
-        <p:nvPr/>
-      </p:nvGrpSpPr>
-      <p:grpSpPr>
-        <a:xfrm>
-          <a:off x="0" y="0"/>
-          <a:ext cx="0" cy="0"/>
-          <a:chOff x="0" y="0"/>
-          <a:chExt cx="0" cy="0"/>
-        </a:xfrm>
-      </p:grpSpPr>
-      <p:sp>
-        <p:nvSpPr>
-          <p:cNvPr id="2" name="Title 1">
-            <a:extLst>
-              <a:ext uri="{FF2B5EF4-FFF2-40B4-BE49-F238E27FC236}">
-                <a16:creationId xmlns:a16="http://schemas.microsoft.com/office/drawing/2014/main" id="{5090E8A0-6676-9DB9-C060-DFD8111BBFD7}"/>
-              </a:ext>
-            </a:extLst>
-          </p:cNvPr>
-          <p:cNvSpPr>
-            <a:spLocks noGrp="1"/>
-          </p:cNvSpPr>
-          <p:nvPr>
-            <p:ph type="title"/>
-          </p:nvPr>
-        </p:nvSpPr>
-        <p:spPr/>
-        <p:txBody>
-          <a:bodyPr/>
-          <a:lstStyle/>
-          <a:p>
-            <a:r>
-              <a:rPr lang="en-US" dirty="0"/>
-              <a:t>Bad vs. Good HLS Code Write</a:t>
-            </a:r>
-          </a:p>
-        </p:txBody>
-      </p:sp>
-      <p:sp>
-        <p:nvSpPr>
-          <p:cNvPr id="3" name="Content Placeholder 2">
-            <a:extLst>
-              <a:ext uri="{FF2B5EF4-FFF2-40B4-BE49-F238E27FC236}">
-                <a16:creationId xmlns:a16="http://schemas.microsoft.com/office/drawing/2014/main" id="{74B7D8F1-24C3-0485-60B4-77668F0EE656}"/>
-              </a:ext>
-            </a:extLst>
-          </p:cNvPr>
-          <p:cNvSpPr>
-            <a:spLocks noGrp="1"/>
-          </p:cNvSpPr>
-          <p:nvPr>
-            <p:ph idx="1"/>
-          </p:nvPr>
-        </p:nvSpPr>
-        <p:spPr>
-          <a:xfrm>
-            <a:off x="1097280" y="1539277"/>
-            <a:ext cx="5464064" cy="4329817"/>
-          </a:xfrm>
-        </p:spPr>
-        <p:txBody>
-          <a:bodyPr/>
-          <a:lstStyle/>
-          <a:p>
-            <a:pPr marL="0" indent="0">
-              <a:buNone/>
-            </a:pPr>
-            <a:r>
-              <a:rPr lang="en-US" dirty="0">
-                <a:solidFill>
-                  <a:srgbClr val="FF0000"/>
-                </a:solidFill>
-              </a:rPr>
-              <a:t>Bad:</a:t>
-            </a:r>
-            <a:r>
-              <a:rPr lang="en-US" dirty="0"/>
-              <a:t> Treat HLS tool as a </a:t>
-            </a:r>
-            <a:r>
-              <a:rPr lang="en-US" dirty="0">
-                <a:solidFill>
-                  <a:schemeClr val="tx2">
-                    <a:lumMod val="60000"/>
-                    <a:lumOff val="40000"/>
-                  </a:schemeClr>
-                </a:solidFill>
-              </a:rPr>
-              <a:t>black box</a:t>
-            </a:r>
-          </a:p>
-          <a:p>
-            <a:r>
-              <a:rPr lang="en-US" dirty="0"/>
-              <a:t>Results in RTL code with poor performance</a:t>
-            </a:r>
-          </a:p>
-          <a:p>
-            <a:r>
-              <a:rPr lang="en-US" dirty="0"/>
-              <a:t>No way to evaluate if resulting design is good</a:t>
-            </a:r>
-          </a:p>
-          <a:p>
-            <a:endParaRPr lang="en-US" dirty="0"/>
-          </a:p>
-          <a:p>
-            <a:pPr marL="0" indent="0">
-              <a:buNone/>
-            </a:pPr>
-            <a:r>
-              <a:rPr lang="en-US" dirty="0">
-                <a:solidFill>
-                  <a:srgbClr val="00B050"/>
-                </a:solidFill>
-              </a:rPr>
-              <a:t>Good:</a:t>
-            </a:r>
-            <a:r>
-              <a:rPr lang="en-US" dirty="0"/>
-              <a:t>  Have a </a:t>
-            </a:r>
-            <a:r>
-              <a:rPr lang="en-US" dirty="0">
-                <a:solidFill>
-                  <a:schemeClr val="tx2">
-                    <a:lumMod val="60000"/>
-                    <a:lumOff val="40000"/>
-                  </a:schemeClr>
-                </a:solidFill>
-              </a:rPr>
-              <a:t>mental model</a:t>
-            </a:r>
-          </a:p>
-          <a:p>
-            <a:r>
-              <a:rPr lang="en-US" dirty="0"/>
-              <a:t>Think what the RTL code should look like</a:t>
-            </a:r>
-          </a:p>
-          <a:p>
-            <a:r>
-              <a:rPr lang="en-US" dirty="0"/>
-              <a:t>What should happen on each clock cycle</a:t>
-            </a:r>
-          </a:p>
-          <a:p>
-            <a:r>
-              <a:rPr lang="en-US" dirty="0"/>
-              <a:t>What resources should be used</a:t>
-            </a:r>
-          </a:p>
-          <a:p>
-            <a:endParaRPr lang="en-US" dirty="0"/>
-          </a:p>
-          <a:p>
-            <a:endParaRPr lang="en-US" dirty="0"/>
-          </a:p>
-          <a:p>
-            <a:endParaRPr lang="en-US" dirty="0"/>
-          </a:p>
-        </p:txBody>
-      </p:sp>
-      <p:sp>
-        <p:nvSpPr>
-          <p:cNvPr id="4" name="Slide Number Placeholder 3">
-            <a:extLst>
-              <a:ext uri="{FF2B5EF4-FFF2-40B4-BE49-F238E27FC236}">
-                <a16:creationId xmlns:a16="http://schemas.microsoft.com/office/drawing/2014/main" id="{DEBC3C1F-92F4-02B6-AE1C-72D90E30DC4B}"/>
-              </a:ext>
-            </a:extLst>
-          </p:cNvPr>
-          <p:cNvSpPr>
-            <a:spLocks noGrp="1"/>
-          </p:cNvSpPr>
-          <p:nvPr>
-            <p:ph type="sldNum" sz="quarter" idx="12"/>
-          </p:nvPr>
-        </p:nvSpPr>
-        <p:spPr/>
-        <p:txBody>
-          <a:bodyPr/>
-          <a:lstStyle/>
-          <a:p>
-            <a:fld id="{629637A9-119A-49DA-BD12-AAC58B377D80}" type="slidenum">
-              <a:rPr lang="en-US" smtClean="0"/>
-              <a:t>33</a:t>
-            </a:fld>
-            <a:endParaRPr lang="en-US" dirty="0"/>
-          </a:p>
-        </p:txBody>
-      </p:sp>
-      <p:pic>
-        <p:nvPicPr>
-          <p:cNvPr id="5" name="Picture 2" descr="Coder Female: Over 977 Royalty-Free Licensable Stock Illustrations &amp;  Drawings | Shutterstock">
-            <a:extLst>
-              <a:ext uri="{FF2B5EF4-FFF2-40B4-BE49-F238E27FC236}">
-                <a16:creationId xmlns:a16="http://schemas.microsoft.com/office/drawing/2014/main" id="{A5BD5D31-09E0-C351-BF91-1F1FFC15F26D}"/>
-              </a:ext>
-            </a:extLst>
-          </p:cNvPr>
-          <p:cNvPicPr>
-            <a:picLocks noChangeAspect="1" noChangeArrowheads="1"/>
-          </p:cNvPicPr>
-          <p:nvPr/>
-        </p:nvPicPr>
-        <p:blipFill rotWithShape="1">
-          <a:blip r:embed="rId2">
-            <a:extLst>
-              <a:ext uri="{28A0092B-C50C-407E-A947-70E740481C1C}">
-                <a14:useLocalDpi xmlns:a14="http://schemas.microsoft.com/office/drawing/2010/main" val="0"/>
-              </a:ext>
-            </a:extLst>
-          </a:blip>
-          <a:srcRect l="18038" t="-28" r="17239" b="23451"/>
-          <a:stretch>
-            <a:fillRect/>
-          </a:stretch>
-        </p:blipFill>
-        <p:spPr bwMode="auto">
-          <a:xfrm>
-            <a:off x="7101172" y="1590377"/>
-            <a:ext cx="1108222" cy="1079500"/>
-          </a:xfrm>
-          <a:prstGeom prst="rect">
-            <a:avLst/>
-          </a:prstGeom>
-          <a:noFill/>
-          <a:extLst>
-            <a:ext uri="{909E8E84-426E-40DD-AFC4-6F175D3DCCD1}">
-              <a14:hiddenFill xmlns:a14="http://schemas.microsoft.com/office/drawing/2010/main">
-                <a:solidFill>
-                  <a:srgbClr val="FFFFFF"/>
-                </a:solidFill>
-              </a14:hiddenFill>
-            </a:ext>
-          </a:extLst>
-        </p:spPr>
-      </p:pic>
-      <p:sp>
-        <p:nvSpPr>
-          <p:cNvPr id="6" name="Rectangle: Rounded Corners 5">
-            <a:extLst>
-              <a:ext uri="{FF2B5EF4-FFF2-40B4-BE49-F238E27FC236}">
-                <a16:creationId xmlns:a16="http://schemas.microsoft.com/office/drawing/2014/main" id="{BB12D765-2B5D-279B-D18E-B69AA2B1132D}"/>
-              </a:ext>
-            </a:extLst>
-          </p:cNvPr>
-          <p:cNvSpPr/>
-          <p:nvPr/>
-        </p:nvSpPr>
-        <p:spPr>
-          <a:xfrm>
-            <a:off x="10078371" y="1611366"/>
-            <a:ext cx="1084551" cy="872422"/>
-          </a:xfrm>
-          <a:prstGeom prst="roundRect">
-            <a:avLst/>
-          </a:prstGeom>
-          <a:solidFill>
-            <a:schemeClr val="accent4">
-              <a:lumMod val="20000"/>
-              <a:lumOff val="80000"/>
-            </a:schemeClr>
-          </a:solidFill>
-          <a:ln>
-            <a:solidFill>
-              <a:schemeClr val="accent5">
-                <a:lumMod val="75000"/>
-              </a:schemeClr>
-            </a:solidFill>
-          </a:ln>
-        </p:spPr>
-        <p:style>
-          <a:lnRef idx="2">
-            <a:schemeClr val="accent1">
-              <a:shade val="15000"/>
-            </a:schemeClr>
-          </a:lnRef>
-          <a:fillRef idx="1">
-            <a:schemeClr val="accent1"/>
-          </a:fillRef>
-          <a:effectRef idx="0">
-            <a:schemeClr val="accent1"/>
-          </a:effectRef>
-          <a:fontRef idx="minor">
-            <a:schemeClr val="lt1"/>
-          </a:fontRef>
-        </p:style>
-        <p:txBody>
-          <a:bodyPr rtlCol="0" anchor="ctr"/>
-          <a:lstStyle/>
-          <a:p>
-            <a:pPr algn="ctr"/>
-            <a:r>
-              <a:rPr lang="en-US" sz="1600" dirty="0">
-                <a:solidFill>
-                  <a:schemeClr val="tx1"/>
-                </a:solidFill>
-              </a:rPr>
-              <a:t>RTL</a:t>
-            </a:r>
-            <a:br>
-              <a:rPr lang="en-US" sz="1600" dirty="0">
-                <a:solidFill>
-                  <a:schemeClr val="tx1"/>
-                </a:solidFill>
-              </a:rPr>
-            </a:br>
-            <a:r>
-              <a:rPr lang="en-US" sz="1600" dirty="0">
-                <a:solidFill>
-                  <a:schemeClr val="tx1"/>
-                </a:solidFill>
-              </a:rPr>
-              <a:t>Tool</a:t>
-            </a:r>
-          </a:p>
-        </p:txBody>
-      </p:sp>
-      <p:sp>
-        <p:nvSpPr>
-          <p:cNvPr id="7" name="Rectangle: Rounded Corners 6">
-            <a:extLst>
-              <a:ext uri="{FF2B5EF4-FFF2-40B4-BE49-F238E27FC236}">
-                <a16:creationId xmlns:a16="http://schemas.microsoft.com/office/drawing/2014/main" id="{EED89534-2D46-CADD-8410-87DB73217FF6}"/>
-              </a:ext>
-            </a:extLst>
-          </p:cNvPr>
-          <p:cNvSpPr/>
-          <p:nvPr/>
-        </p:nvSpPr>
-        <p:spPr>
-          <a:xfrm>
-            <a:off x="8568949" y="1590377"/>
-            <a:ext cx="959639" cy="914400"/>
-          </a:xfrm>
-          <a:prstGeom prst="roundRect">
-            <a:avLst/>
-          </a:prstGeom>
-          <a:solidFill>
-            <a:srgbClr val="E0F8E0"/>
-          </a:solidFill>
-          <a:ln>
-            <a:solidFill>
-              <a:schemeClr val="accent5">
-                <a:lumMod val="75000"/>
-              </a:schemeClr>
-            </a:solidFill>
-          </a:ln>
-        </p:spPr>
-        <p:style>
-          <a:lnRef idx="2">
-            <a:schemeClr val="accent1">
-              <a:shade val="15000"/>
-            </a:schemeClr>
-          </a:lnRef>
-          <a:fillRef idx="1">
-            <a:schemeClr val="accent1"/>
-          </a:fillRef>
-          <a:effectRef idx="0">
-            <a:schemeClr val="accent1"/>
-          </a:effectRef>
-          <a:fontRef idx="minor">
-            <a:schemeClr val="lt1"/>
-          </a:fontRef>
-        </p:style>
-        <p:txBody>
-          <a:bodyPr rtlCol="0" anchor="ctr"/>
-          <a:lstStyle/>
-          <a:p>
-            <a:pPr algn="ctr"/>
-            <a:r>
-              <a:rPr lang="en-US" sz="1600" dirty="0">
-                <a:solidFill>
-                  <a:schemeClr val="tx1"/>
-                </a:solidFill>
-              </a:rPr>
-              <a:t>HLS</a:t>
-            </a:r>
-            <a:br>
-              <a:rPr lang="en-US" sz="1600" dirty="0">
-                <a:solidFill>
-                  <a:schemeClr val="tx1"/>
-                </a:solidFill>
-              </a:rPr>
-            </a:br>
-            <a:r>
-              <a:rPr lang="en-US" sz="1600" dirty="0">
-                <a:solidFill>
-                  <a:schemeClr val="tx1"/>
-                </a:solidFill>
-              </a:rPr>
-              <a:t>Tool</a:t>
-            </a:r>
-          </a:p>
-        </p:txBody>
-      </p:sp>
-      <p:sp>
-        <p:nvSpPr>
-          <p:cNvPr id="8" name="Arrow: Right 7">
-            <a:extLst>
-              <a:ext uri="{FF2B5EF4-FFF2-40B4-BE49-F238E27FC236}">
-                <a16:creationId xmlns:a16="http://schemas.microsoft.com/office/drawing/2014/main" id="{9A03DAF1-01D8-A0F4-6C1D-89F703B97FD4}"/>
-              </a:ext>
-            </a:extLst>
-          </p:cNvPr>
-          <p:cNvSpPr/>
-          <p:nvPr/>
-        </p:nvSpPr>
-        <p:spPr>
-          <a:xfrm>
-            <a:off x="7990305" y="1853136"/>
-            <a:ext cx="578644" cy="388882"/>
-          </a:xfrm>
-          <a:prstGeom prst="rightArrow">
-            <a:avLst/>
-          </a:prstGeom>
-          <a:solidFill>
-            <a:schemeClr val="accent5">
-              <a:lumMod val="60000"/>
-              <a:lumOff val="40000"/>
-            </a:schemeClr>
-          </a:solidFill>
-        </p:spPr>
-        <p:style>
-          <a:lnRef idx="2">
-            <a:schemeClr val="accent1">
-              <a:shade val="15000"/>
-            </a:schemeClr>
-          </a:lnRef>
-          <a:fillRef idx="1">
-            <a:schemeClr val="accent1"/>
-          </a:fillRef>
-          <a:effectRef idx="0">
-            <a:schemeClr val="accent1"/>
-          </a:effectRef>
-          <a:fontRef idx="minor">
-            <a:schemeClr val="lt1"/>
-          </a:fontRef>
-        </p:style>
-        <p:txBody>
-          <a:bodyPr rtlCol="0" anchor="ctr"/>
-          <a:lstStyle/>
-          <a:p>
-            <a:pPr algn="ctr"/>
-            <a:endParaRPr lang="en-US"/>
-          </a:p>
-        </p:txBody>
-      </p:sp>
-      <p:sp>
-        <p:nvSpPr>
-          <p:cNvPr id="9" name="Arrow: Right 8">
-            <a:extLst>
-              <a:ext uri="{FF2B5EF4-FFF2-40B4-BE49-F238E27FC236}">
-                <a16:creationId xmlns:a16="http://schemas.microsoft.com/office/drawing/2014/main" id="{5C12F44B-3B8F-2BF3-4155-29C08D5DA513}"/>
-              </a:ext>
-            </a:extLst>
-          </p:cNvPr>
-          <p:cNvSpPr/>
-          <p:nvPr/>
-        </p:nvSpPr>
-        <p:spPr>
-          <a:xfrm>
-            <a:off x="9598821" y="1853136"/>
-            <a:ext cx="578644" cy="388882"/>
-          </a:xfrm>
-          <a:prstGeom prst="rightArrow">
-            <a:avLst/>
-          </a:prstGeom>
-          <a:solidFill>
-            <a:schemeClr val="accent5">
-              <a:lumMod val="60000"/>
-              <a:lumOff val="40000"/>
-            </a:schemeClr>
-          </a:solidFill>
-        </p:spPr>
-        <p:style>
-          <a:lnRef idx="2">
-            <a:schemeClr val="accent1">
-              <a:shade val="15000"/>
-            </a:schemeClr>
-          </a:lnRef>
-          <a:fillRef idx="1">
-            <a:schemeClr val="accent1"/>
-          </a:fillRef>
-          <a:effectRef idx="0">
-            <a:schemeClr val="accent1"/>
-          </a:effectRef>
-          <a:fontRef idx="minor">
-            <a:schemeClr val="lt1"/>
-          </a:fontRef>
-        </p:style>
-        <p:txBody>
-          <a:bodyPr rtlCol="0" anchor="ctr"/>
-          <a:lstStyle/>
-          <a:p>
-            <a:pPr algn="ctr"/>
-            <a:endParaRPr lang="en-US"/>
-          </a:p>
-        </p:txBody>
-      </p:sp>
-      <p:sp>
-        <p:nvSpPr>
-          <p:cNvPr id="10" name="Arrow: Right 9">
-            <a:extLst>
-              <a:ext uri="{FF2B5EF4-FFF2-40B4-BE49-F238E27FC236}">
-                <a16:creationId xmlns:a16="http://schemas.microsoft.com/office/drawing/2014/main" id="{F07D30AD-FB05-C4EE-3730-65935015B7F0}"/>
-              </a:ext>
-            </a:extLst>
-          </p:cNvPr>
-          <p:cNvSpPr/>
-          <p:nvPr/>
-        </p:nvSpPr>
-        <p:spPr>
-          <a:xfrm>
-            <a:off x="11189138" y="1853136"/>
-            <a:ext cx="578644" cy="388882"/>
-          </a:xfrm>
-          <a:prstGeom prst="rightArrow">
-            <a:avLst/>
-          </a:prstGeom>
-          <a:solidFill>
-            <a:schemeClr val="accent5">
-              <a:lumMod val="60000"/>
-              <a:lumOff val="40000"/>
-            </a:schemeClr>
-          </a:solidFill>
-        </p:spPr>
-        <p:style>
-          <a:lnRef idx="2">
-            <a:schemeClr val="accent1">
-              <a:shade val="15000"/>
-            </a:schemeClr>
-          </a:lnRef>
-          <a:fillRef idx="1">
-            <a:schemeClr val="accent1"/>
-          </a:fillRef>
-          <a:effectRef idx="0">
-            <a:schemeClr val="accent1"/>
-          </a:effectRef>
-          <a:fontRef idx="minor">
-            <a:schemeClr val="lt1"/>
-          </a:fontRef>
-        </p:style>
-        <p:txBody>
-          <a:bodyPr rtlCol="0" anchor="ctr"/>
-          <a:lstStyle/>
-          <a:p>
-            <a:pPr algn="ctr"/>
-            <a:endParaRPr lang="en-US"/>
-          </a:p>
-        </p:txBody>
-      </p:sp>
-      <p:pic>
-        <p:nvPicPr>
-          <p:cNvPr id="17" name="Picture 2" descr="Coder Female: Over 977 Royalty-Free Licensable Stock Illustrations &amp;  Drawings | Shutterstock">
-            <a:extLst>
-              <a:ext uri="{FF2B5EF4-FFF2-40B4-BE49-F238E27FC236}">
-                <a16:creationId xmlns:a16="http://schemas.microsoft.com/office/drawing/2014/main" id="{9A9DBF16-DE06-18F5-7F59-797D14193332}"/>
-              </a:ext>
-            </a:extLst>
-          </p:cNvPr>
-          <p:cNvPicPr>
-            <a:picLocks noChangeAspect="1" noChangeArrowheads="1"/>
-          </p:cNvPicPr>
-          <p:nvPr/>
-        </p:nvPicPr>
-        <p:blipFill rotWithShape="1">
-          <a:blip r:embed="rId2">
-            <a:extLst>
-              <a:ext uri="{28A0092B-C50C-407E-A947-70E740481C1C}">
-                <a14:useLocalDpi xmlns:a14="http://schemas.microsoft.com/office/drawing/2010/main" val="0"/>
-              </a:ext>
-            </a:extLst>
-          </a:blip>
-          <a:srcRect l="18038" t="-28" r="17239" b="23451"/>
-          <a:stretch>
-            <a:fillRect/>
-          </a:stretch>
-        </p:blipFill>
-        <p:spPr bwMode="auto">
-          <a:xfrm>
-            <a:off x="7101172" y="4547664"/>
-            <a:ext cx="1108222" cy="1079500"/>
-          </a:xfrm>
-          <a:prstGeom prst="rect">
-            <a:avLst/>
-          </a:prstGeom>
-          <a:noFill/>
-          <a:extLst>
-            <a:ext uri="{909E8E84-426E-40DD-AFC4-6F175D3DCCD1}">
-              <a14:hiddenFill xmlns:a14="http://schemas.microsoft.com/office/drawing/2010/main">
-                <a:solidFill>
-                  <a:srgbClr val="FFFFFF"/>
-                </a:solidFill>
-              </a14:hiddenFill>
-            </a:ext>
-          </a:extLst>
-        </p:spPr>
-      </p:pic>
-      <p:sp>
-        <p:nvSpPr>
-          <p:cNvPr id="18" name="Rectangle: Rounded Corners 17">
-            <a:extLst>
-              <a:ext uri="{FF2B5EF4-FFF2-40B4-BE49-F238E27FC236}">
-                <a16:creationId xmlns:a16="http://schemas.microsoft.com/office/drawing/2014/main" id="{112A62F1-E4E8-05EF-1C0C-07E3BF8CC671}"/>
-              </a:ext>
-            </a:extLst>
-          </p:cNvPr>
-          <p:cNvSpPr/>
-          <p:nvPr/>
-        </p:nvSpPr>
-        <p:spPr>
-          <a:xfrm>
-            <a:off x="10078371" y="4568653"/>
-            <a:ext cx="1084551" cy="872422"/>
-          </a:xfrm>
-          <a:prstGeom prst="roundRect">
-            <a:avLst/>
-          </a:prstGeom>
-          <a:solidFill>
-            <a:schemeClr val="accent4">
-              <a:lumMod val="20000"/>
-              <a:lumOff val="80000"/>
-            </a:schemeClr>
-          </a:solidFill>
-          <a:ln>
-            <a:solidFill>
-              <a:schemeClr val="accent5">
-                <a:lumMod val="75000"/>
-              </a:schemeClr>
-            </a:solidFill>
-          </a:ln>
-        </p:spPr>
-        <p:style>
-          <a:lnRef idx="2">
-            <a:schemeClr val="accent1">
-              <a:shade val="15000"/>
-            </a:schemeClr>
-          </a:lnRef>
-          <a:fillRef idx="1">
-            <a:schemeClr val="accent1"/>
-          </a:fillRef>
-          <a:effectRef idx="0">
-            <a:schemeClr val="accent1"/>
-          </a:effectRef>
-          <a:fontRef idx="minor">
-            <a:schemeClr val="lt1"/>
-          </a:fontRef>
-        </p:style>
-        <p:txBody>
-          <a:bodyPr rtlCol="0" anchor="ctr"/>
-          <a:lstStyle/>
-          <a:p>
-            <a:pPr algn="ctr"/>
-            <a:r>
-              <a:rPr lang="en-US" sz="1600" dirty="0">
-                <a:solidFill>
-                  <a:schemeClr val="tx1"/>
-                </a:solidFill>
-              </a:rPr>
-              <a:t>RTL</a:t>
-            </a:r>
-            <a:br>
-              <a:rPr lang="en-US" sz="1600" dirty="0">
-                <a:solidFill>
-                  <a:schemeClr val="tx1"/>
-                </a:solidFill>
-              </a:rPr>
-            </a:br>
-            <a:r>
-              <a:rPr lang="en-US" sz="1600" dirty="0">
-                <a:solidFill>
-                  <a:schemeClr val="tx1"/>
-                </a:solidFill>
-              </a:rPr>
-              <a:t>Tool</a:t>
-            </a:r>
-          </a:p>
-        </p:txBody>
-      </p:sp>
-      <p:sp>
-        <p:nvSpPr>
-          <p:cNvPr id="19" name="Rectangle: Rounded Corners 18">
-            <a:extLst>
-              <a:ext uri="{FF2B5EF4-FFF2-40B4-BE49-F238E27FC236}">
-                <a16:creationId xmlns:a16="http://schemas.microsoft.com/office/drawing/2014/main" id="{9F8170E2-88AE-0F59-5812-1ADAC9870E7D}"/>
-              </a:ext>
-            </a:extLst>
-          </p:cNvPr>
-          <p:cNvSpPr/>
-          <p:nvPr/>
-        </p:nvSpPr>
-        <p:spPr>
-          <a:xfrm>
-            <a:off x="8568949" y="4547664"/>
-            <a:ext cx="959639" cy="914400"/>
-          </a:xfrm>
-          <a:prstGeom prst="roundRect">
-            <a:avLst/>
-          </a:prstGeom>
-          <a:solidFill>
-            <a:srgbClr val="E0F8E0"/>
-          </a:solidFill>
-          <a:ln>
-            <a:solidFill>
-              <a:schemeClr val="accent5">
-                <a:lumMod val="75000"/>
-              </a:schemeClr>
-            </a:solidFill>
-          </a:ln>
-        </p:spPr>
-        <p:style>
-          <a:lnRef idx="2">
-            <a:schemeClr val="accent1">
-              <a:shade val="15000"/>
-            </a:schemeClr>
-          </a:lnRef>
-          <a:fillRef idx="1">
-            <a:schemeClr val="accent1"/>
-          </a:fillRef>
-          <a:effectRef idx="0">
-            <a:schemeClr val="accent1"/>
-          </a:effectRef>
-          <a:fontRef idx="minor">
-            <a:schemeClr val="lt1"/>
-          </a:fontRef>
-        </p:style>
-        <p:txBody>
-          <a:bodyPr rtlCol="0" anchor="ctr"/>
-          <a:lstStyle/>
-          <a:p>
-            <a:pPr algn="ctr"/>
-            <a:r>
-              <a:rPr lang="en-US" sz="1600" dirty="0">
-                <a:solidFill>
-                  <a:schemeClr val="tx1"/>
-                </a:solidFill>
-              </a:rPr>
-              <a:t>HLS</a:t>
-            </a:r>
-            <a:br>
-              <a:rPr lang="en-US" sz="1600" dirty="0">
-                <a:solidFill>
-                  <a:schemeClr val="tx1"/>
-                </a:solidFill>
-              </a:rPr>
-            </a:br>
-            <a:r>
-              <a:rPr lang="en-US" sz="1600" dirty="0">
-                <a:solidFill>
-                  <a:schemeClr val="tx1"/>
-                </a:solidFill>
-              </a:rPr>
-              <a:t>Tool</a:t>
-            </a:r>
-          </a:p>
-        </p:txBody>
-      </p:sp>
-      <p:sp>
-        <p:nvSpPr>
-          <p:cNvPr id="20" name="Arrow: Right 19">
-            <a:extLst>
-              <a:ext uri="{FF2B5EF4-FFF2-40B4-BE49-F238E27FC236}">
-                <a16:creationId xmlns:a16="http://schemas.microsoft.com/office/drawing/2014/main" id="{EDB1F384-6115-A275-DEE8-EA213103343E}"/>
-              </a:ext>
-            </a:extLst>
-          </p:cNvPr>
-          <p:cNvSpPr/>
-          <p:nvPr/>
-        </p:nvSpPr>
-        <p:spPr>
-          <a:xfrm>
-            <a:off x="7990305" y="4810423"/>
-            <a:ext cx="578644" cy="388882"/>
-          </a:xfrm>
-          <a:prstGeom prst="rightArrow">
-            <a:avLst/>
-          </a:prstGeom>
-          <a:solidFill>
-            <a:schemeClr val="accent5">
-              <a:lumMod val="60000"/>
-              <a:lumOff val="40000"/>
-            </a:schemeClr>
-          </a:solidFill>
-        </p:spPr>
-        <p:style>
-          <a:lnRef idx="2">
-            <a:schemeClr val="accent1">
-              <a:shade val="15000"/>
-            </a:schemeClr>
-          </a:lnRef>
-          <a:fillRef idx="1">
-            <a:schemeClr val="accent1"/>
-          </a:fillRef>
-          <a:effectRef idx="0">
-            <a:schemeClr val="accent1"/>
-          </a:effectRef>
-          <a:fontRef idx="minor">
-            <a:schemeClr val="lt1"/>
-          </a:fontRef>
-        </p:style>
-        <p:txBody>
-          <a:bodyPr rtlCol="0" anchor="ctr"/>
-          <a:lstStyle/>
-          <a:p>
-            <a:pPr algn="ctr"/>
-            <a:endParaRPr lang="en-US"/>
-          </a:p>
-        </p:txBody>
-      </p:sp>
-      <p:sp>
-        <p:nvSpPr>
-          <p:cNvPr id="21" name="Arrow: Right 20">
-            <a:extLst>
-              <a:ext uri="{FF2B5EF4-FFF2-40B4-BE49-F238E27FC236}">
-                <a16:creationId xmlns:a16="http://schemas.microsoft.com/office/drawing/2014/main" id="{6C93D179-236D-FA78-9538-2C0568886162}"/>
-              </a:ext>
-            </a:extLst>
-          </p:cNvPr>
-          <p:cNvSpPr/>
-          <p:nvPr/>
-        </p:nvSpPr>
-        <p:spPr>
-          <a:xfrm>
-            <a:off x="9598821" y="4810423"/>
-            <a:ext cx="578644" cy="388882"/>
-          </a:xfrm>
-          <a:prstGeom prst="rightArrow">
-            <a:avLst/>
-          </a:prstGeom>
-          <a:solidFill>
-            <a:schemeClr val="accent5">
-              <a:lumMod val="60000"/>
-              <a:lumOff val="40000"/>
-            </a:schemeClr>
-          </a:solidFill>
-        </p:spPr>
-        <p:style>
-          <a:lnRef idx="2">
-            <a:schemeClr val="accent1">
-              <a:shade val="15000"/>
-            </a:schemeClr>
-          </a:lnRef>
-          <a:fillRef idx="1">
-            <a:schemeClr val="accent1"/>
-          </a:fillRef>
-          <a:effectRef idx="0">
-            <a:schemeClr val="accent1"/>
-          </a:effectRef>
-          <a:fontRef idx="minor">
-            <a:schemeClr val="lt1"/>
-          </a:fontRef>
-        </p:style>
-        <p:txBody>
-          <a:bodyPr rtlCol="0" anchor="ctr"/>
-          <a:lstStyle/>
-          <a:p>
-            <a:pPr algn="ctr"/>
-            <a:endParaRPr lang="en-US"/>
-          </a:p>
-        </p:txBody>
-      </p:sp>
-      <p:sp>
-        <p:nvSpPr>
-          <p:cNvPr id="22" name="Arrow: Right 21">
-            <a:extLst>
-              <a:ext uri="{FF2B5EF4-FFF2-40B4-BE49-F238E27FC236}">
-                <a16:creationId xmlns:a16="http://schemas.microsoft.com/office/drawing/2014/main" id="{808F56E6-4641-C731-2649-A00DA8403E3A}"/>
-              </a:ext>
-            </a:extLst>
-          </p:cNvPr>
-          <p:cNvSpPr/>
-          <p:nvPr/>
-        </p:nvSpPr>
-        <p:spPr>
-          <a:xfrm>
-            <a:off x="11189138" y="4810423"/>
-            <a:ext cx="578644" cy="388882"/>
-          </a:xfrm>
-          <a:prstGeom prst="rightArrow">
-            <a:avLst/>
-          </a:prstGeom>
-          <a:solidFill>
-            <a:schemeClr val="accent5">
-              <a:lumMod val="60000"/>
-              <a:lumOff val="40000"/>
-            </a:schemeClr>
-          </a:solidFill>
-        </p:spPr>
-        <p:style>
-          <a:lnRef idx="2">
-            <a:schemeClr val="accent1">
-              <a:shade val="15000"/>
-            </a:schemeClr>
-          </a:lnRef>
-          <a:fillRef idx="1">
-            <a:schemeClr val="accent1"/>
-          </a:fillRef>
-          <a:effectRef idx="0">
-            <a:schemeClr val="accent1"/>
-          </a:effectRef>
-          <a:fontRef idx="minor">
-            <a:schemeClr val="lt1"/>
-          </a:fontRef>
-        </p:style>
-        <p:txBody>
-          <a:bodyPr rtlCol="0" anchor="ctr"/>
-          <a:lstStyle/>
-          <a:p>
-            <a:pPr algn="ctr"/>
-            <a:endParaRPr lang="en-US"/>
-          </a:p>
-        </p:txBody>
-      </p:sp>
-      <p:sp>
-        <p:nvSpPr>
-          <p:cNvPr id="23" name="Speech Bubble: Oval 22">
-            <a:extLst>
-              <a:ext uri="{FF2B5EF4-FFF2-40B4-BE49-F238E27FC236}">
-                <a16:creationId xmlns:a16="http://schemas.microsoft.com/office/drawing/2014/main" id="{6DB16840-285A-ADC2-6C57-F05CCB1A565B}"/>
-              </a:ext>
-            </a:extLst>
-          </p:cNvPr>
-          <p:cNvSpPr/>
-          <p:nvPr/>
-        </p:nvSpPr>
-        <p:spPr>
-          <a:xfrm>
-            <a:off x="5730765" y="3412020"/>
-            <a:ext cx="1661158" cy="1156633"/>
-          </a:xfrm>
-          <a:prstGeom prst="wedgeEllipseCallout">
-            <a:avLst>
-              <a:gd name="adj1" fmla="val 33515"/>
-              <a:gd name="adj2" fmla="val 75479"/>
-            </a:avLst>
-          </a:prstGeom>
-          <a:solidFill>
-            <a:srgbClr val="EAE5EB">
-              <a:alpha val="20000"/>
-            </a:srgbClr>
-          </a:solidFill>
-        </p:spPr>
-        <p:style>
-          <a:lnRef idx="2">
-            <a:schemeClr val="accent1">
-              <a:shade val="15000"/>
-            </a:schemeClr>
-          </a:lnRef>
-          <a:fillRef idx="1">
-            <a:schemeClr val="accent1"/>
-          </a:fillRef>
-          <a:effectRef idx="0">
-            <a:schemeClr val="accent1"/>
-          </a:effectRef>
-          <a:fontRef idx="minor">
-            <a:schemeClr val="lt1"/>
-          </a:fontRef>
-        </p:style>
-        <p:txBody>
-          <a:bodyPr rtlCol="0" anchor="ctr"/>
-          <a:lstStyle/>
-          <a:p>
-            <a:pPr algn="ctr"/>
-            <a:endParaRPr lang="en-US"/>
-          </a:p>
-        </p:txBody>
-      </p:sp>
-      <p:sp>
-        <p:nvSpPr>
-          <p:cNvPr id="24" name="Rectangle: Rounded Corners 23">
-            <a:extLst>
-              <a:ext uri="{FF2B5EF4-FFF2-40B4-BE49-F238E27FC236}">
-                <a16:creationId xmlns:a16="http://schemas.microsoft.com/office/drawing/2014/main" id="{3380BBA2-61D2-4345-1850-B87564F2B24E}"/>
-              </a:ext>
-            </a:extLst>
-          </p:cNvPr>
-          <p:cNvSpPr/>
-          <p:nvPr/>
-        </p:nvSpPr>
-        <p:spPr>
-          <a:xfrm>
-            <a:off x="6019068" y="3696567"/>
-            <a:ext cx="1084551" cy="679776"/>
-          </a:xfrm>
-          <a:prstGeom prst="roundRect">
-            <a:avLst/>
-          </a:prstGeom>
-          <a:solidFill>
-            <a:schemeClr val="accent4">
-              <a:lumMod val="20000"/>
-              <a:lumOff val="80000"/>
-            </a:schemeClr>
-          </a:solidFill>
-          <a:ln>
-            <a:solidFill>
-              <a:schemeClr val="accent5">
-                <a:lumMod val="75000"/>
-              </a:schemeClr>
-            </a:solidFill>
-          </a:ln>
-        </p:spPr>
-        <p:style>
-          <a:lnRef idx="2">
-            <a:schemeClr val="accent1">
-              <a:shade val="15000"/>
-            </a:schemeClr>
-          </a:lnRef>
-          <a:fillRef idx="1">
-            <a:schemeClr val="accent1"/>
-          </a:fillRef>
-          <a:effectRef idx="0">
-            <a:schemeClr val="accent1"/>
-          </a:effectRef>
-          <a:fontRef idx="minor">
-            <a:schemeClr val="lt1"/>
-          </a:fontRef>
-        </p:style>
-        <p:txBody>
-          <a:bodyPr rtlCol="0" anchor="ctr"/>
-          <a:lstStyle/>
-          <a:p>
-            <a:pPr algn="ctr"/>
-            <a:r>
-              <a:rPr lang="en-US" sz="1600" dirty="0">
-                <a:solidFill>
-                  <a:schemeClr val="tx1"/>
-                </a:solidFill>
-              </a:rPr>
-              <a:t>Mental RTL</a:t>
-            </a:r>
-            <a:br>
-              <a:rPr lang="en-US" sz="1600" dirty="0">
-                <a:solidFill>
-                  <a:schemeClr val="tx1"/>
-                </a:solidFill>
-              </a:rPr>
-            </a:br>
-            <a:r>
-              <a:rPr lang="en-US" sz="1600" dirty="0">
-                <a:solidFill>
-                  <a:schemeClr val="tx1"/>
-                </a:solidFill>
-              </a:rPr>
-              <a:t>model</a:t>
-            </a:r>
-          </a:p>
-        </p:txBody>
-      </p:sp>
-      <p:pic>
-        <p:nvPicPr>
-          <p:cNvPr id="25" name="Picture 2" descr="Green checkmark icon - Free green check mark icons">
-            <a:extLst>
-              <a:ext uri="{FF2B5EF4-FFF2-40B4-BE49-F238E27FC236}">
-                <a16:creationId xmlns:a16="http://schemas.microsoft.com/office/drawing/2014/main" id="{10383258-A82F-C835-98B6-ADE6D6DE4A24}"/>
-              </a:ext>
-            </a:extLst>
-          </p:cNvPr>
-          <p:cNvPicPr>
-            <a:picLocks noChangeAspect="1" noChangeArrowheads="1"/>
-          </p:cNvPicPr>
-          <p:nvPr/>
-        </p:nvPicPr>
-        <p:blipFill>
-          <a:blip r:embed="rId3">
-            <a:extLst>
-              <a:ext uri="{28A0092B-C50C-407E-A947-70E740481C1C}">
-                <a14:useLocalDpi xmlns:a14="http://schemas.microsoft.com/office/drawing/2010/main" val="0"/>
-              </a:ext>
-            </a:extLst>
-          </a:blip>
-          <a:srcRect/>
-          <a:stretch>
-            <a:fillRect/>
-          </a:stretch>
-        </p:blipFill>
-        <p:spPr bwMode="auto">
-          <a:xfrm>
-            <a:off x="6204098" y="4950676"/>
-            <a:ext cx="694582" cy="650620"/>
-          </a:xfrm>
-          <a:prstGeom prst="rect">
-            <a:avLst/>
-          </a:prstGeom>
-          <a:noFill/>
-          <a:extLst>
-            <a:ext uri="{909E8E84-426E-40DD-AFC4-6F175D3DCCD1}">
-              <a14:hiddenFill xmlns:a14="http://schemas.microsoft.com/office/drawing/2010/main">
-                <a:solidFill>
-                  <a:srgbClr val="FFFFFF"/>
-                </a:solidFill>
-              </a14:hiddenFill>
-            </a:ext>
-          </a:extLst>
-        </p:spPr>
-      </p:pic>
-      <p:pic>
-        <p:nvPicPr>
-          <p:cNvPr id="26" name="Picture 4" descr="Simple red cross mark icon. Vector. 26529438 Vector Art at ...">
-            <a:extLst>
-              <a:ext uri="{FF2B5EF4-FFF2-40B4-BE49-F238E27FC236}">
-                <a16:creationId xmlns:a16="http://schemas.microsoft.com/office/drawing/2014/main" id="{B77CBB07-5ECF-7131-A506-4BDCC29E511D}"/>
-              </a:ext>
-            </a:extLst>
-          </p:cNvPr>
-          <p:cNvPicPr>
-            <a:picLocks noChangeAspect="1" noChangeArrowheads="1"/>
-          </p:cNvPicPr>
-          <p:nvPr/>
-        </p:nvPicPr>
-        <p:blipFill>
-          <a:blip r:embed="rId4">
-            <a:extLst>
-              <a:ext uri="{28A0092B-C50C-407E-A947-70E740481C1C}">
-                <a14:useLocalDpi xmlns:a14="http://schemas.microsoft.com/office/drawing/2010/main" val="0"/>
-              </a:ext>
-            </a:extLst>
-          </a:blip>
-          <a:srcRect/>
-          <a:stretch>
-            <a:fillRect/>
-          </a:stretch>
-        </p:blipFill>
-        <p:spPr bwMode="auto">
-          <a:xfrm>
-            <a:off x="6259463" y="1806918"/>
-            <a:ext cx="647406" cy="609322"/>
-          </a:xfrm>
-          <a:prstGeom prst="rect">
-            <a:avLst/>
-          </a:prstGeom>
-          <a:noFill/>
-          <a:extLst>
-            <a:ext uri="{909E8E84-426E-40DD-AFC4-6F175D3DCCD1}">
-              <a14:hiddenFill xmlns:a14="http://schemas.microsoft.com/office/drawing/2010/main">
-                <a:solidFill>
-                  <a:srgbClr val="FFFFFF"/>
-                </a:solidFill>
-              </a14:hiddenFill>
-            </a:ext>
-          </a:extLst>
-        </p:spPr>
-      </p:pic>
-    </p:spTree>
-    <p:extLst>
-      <p:ext uri="{BB962C8B-B14F-4D97-AF65-F5344CB8AC3E}">
-        <p14:creationId xmlns:p14="http://schemas.microsoft.com/office/powerpoint/2010/main" val="2275774795"/>
-      </p:ext>
-    </p:extLst>
-  </p:cSld>
-  <p:clrMapOvr>
-    <a:masterClrMapping/>
-  </p:clrMapOvr>
-</p:sld>
-</file>
-
 <file path=ppt/slides/slide34.xml><?xml version="1.0" encoding="utf-8"?>
 <p:sld xmlns:a="http://schemas.openxmlformats.org/drawingml/2006/main" xmlns:r="http://schemas.openxmlformats.org/officeDocument/2006/relationships" xmlns:p="http://schemas.openxmlformats.org/presentationml/2006/main">
   <p:cSld>
@@ -21588,7 +21255,7 @@
           <p:cNvPr id="2" name="Title 1">
             <a:extLst>
               <a:ext uri="{FF2B5EF4-FFF2-40B4-BE49-F238E27FC236}">
-                <a16:creationId xmlns:a16="http://schemas.microsoft.com/office/drawing/2014/main" id="{81CF48F8-C48B-B6A3-3D5A-B7F2A07EDE3E}"/>
+                <a16:creationId xmlns:a16="http://schemas.microsoft.com/office/drawing/2014/main" id="{5090E8A0-6676-9DB9-C060-DFD8111BBFD7}"/>
               </a:ext>
             </a:extLst>
           </p:cNvPr>
@@ -21606,7 +21273,7 @@
           <a:p>
             <a:r>
               <a:rPr lang="en-US" dirty="0"/>
-              <a:t>Vitis HLS</a:t>
+              <a:t>Bad vs. Good HLS Code Write</a:t>
             </a:r>
           </a:p>
         </p:txBody>
@@ -21616,7 +21283,7 @@
           <p:cNvPr id="3" name="Content Placeholder 2">
             <a:extLst>
               <a:ext uri="{FF2B5EF4-FFF2-40B4-BE49-F238E27FC236}">
-                <a16:creationId xmlns:a16="http://schemas.microsoft.com/office/drawing/2014/main" id="{399DF1EC-6539-1A86-1043-30C8BBE3A1EF}"/>
+                <a16:creationId xmlns:a16="http://schemas.microsoft.com/office/drawing/2014/main" id="{74B7D8F1-24C3-0485-60B4-77668F0EE656}"/>
               </a:ext>
             </a:extLst>
           </p:cNvPr>
@@ -21627,68 +21294,112 @@
             <p:ph idx="1"/>
           </p:nvPr>
         </p:nvSpPr>
-        <p:spPr/>
+        <p:spPr>
+          <a:xfrm>
+            <a:off x="1097280" y="1539277"/>
+            <a:ext cx="5464064" cy="4329817"/>
+          </a:xfrm>
+        </p:spPr>
         <p:txBody>
           <a:bodyPr/>
           <a:lstStyle/>
           <a:p>
+            <a:pPr marL="0" indent="0">
+              <a:buNone/>
+            </a:pPr>
+            <a:r>
+              <a:rPr lang="en-US" dirty="0">
+                <a:solidFill>
+                  <a:srgbClr val="FF0000"/>
+                </a:solidFill>
+              </a:rPr>
+              <a:t>Bad:</a:t>
+            </a:r>
             <a:r>
               <a:rPr lang="en-US" dirty="0"/>
-              <a:t>Developed by Xilinx (now AMD)</a:t>
-            </a:r>
-          </a:p>
-          <a:p>
-            <a:pPr lvl="1"/>
+              <a:t> Treat HLS tool as a </a:t>
+            </a:r>
+            <a:r>
+              <a:rPr lang="en-US" dirty="0">
+                <a:solidFill>
+                  <a:schemeClr val="tx2">
+                    <a:lumMod val="60000"/>
+                    <a:lumOff val="40000"/>
+                  </a:schemeClr>
+                </a:solidFill>
+              </a:rPr>
+              <a:t>black box</a:t>
+            </a:r>
+          </a:p>
+          <a:p>
             <a:r>
               <a:rPr lang="en-US" dirty="0"/>
-              <a:t>Evolved from </a:t>
-            </a:r>
-            <a:r>
-              <a:rPr lang="en-US" dirty="0" err="1"/>
-              <a:t>Vivado</a:t>
-            </a:r>
+              <a:t>Results in RTL code with poor performance</a:t>
+            </a:r>
+          </a:p>
+          <a:p>
             <a:r>
               <a:rPr lang="en-US" dirty="0"/>
-              <a:t> HLS </a:t>
-            </a:r>
-          </a:p>
-          <a:p>
+              <a:t>No way to evaluate if resulting design is good</a:t>
+            </a:r>
+          </a:p>
+          <a:p>
+            <a:endParaRPr lang="en-US" dirty="0"/>
+          </a:p>
+          <a:p>
+            <a:pPr marL="0" indent="0">
+              <a:buNone/>
+            </a:pPr>
+            <a:r>
+              <a:rPr lang="en-US" dirty="0">
+                <a:solidFill>
+                  <a:srgbClr val="00B050"/>
+                </a:solidFill>
+              </a:rPr>
+              <a:t>Good:</a:t>
+            </a:r>
             <a:r>
               <a:rPr lang="en-US" dirty="0"/>
-              <a:t>Supports C / C++</a:t>
-            </a:r>
-          </a:p>
-          <a:p>
-            <a:pPr lvl="1"/>
+              <a:t>  Have a </a:t>
+            </a:r>
+            <a:r>
+              <a:rPr lang="en-US" dirty="0">
+                <a:solidFill>
+                  <a:schemeClr val="tx2">
+                    <a:lumMod val="60000"/>
+                    <a:lumOff val="40000"/>
+                  </a:schemeClr>
+                </a:solidFill>
+              </a:rPr>
+              <a:t>mental model</a:t>
+            </a:r>
+          </a:p>
+          <a:p>
             <a:r>
               <a:rPr lang="en-US" dirty="0"/>
-              <a:t>Simple, common development </a:t>
+              <a:t>Think what the RTL code should look like</a:t>
             </a:r>
           </a:p>
           <a:p>
             <a:r>
               <a:rPr lang="en-US" dirty="0"/>
-              <a:t>Some python support for testbenches</a:t>
+              <a:t>What should happen on each clock cycle</a:t>
             </a:r>
           </a:p>
           <a:p>
             <a:r>
               <a:rPr lang="en-US" dirty="0"/>
-              <a:t>Ships with Vitis IDE</a:t>
-            </a:r>
-          </a:p>
-          <a:p>
-            <a:r>
-              <a:rPr lang="en-US" dirty="0"/>
-              <a:t>Native support for AXI protocols</a:t>
-            </a:r>
-          </a:p>
-          <a:p>
-            <a:pPr lvl="1"/>
-            <a:r>
-              <a:rPr lang="en-US" dirty="0"/>
-              <a:t>No need to build handshake from scratch</a:t>
-            </a:r>
+              <a:t>What resources should be used</a:t>
+            </a:r>
+          </a:p>
+          <a:p>
+            <a:endParaRPr lang="en-US" dirty="0"/>
+          </a:p>
+          <a:p>
+            <a:endParaRPr lang="en-US" dirty="0"/>
+          </a:p>
+          <a:p>
+            <a:endParaRPr lang="en-US" dirty="0"/>
           </a:p>
         </p:txBody>
       </p:sp>
@@ -21697,7 +21408,7 @@
           <p:cNvPr id="4" name="Slide Number Placeholder 3">
             <a:extLst>
               <a:ext uri="{FF2B5EF4-FFF2-40B4-BE49-F238E27FC236}">
-                <a16:creationId xmlns:a16="http://schemas.microsoft.com/office/drawing/2014/main" id="{E583ABE0-5A9F-4CAD-19C8-CF0A3C5FE5BA}"/>
+                <a16:creationId xmlns:a16="http://schemas.microsoft.com/office/drawing/2014/main" id="{DEBC3C1F-92F4-02B6-AE1C-72D90E30DC4B}"/>
               </a:ext>
             </a:extLst>
           </p:cNvPr>
@@ -21723,10 +21434,10 @@
       </p:sp>
       <p:pic>
         <p:nvPicPr>
-          <p:cNvPr id="5" name="Picture 2" descr="Xilinx Vitis HLS introduction - imperix">
-            <a:extLst>
-              <a:ext uri="{FF2B5EF4-FFF2-40B4-BE49-F238E27FC236}">
-                <a16:creationId xmlns:a16="http://schemas.microsoft.com/office/drawing/2014/main" id="{A4ECFD25-23A4-D0BC-58E9-F3DDCC008174}"/>
+          <p:cNvPr id="5" name="Picture 2" descr="Coder Female: Over 977 Royalty-Free Licensable Stock Illustrations &amp;  Drawings | Shutterstock">
+            <a:extLst>
+              <a:ext uri="{FF2B5EF4-FFF2-40B4-BE49-F238E27FC236}">
+                <a16:creationId xmlns:a16="http://schemas.microsoft.com/office/drawing/2014/main" id="{A5BD5D31-09E0-C351-BF91-1F1FFC15F26D}"/>
               </a:ext>
             </a:extLst>
           </p:cNvPr>
@@ -21735,7 +21446,7 @@
           </p:cNvPicPr>
           <p:nvPr/>
         </p:nvPicPr>
-        <p:blipFill>
+        <p:blipFill rotWithShape="1">
           <a:blip r:embed="rId2">
             <a:extLst>
               <a:ext uri="{28A0092B-C50C-407E-A947-70E740481C1C}">
@@ -21743,15 +21454,15 @@
               </a:ext>
             </a:extLst>
           </a:blip>
-          <a:srcRect/>
+          <a:srcRect l="18038" t="-28" r="17239" b="23451"/>
           <a:stretch>
             <a:fillRect/>
           </a:stretch>
         </p:blipFill>
         <p:spPr bwMode="auto">
           <a:xfrm>
-            <a:off x="3886201" y="188576"/>
-            <a:ext cx="1710467" cy="1138238"/>
+            <a:off x="7101172" y="1590377"/>
+            <a:ext cx="1108222" cy="1079500"/>
           </a:xfrm>
           <a:prstGeom prst="rect">
             <a:avLst/>
@@ -21768,40 +21479,916 @@
           </a:extLst>
         </p:spPr>
       </p:pic>
+      <p:sp>
+        <p:nvSpPr>
+          <p:cNvPr id="6" name="Rectangle: Rounded Corners 5">
+            <a:extLst>
+              <a:ext uri="{FF2B5EF4-FFF2-40B4-BE49-F238E27FC236}">
+                <a16:creationId xmlns:a16="http://schemas.microsoft.com/office/drawing/2014/main" id="{BB12D765-2B5D-279B-D18E-B69AA2B1132D}"/>
+              </a:ext>
+            </a:extLst>
+          </p:cNvPr>
+          <p:cNvSpPr/>
+          <p:nvPr/>
+        </p:nvSpPr>
+        <p:spPr>
+          <a:xfrm>
+            <a:off x="10078371" y="1611366"/>
+            <a:ext cx="1084551" cy="872422"/>
+          </a:xfrm>
+          <a:prstGeom prst="roundRect">
+            <a:avLst/>
+          </a:prstGeom>
+          <a:solidFill>
+            <a:schemeClr val="accent4">
+              <a:lumMod val="20000"/>
+              <a:lumOff val="80000"/>
+            </a:schemeClr>
+          </a:solidFill>
+          <a:ln>
+            <a:solidFill>
+              <a:schemeClr val="accent5">
+                <a:lumMod val="75000"/>
+              </a:schemeClr>
+            </a:solidFill>
+          </a:ln>
+        </p:spPr>
+        <p:style>
+          <a:lnRef idx="2">
+            <a:schemeClr val="accent1">
+              <a:shade val="15000"/>
+            </a:schemeClr>
+          </a:lnRef>
+          <a:fillRef idx="1">
+            <a:schemeClr val="accent1"/>
+          </a:fillRef>
+          <a:effectRef idx="0">
+            <a:schemeClr val="accent1"/>
+          </a:effectRef>
+          <a:fontRef idx="minor">
+            <a:schemeClr val="lt1"/>
+          </a:fontRef>
+        </p:style>
+        <p:txBody>
+          <a:bodyPr rtlCol="0" anchor="ctr"/>
+          <a:lstStyle/>
+          <a:p>
+            <a:pPr algn="ctr"/>
+            <a:r>
+              <a:rPr lang="en-US" sz="1600" dirty="0">
+                <a:solidFill>
+                  <a:schemeClr val="tx1"/>
+                </a:solidFill>
+              </a:rPr>
+              <a:t>RTL</a:t>
+            </a:r>
+            <a:br>
+              <a:rPr lang="en-US" sz="1600" dirty="0">
+                <a:solidFill>
+                  <a:schemeClr val="tx1"/>
+                </a:solidFill>
+              </a:rPr>
+            </a:br>
+            <a:r>
+              <a:rPr lang="en-US" sz="1600" dirty="0">
+                <a:solidFill>
+                  <a:schemeClr val="tx1"/>
+                </a:solidFill>
+              </a:rPr>
+              <a:t>Tool</a:t>
+            </a:r>
+          </a:p>
+        </p:txBody>
+      </p:sp>
+      <p:sp>
+        <p:nvSpPr>
+          <p:cNvPr id="7" name="Rectangle: Rounded Corners 6">
+            <a:extLst>
+              <a:ext uri="{FF2B5EF4-FFF2-40B4-BE49-F238E27FC236}">
+                <a16:creationId xmlns:a16="http://schemas.microsoft.com/office/drawing/2014/main" id="{EED89534-2D46-CADD-8410-87DB73217FF6}"/>
+              </a:ext>
+            </a:extLst>
+          </p:cNvPr>
+          <p:cNvSpPr/>
+          <p:nvPr/>
+        </p:nvSpPr>
+        <p:spPr>
+          <a:xfrm>
+            <a:off x="8568949" y="1590377"/>
+            <a:ext cx="959639" cy="914400"/>
+          </a:xfrm>
+          <a:prstGeom prst="roundRect">
+            <a:avLst/>
+          </a:prstGeom>
+          <a:solidFill>
+            <a:srgbClr val="E0F8E0"/>
+          </a:solidFill>
+          <a:ln>
+            <a:solidFill>
+              <a:schemeClr val="accent5">
+                <a:lumMod val="75000"/>
+              </a:schemeClr>
+            </a:solidFill>
+          </a:ln>
+        </p:spPr>
+        <p:style>
+          <a:lnRef idx="2">
+            <a:schemeClr val="accent1">
+              <a:shade val="15000"/>
+            </a:schemeClr>
+          </a:lnRef>
+          <a:fillRef idx="1">
+            <a:schemeClr val="accent1"/>
+          </a:fillRef>
+          <a:effectRef idx="0">
+            <a:schemeClr val="accent1"/>
+          </a:effectRef>
+          <a:fontRef idx="minor">
+            <a:schemeClr val="lt1"/>
+          </a:fontRef>
+        </p:style>
+        <p:txBody>
+          <a:bodyPr rtlCol="0" anchor="ctr"/>
+          <a:lstStyle/>
+          <a:p>
+            <a:pPr algn="ctr"/>
+            <a:r>
+              <a:rPr lang="en-US" sz="1600" dirty="0">
+                <a:solidFill>
+                  <a:schemeClr val="tx1"/>
+                </a:solidFill>
+              </a:rPr>
+              <a:t>HLS</a:t>
+            </a:r>
+            <a:br>
+              <a:rPr lang="en-US" sz="1600" dirty="0">
+                <a:solidFill>
+                  <a:schemeClr val="tx1"/>
+                </a:solidFill>
+              </a:rPr>
+            </a:br>
+            <a:r>
+              <a:rPr lang="en-US" sz="1600" dirty="0">
+                <a:solidFill>
+                  <a:schemeClr val="tx1"/>
+                </a:solidFill>
+              </a:rPr>
+              <a:t>Tool</a:t>
+            </a:r>
+          </a:p>
+        </p:txBody>
+      </p:sp>
+      <p:sp>
+        <p:nvSpPr>
+          <p:cNvPr id="8" name="Arrow: Right 7">
+            <a:extLst>
+              <a:ext uri="{FF2B5EF4-FFF2-40B4-BE49-F238E27FC236}">
+                <a16:creationId xmlns:a16="http://schemas.microsoft.com/office/drawing/2014/main" id="{9A03DAF1-01D8-A0F4-6C1D-89F703B97FD4}"/>
+              </a:ext>
+            </a:extLst>
+          </p:cNvPr>
+          <p:cNvSpPr/>
+          <p:nvPr/>
+        </p:nvSpPr>
+        <p:spPr>
+          <a:xfrm>
+            <a:off x="7990305" y="1853136"/>
+            <a:ext cx="578644" cy="388882"/>
+          </a:xfrm>
+          <a:prstGeom prst="rightArrow">
+            <a:avLst/>
+          </a:prstGeom>
+          <a:solidFill>
+            <a:schemeClr val="accent5">
+              <a:lumMod val="60000"/>
+              <a:lumOff val="40000"/>
+            </a:schemeClr>
+          </a:solidFill>
+        </p:spPr>
+        <p:style>
+          <a:lnRef idx="2">
+            <a:schemeClr val="accent1">
+              <a:shade val="15000"/>
+            </a:schemeClr>
+          </a:lnRef>
+          <a:fillRef idx="1">
+            <a:schemeClr val="accent1"/>
+          </a:fillRef>
+          <a:effectRef idx="0">
+            <a:schemeClr val="accent1"/>
+          </a:effectRef>
+          <a:fontRef idx="minor">
+            <a:schemeClr val="lt1"/>
+          </a:fontRef>
+        </p:style>
+        <p:txBody>
+          <a:bodyPr rtlCol="0" anchor="ctr"/>
+          <a:lstStyle/>
+          <a:p>
+            <a:pPr algn="ctr"/>
+            <a:endParaRPr lang="en-US"/>
+          </a:p>
+        </p:txBody>
+      </p:sp>
+      <p:sp>
+        <p:nvSpPr>
+          <p:cNvPr id="9" name="Arrow: Right 8">
+            <a:extLst>
+              <a:ext uri="{FF2B5EF4-FFF2-40B4-BE49-F238E27FC236}">
+                <a16:creationId xmlns:a16="http://schemas.microsoft.com/office/drawing/2014/main" id="{5C12F44B-3B8F-2BF3-4155-29C08D5DA513}"/>
+              </a:ext>
+            </a:extLst>
+          </p:cNvPr>
+          <p:cNvSpPr/>
+          <p:nvPr/>
+        </p:nvSpPr>
+        <p:spPr>
+          <a:xfrm>
+            <a:off x="9598821" y="1853136"/>
+            <a:ext cx="578644" cy="388882"/>
+          </a:xfrm>
+          <a:prstGeom prst="rightArrow">
+            <a:avLst/>
+          </a:prstGeom>
+          <a:solidFill>
+            <a:schemeClr val="accent5">
+              <a:lumMod val="60000"/>
+              <a:lumOff val="40000"/>
+            </a:schemeClr>
+          </a:solidFill>
+        </p:spPr>
+        <p:style>
+          <a:lnRef idx="2">
+            <a:schemeClr val="accent1">
+              <a:shade val="15000"/>
+            </a:schemeClr>
+          </a:lnRef>
+          <a:fillRef idx="1">
+            <a:schemeClr val="accent1"/>
+          </a:fillRef>
+          <a:effectRef idx="0">
+            <a:schemeClr val="accent1"/>
+          </a:effectRef>
+          <a:fontRef idx="minor">
+            <a:schemeClr val="lt1"/>
+          </a:fontRef>
+        </p:style>
+        <p:txBody>
+          <a:bodyPr rtlCol="0" anchor="ctr"/>
+          <a:lstStyle/>
+          <a:p>
+            <a:pPr algn="ctr"/>
+            <a:endParaRPr lang="en-US"/>
+          </a:p>
+        </p:txBody>
+      </p:sp>
+      <p:sp>
+        <p:nvSpPr>
+          <p:cNvPr id="10" name="Arrow: Right 9">
+            <a:extLst>
+              <a:ext uri="{FF2B5EF4-FFF2-40B4-BE49-F238E27FC236}">
+                <a16:creationId xmlns:a16="http://schemas.microsoft.com/office/drawing/2014/main" id="{F07D30AD-FB05-C4EE-3730-65935015B7F0}"/>
+              </a:ext>
+            </a:extLst>
+          </p:cNvPr>
+          <p:cNvSpPr/>
+          <p:nvPr/>
+        </p:nvSpPr>
+        <p:spPr>
+          <a:xfrm>
+            <a:off x="11189138" y="1853136"/>
+            <a:ext cx="578644" cy="388882"/>
+          </a:xfrm>
+          <a:prstGeom prst="rightArrow">
+            <a:avLst/>
+          </a:prstGeom>
+          <a:solidFill>
+            <a:schemeClr val="accent5">
+              <a:lumMod val="60000"/>
+              <a:lumOff val="40000"/>
+            </a:schemeClr>
+          </a:solidFill>
+        </p:spPr>
+        <p:style>
+          <a:lnRef idx="2">
+            <a:schemeClr val="accent1">
+              <a:shade val="15000"/>
+            </a:schemeClr>
+          </a:lnRef>
+          <a:fillRef idx="1">
+            <a:schemeClr val="accent1"/>
+          </a:fillRef>
+          <a:effectRef idx="0">
+            <a:schemeClr val="accent1"/>
+          </a:effectRef>
+          <a:fontRef idx="minor">
+            <a:schemeClr val="lt1"/>
+          </a:fontRef>
+        </p:style>
+        <p:txBody>
+          <a:bodyPr rtlCol="0" anchor="ctr"/>
+          <a:lstStyle/>
+          <a:p>
+            <a:pPr algn="ctr"/>
+            <a:endParaRPr lang="en-US"/>
+          </a:p>
+        </p:txBody>
+      </p:sp>
       <p:pic>
         <p:nvPicPr>
-          <p:cNvPr id="7" name="Picture 6">
-            <a:extLst>
-              <a:ext uri="{FF2B5EF4-FFF2-40B4-BE49-F238E27FC236}">
-                <a16:creationId xmlns:a16="http://schemas.microsoft.com/office/drawing/2014/main" id="{9B576598-DEAE-160E-8B78-F1229E723F1C}"/>
+          <p:cNvPr id="17" name="Picture 2" descr="Coder Female: Over 977 Royalty-Free Licensable Stock Illustrations &amp;  Drawings | Shutterstock">
+            <a:extLst>
+              <a:ext uri="{FF2B5EF4-FFF2-40B4-BE49-F238E27FC236}">
+                <a16:creationId xmlns:a16="http://schemas.microsoft.com/office/drawing/2014/main" id="{9A9DBF16-DE06-18F5-7F59-797D14193332}"/>
               </a:ext>
             </a:extLst>
           </p:cNvPr>
           <p:cNvPicPr>
-            <a:picLocks noChangeAspect="1"/>
+            <a:picLocks noChangeAspect="1" noChangeArrowheads="1"/>
+          </p:cNvPicPr>
+          <p:nvPr/>
+        </p:nvPicPr>
+        <p:blipFill rotWithShape="1">
+          <a:blip r:embed="rId2">
+            <a:extLst>
+              <a:ext uri="{28A0092B-C50C-407E-A947-70E740481C1C}">
+                <a14:useLocalDpi xmlns:a14="http://schemas.microsoft.com/office/drawing/2010/main" val="0"/>
+              </a:ext>
+            </a:extLst>
+          </a:blip>
+          <a:srcRect l="18038" t="-28" r="17239" b="23451"/>
+          <a:stretch>
+            <a:fillRect/>
+          </a:stretch>
+        </p:blipFill>
+        <p:spPr bwMode="auto">
+          <a:xfrm>
+            <a:off x="7101172" y="4547664"/>
+            <a:ext cx="1108222" cy="1079500"/>
+          </a:xfrm>
+          <a:prstGeom prst="rect">
+            <a:avLst/>
+          </a:prstGeom>
+          <a:noFill/>
+          <a:extLst>
+            <a:ext uri="{909E8E84-426E-40DD-AFC4-6F175D3DCCD1}">
+              <a14:hiddenFill xmlns:a14="http://schemas.microsoft.com/office/drawing/2010/main">
+                <a:solidFill>
+                  <a:srgbClr val="FFFFFF"/>
+                </a:solidFill>
+              </a14:hiddenFill>
+            </a:ext>
+          </a:extLst>
+        </p:spPr>
+      </p:pic>
+      <p:sp>
+        <p:nvSpPr>
+          <p:cNvPr id="18" name="Rectangle: Rounded Corners 17">
+            <a:extLst>
+              <a:ext uri="{FF2B5EF4-FFF2-40B4-BE49-F238E27FC236}">
+                <a16:creationId xmlns:a16="http://schemas.microsoft.com/office/drawing/2014/main" id="{112A62F1-E4E8-05EF-1C0C-07E3BF8CC671}"/>
+              </a:ext>
+            </a:extLst>
+          </p:cNvPr>
+          <p:cNvSpPr/>
+          <p:nvPr/>
+        </p:nvSpPr>
+        <p:spPr>
+          <a:xfrm>
+            <a:off x="10078371" y="4568653"/>
+            <a:ext cx="1084551" cy="872422"/>
+          </a:xfrm>
+          <a:prstGeom prst="roundRect">
+            <a:avLst/>
+          </a:prstGeom>
+          <a:solidFill>
+            <a:schemeClr val="accent4">
+              <a:lumMod val="20000"/>
+              <a:lumOff val="80000"/>
+            </a:schemeClr>
+          </a:solidFill>
+          <a:ln>
+            <a:solidFill>
+              <a:schemeClr val="accent5">
+                <a:lumMod val="75000"/>
+              </a:schemeClr>
+            </a:solidFill>
+          </a:ln>
+        </p:spPr>
+        <p:style>
+          <a:lnRef idx="2">
+            <a:schemeClr val="accent1">
+              <a:shade val="15000"/>
+            </a:schemeClr>
+          </a:lnRef>
+          <a:fillRef idx="1">
+            <a:schemeClr val="accent1"/>
+          </a:fillRef>
+          <a:effectRef idx="0">
+            <a:schemeClr val="accent1"/>
+          </a:effectRef>
+          <a:fontRef idx="minor">
+            <a:schemeClr val="lt1"/>
+          </a:fontRef>
+        </p:style>
+        <p:txBody>
+          <a:bodyPr rtlCol="0" anchor="ctr"/>
+          <a:lstStyle/>
+          <a:p>
+            <a:pPr algn="ctr"/>
+            <a:r>
+              <a:rPr lang="en-US" sz="1600" dirty="0">
+                <a:solidFill>
+                  <a:schemeClr val="tx1"/>
+                </a:solidFill>
+              </a:rPr>
+              <a:t>RTL</a:t>
+            </a:r>
+            <a:br>
+              <a:rPr lang="en-US" sz="1600" dirty="0">
+                <a:solidFill>
+                  <a:schemeClr val="tx1"/>
+                </a:solidFill>
+              </a:rPr>
+            </a:br>
+            <a:r>
+              <a:rPr lang="en-US" sz="1600" dirty="0">
+                <a:solidFill>
+                  <a:schemeClr val="tx1"/>
+                </a:solidFill>
+              </a:rPr>
+              <a:t>Tool</a:t>
+            </a:r>
+          </a:p>
+        </p:txBody>
+      </p:sp>
+      <p:sp>
+        <p:nvSpPr>
+          <p:cNvPr id="19" name="Rectangle: Rounded Corners 18">
+            <a:extLst>
+              <a:ext uri="{FF2B5EF4-FFF2-40B4-BE49-F238E27FC236}">
+                <a16:creationId xmlns:a16="http://schemas.microsoft.com/office/drawing/2014/main" id="{9F8170E2-88AE-0F59-5812-1ADAC9870E7D}"/>
+              </a:ext>
+            </a:extLst>
+          </p:cNvPr>
+          <p:cNvSpPr/>
+          <p:nvPr/>
+        </p:nvSpPr>
+        <p:spPr>
+          <a:xfrm>
+            <a:off x="8568949" y="4547664"/>
+            <a:ext cx="959639" cy="914400"/>
+          </a:xfrm>
+          <a:prstGeom prst="roundRect">
+            <a:avLst/>
+          </a:prstGeom>
+          <a:solidFill>
+            <a:srgbClr val="E0F8E0"/>
+          </a:solidFill>
+          <a:ln>
+            <a:solidFill>
+              <a:schemeClr val="accent5">
+                <a:lumMod val="75000"/>
+              </a:schemeClr>
+            </a:solidFill>
+          </a:ln>
+        </p:spPr>
+        <p:style>
+          <a:lnRef idx="2">
+            <a:schemeClr val="accent1">
+              <a:shade val="15000"/>
+            </a:schemeClr>
+          </a:lnRef>
+          <a:fillRef idx="1">
+            <a:schemeClr val="accent1"/>
+          </a:fillRef>
+          <a:effectRef idx="0">
+            <a:schemeClr val="accent1"/>
+          </a:effectRef>
+          <a:fontRef idx="minor">
+            <a:schemeClr val="lt1"/>
+          </a:fontRef>
+        </p:style>
+        <p:txBody>
+          <a:bodyPr rtlCol="0" anchor="ctr"/>
+          <a:lstStyle/>
+          <a:p>
+            <a:pPr algn="ctr"/>
+            <a:r>
+              <a:rPr lang="en-US" sz="1600" dirty="0">
+                <a:solidFill>
+                  <a:schemeClr val="tx1"/>
+                </a:solidFill>
+              </a:rPr>
+              <a:t>HLS</a:t>
+            </a:r>
+            <a:br>
+              <a:rPr lang="en-US" sz="1600" dirty="0">
+                <a:solidFill>
+                  <a:schemeClr val="tx1"/>
+                </a:solidFill>
+              </a:rPr>
+            </a:br>
+            <a:r>
+              <a:rPr lang="en-US" sz="1600" dirty="0">
+                <a:solidFill>
+                  <a:schemeClr val="tx1"/>
+                </a:solidFill>
+              </a:rPr>
+              <a:t>Tool</a:t>
+            </a:r>
+          </a:p>
+        </p:txBody>
+      </p:sp>
+      <p:sp>
+        <p:nvSpPr>
+          <p:cNvPr id="20" name="Arrow: Right 19">
+            <a:extLst>
+              <a:ext uri="{FF2B5EF4-FFF2-40B4-BE49-F238E27FC236}">
+                <a16:creationId xmlns:a16="http://schemas.microsoft.com/office/drawing/2014/main" id="{EDB1F384-6115-A275-DEE8-EA213103343E}"/>
+              </a:ext>
+            </a:extLst>
+          </p:cNvPr>
+          <p:cNvSpPr/>
+          <p:nvPr/>
+        </p:nvSpPr>
+        <p:spPr>
+          <a:xfrm>
+            <a:off x="7990305" y="4810423"/>
+            <a:ext cx="578644" cy="388882"/>
+          </a:xfrm>
+          <a:prstGeom prst="rightArrow">
+            <a:avLst/>
+          </a:prstGeom>
+          <a:solidFill>
+            <a:schemeClr val="accent5">
+              <a:lumMod val="60000"/>
+              <a:lumOff val="40000"/>
+            </a:schemeClr>
+          </a:solidFill>
+        </p:spPr>
+        <p:style>
+          <a:lnRef idx="2">
+            <a:schemeClr val="accent1">
+              <a:shade val="15000"/>
+            </a:schemeClr>
+          </a:lnRef>
+          <a:fillRef idx="1">
+            <a:schemeClr val="accent1"/>
+          </a:fillRef>
+          <a:effectRef idx="0">
+            <a:schemeClr val="accent1"/>
+          </a:effectRef>
+          <a:fontRef idx="minor">
+            <a:schemeClr val="lt1"/>
+          </a:fontRef>
+        </p:style>
+        <p:txBody>
+          <a:bodyPr rtlCol="0" anchor="ctr"/>
+          <a:lstStyle/>
+          <a:p>
+            <a:pPr algn="ctr"/>
+            <a:endParaRPr lang="en-US"/>
+          </a:p>
+        </p:txBody>
+      </p:sp>
+      <p:sp>
+        <p:nvSpPr>
+          <p:cNvPr id="21" name="Arrow: Right 20">
+            <a:extLst>
+              <a:ext uri="{FF2B5EF4-FFF2-40B4-BE49-F238E27FC236}">
+                <a16:creationId xmlns:a16="http://schemas.microsoft.com/office/drawing/2014/main" id="{6C93D179-236D-FA78-9538-2C0568886162}"/>
+              </a:ext>
+            </a:extLst>
+          </p:cNvPr>
+          <p:cNvSpPr/>
+          <p:nvPr/>
+        </p:nvSpPr>
+        <p:spPr>
+          <a:xfrm>
+            <a:off x="9598821" y="4810423"/>
+            <a:ext cx="578644" cy="388882"/>
+          </a:xfrm>
+          <a:prstGeom prst="rightArrow">
+            <a:avLst/>
+          </a:prstGeom>
+          <a:solidFill>
+            <a:schemeClr val="accent5">
+              <a:lumMod val="60000"/>
+              <a:lumOff val="40000"/>
+            </a:schemeClr>
+          </a:solidFill>
+        </p:spPr>
+        <p:style>
+          <a:lnRef idx="2">
+            <a:schemeClr val="accent1">
+              <a:shade val="15000"/>
+            </a:schemeClr>
+          </a:lnRef>
+          <a:fillRef idx="1">
+            <a:schemeClr val="accent1"/>
+          </a:fillRef>
+          <a:effectRef idx="0">
+            <a:schemeClr val="accent1"/>
+          </a:effectRef>
+          <a:fontRef idx="minor">
+            <a:schemeClr val="lt1"/>
+          </a:fontRef>
+        </p:style>
+        <p:txBody>
+          <a:bodyPr rtlCol="0" anchor="ctr"/>
+          <a:lstStyle/>
+          <a:p>
+            <a:pPr algn="ctr"/>
+            <a:endParaRPr lang="en-US"/>
+          </a:p>
+        </p:txBody>
+      </p:sp>
+      <p:sp>
+        <p:nvSpPr>
+          <p:cNvPr id="22" name="Arrow: Right 21">
+            <a:extLst>
+              <a:ext uri="{FF2B5EF4-FFF2-40B4-BE49-F238E27FC236}">
+                <a16:creationId xmlns:a16="http://schemas.microsoft.com/office/drawing/2014/main" id="{808F56E6-4641-C731-2649-A00DA8403E3A}"/>
+              </a:ext>
+            </a:extLst>
+          </p:cNvPr>
+          <p:cNvSpPr/>
+          <p:nvPr/>
+        </p:nvSpPr>
+        <p:spPr>
+          <a:xfrm>
+            <a:off x="11189138" y="4810423"/>
+            <a:ext cx="578644" cy="388882"/>
+          </a:xfrm>
+          <a:prstGeom prst="rightArrow">
+            <a:avLst/>
+          </a:prstGeom>
+          <a:solidFill>
+            <a:schemeClr val="accent5">
+              <a:lumMod val="60000"/>
+              <a:lumOff val="40000"/>
+            </a:schemeClr>
+          </a:solidFill>
+        </p:spPr>
+        <p:style>
+          <a:lnRef idx="2">
+            <a:schemeClr val="accent1">
+              <a:shade val="15000"/>
+            </a:schemeClr>
+          </a:lnRef>
+          <a:fillRef idx="1">
+            <a:schemeClr val="accent1"/>
+          </a:fillRef>
+          <a:effectRef idx="0">
+            <a:schemeClr val="accent1"/>
+          </a:effectRef>
+          <a:fontRef idx="minor">
+            <a:schemeClr val="lt1"/>
+          </a:fontRef>
+        </p:style>
+        <p:txBody>
+          <a:bodyPr rtlCol="0" anchor="ctr"/>
+          <a:lstStyle/>
+          <a:p>
+            <a:pPr algn="ctr"/>
+            <a:endParaRPr lang="en-US"/>
+          </a:p>
+        </p:txBody>
+      </p:sp>
+      <p:sp>
+        <p:nvSpPr>
+          <p:cNvPr id="23" name="Speech Bubble: Oval 22">
+            <a:extLst>
+              <a:ext uri="{FF2B5EF4-FFF2-40B4-BE49-F238E27FC236}">
+                <a16:creationId xmlns:a16="http://schemas.microsoft.com/office/drawing/2014/main" id="{6DB16840-285A-ADC2-6C57-F05CCB1A565B}"/>
+              </a:ext>
+            </a:extLst>
+          </p:cNvPr>
+          <p:cNvSpPr/>
+          <p:nvPr/>
+        </p:nvSpPr>
+        <p:spPr>
+          <a:xfrm>
+            <a:off x="5730765" y="3412020"/>
+            <a:ext cx="1661158" cy="1156633"/>
+          </a:xfrm>
+          <a:prstGeom prst="wedgeEllipseCallout">
+            <a:avLst>
+              <a:gd name="adj1" fmla="val 33515"/>
+              <a:gd name="adj2" fmla="val 75479"/>
+            </a:avLst>
+          </a:prstGeom>
+          <a:solidFill>
+            <a:srgbClr val="EAE5EB">
+              <a:alpha val="20000"/>
+            </a:srgbClr>
+          </a:solidFill>
+        </p:spPr>
+        <p:style>
+          <a:lnRef idx="2">
+            <a:schemeClr val="accent1">
+              <a:shade val="15000"/>
+            </a:schemeClr>
+          </a:lnRef>
+          <a:fillRef idx="1">
+            <a:schemeClr val="accent1"/>
+          </a:fillRef>
+          <a:effectRef idx="0">
+            <a:schemeClr val="accent1"/>
+          </a:effectRef>
+          <a:fontRef idx="minor">
+            <a:schemeClr val="lt1"/>
+          </a:fontRef>
+        </p:style>
+        <p:txBody>
+          <a:bodyPr rtlCol="0" anchor="ctr"/>
+          <a:lstStyle/>
+          <a:p>
+            <a:pPr algn="ctr"/>
+            <a:endParaRPr lang="en-US"/>
+          </a:p>
+        </p:txBody>
+      </p:sp>
+      <p:sp>
+        <p:nvSpPr>
+          <p:cNvPr id="24" name="Rectangle: Rounded Corners 23">
+            <a:extLst>
+              <a:ext uri="{FF2B5EF4-FFF2-40B4-BE49-F238E27FC236}">
+                <a16:creationId xmlns:a16="http://schemas.microsoft.com/office/drawing/2014/main" id="{3380BBA2-61D2-4345-1850-B87564F2B24E}"/>
+              </a:ext>
+            </a:extLst>
+          </p:cNvPr>
+          <p:cNvSpPr/>
+          <p:nvPr/>
+        </p:nvSpPr>
+        <p:spPr>
+          <a:xfrm>
+            <a:off x="6019068" y="3696567"/>
+            <a:ext cx="1084551" cy="679776"/>
+          </a:xfrm>
+          <a:prstGeom prst="roundRect">
+            <a:avLst/>
+          </a:prstGeom>
+          <a:solidFill>
+            <a:schemeClr val="accent4">
+              <a:lumMod val="20000"/>
+              <a:lumOff val="80000"/>
+            </a:schemeClr>
+          </a:solidFill>
+          <a:ln>
+            <a:solidFill>
+              <a:schemeClr val="accent5">
+                <a:lumMod val="75000"/>
+              </a:schemeClr>
+            </a:solidFill>
+          </a:ln>
+        </p:spPr>
+        <p:style>
+          <a:lnRef idx="2">
+            <a:schemeClr val="accent1">
+              <a:shade val="15000"/>
+            </a:schemeClr>
+          </a:lnRef>
+          <a:fillRef idx="1">
+            <a:schemeClr val="accent1"/>
+          </a:fillRef>
+          <a:effectRef idx="0">
+            <a:schemeClr val="accent1"/>
+          </a:effectRef>
+          <a:fontRef idx="minor">
+            <a:schemeClr val="lt1"/>
+          </a:fontRef>
+        </p:style>
+        <p:txBody>
+          <a:bodyPr rtlCol="0" anchor="ctr"/>
+          <a:lstStyle/>
+          <a:p>
+            <a:pPr algn="ctr"/>
+            <a:r>
+              <a:rPr lang="en-US" sz="1600" dirty="0">
+                <a:solidFill>
+                  <a:schemeClr val="tx1"/>
+                </a:solidFill>
+              </a:rPr>
+              <a:t>Mental RTL</a:t>
+            </a:r>
+            <a:br>
+              <a:rPr lang="en-US" sz="1600" dirty="0">
+                <a:solidFill>
+                  <a:schemeClr val="tx1"/>
+                </a:solidFill>
+              </a:rPr>
+            </a:br>
+            <a:r>
+              <a:rPr lang="en-US" sz="1600" dirty="0">
+                <a:solidFill>
+                  <a:schemeClr val="tx1"/>
+                </a:solidFill>
+              </a:rPr>
+              <a:t>model</a:t>
+            </a:r>
+          </a:p>
+        </p:txBody>
+      </p:sp>
+      <p:pic>
+        <p:nvPicPr>
+          <p:cNvPr id="25" name="Picture 2" descr="Green checkmark icon - Free green check mark icons">
+            <a:extLst>
+              <a:ext uri="{FF2B5EF4-FFF2-40B4-BE49-F238E27FC236}">
+                <a16:creationId xmlns:a16="http://schemas.microsoft.com/office/drawing/2014/main" id="{10383258-A82F-C835-98B6-ADE6D6DE4A24}"/>
+              </a:ext>
+            </a:extLst>
+          </p:cNvPr>
+          <p:cNvPicPr>
+            <a:picLocks noChangeAspect="1" noChangeArrowheads="1"/>
           </p:cNvPicPr>
           <p:nvPr/>
         </p:nvPicPr>
         <p:blipFill>
-          <a:blip r:embed="rId3"/>
+          <a:blip r:embed="rId3">
+            <a:extLst>
+              <a:ext uri="{28A0092B-C50C-407E-A947-70E740481C1C}">
+                <a14:useLocalDpi xmlns:a14="http://schemas.microsoft.com/office/drawing/2010/main" val="0"/>
+              </a:ext>
+            </a:extLst>
+          </a:blip>
+          <a:srcRect/>
           <a:stretch>
             <a:fillRect/>
           </a:stretch>
         </p:blipFill>
-        <p:spPr>
-          <a:xfrm>
-            <a:off x="5868429" y="1631950"/>
-            <a:ext cx="6004882" cy="4005635"/>
+        <p:spPr bwMode="auto">
+          <a:xfrm>
+            <a:off x="6204098" y="4950676"/>
+            <a:ext cx="694582" cy="650620"/>
           </a:xfrm>
           <a:prstGeom prst="rect">
             <a:avLst/>
           </a:prstGeom>
+          <a:noFill/>
+          <a:extLst>
+            <a:ext uri="{909E8E84-426E-40DD-AFC4-6F175D3DCCD1}">
+              <a14:hiddenFill xmlns:a14="http://schemas.microsoft.com/office/drawing/2010/main">
+                <a:solidFill>
+                  <a:srgbClr val="FFFFFF"/>
+                </a:solidFill>
+              </a14:hiddenFill>
+            </a:ext>
+          </a:extLst>
+        </p:spPr>
+      </p:pic>
+      <p:pic>
+        <p:nvPicPr>
+          <p:cNvPr id="26" name="Picture 4" descr="Simple red cross mark icon. Vector. 26529438 Vector Art at ...">
+            <a:extLst>
+              <a:ext uri="{FF2B5EF4-FFF2-40B4-BE49-F238E27FC236}">
+                <a16:creationId xmlns:a16="http://schemas.microsoft.com/office/drawing/2014/main" id="{B77CBB07-5ECF-7131-A506-4BDCC29E511D}"/>
+              </a:ext>
+            </a:extLst>
+          </p:cNvPr>
+          <p:cNvPicPr>
+            <a:picLocks noChangeAspect="1" noChangeArrowheads="1"/>
+          </p:cNvPicPr>
+          <p:nvPr/>
+        </p:nvPicPr>
+        <p:blipFill>
+          <a:blip r:embed="rId4">
+            <a:extLst>
+              <a:ext uri="{28A0092B-C50C-407E-A947-70E740481C1C}">
+                <a14:useLocalDpi xmlns:a14="http://schemas.microsoft.com/office/drawing/2010/main" val="0"/>
+              </a:ext>
+            </a:extLst>
+          </a:blip>
+          <a:srcRect/>
+          <a:stretch>
+            <a:fillRect/>
+          </a:stretch>
+        </p:blipFill>
+        <p:spPr bwMode="auto">
+          <a:xfrm>
+            <a:off x="6259463" y="1806918"/>
+            <a:ext cx="647406" cy="609322"/>
+          </a:xfrm>
+          <a:prstGeom prst="rect">
+            <a:avLst/>
+          </a:prstGeom>
+          <a:noFill/>
+          <a:extLst>
+            <a:ext uri="{909E8E84-426E-40DD-AFC4-6F175D3DCCD1}">
+              <a14:hiddenFill xmlns:a14="http://schemas.microsoft.com/office/drawing/2010/main">
+                <a:solidFill>
+                  <a:srgbClr val="FFFFFF"/>
+                </a:solidFill>
+              </a14:hiddenFill>
+            </a:ext>
+          </a:extLst>
         </p:spPr>
       </p:pic>
     </p:spTree>
     <p:extLst>
       <p:ext uri="{BB962C8B-B14F-4D97-AF65-F5344CB8AC3E}">
-        <p14:creationId xmlns:p14="http://schemas.microsoft.com/office/powerpoint/2010/main" val="3228229021"/>
+        <p14:creationId xmlns:p14="http://schemas.microsoft.com/office/powerpoint/2010/main" val="2275774795"/>
       </p:ext>
     </p:extLst>
   </p:cSld>
@@ -21833,7 +22420,7 @@
           <p:cNvPr id="2" name="Title 1">
             <a:extLst>
               <a:ext uri="{FF2B5EF4-FFF2-40B4-BE49-F238E27FC236}">
-                <a16:creationId xmlns:a16="http://schemas.microsoft.com/office/drawing/2014/main" id="{258E8B9D-0034-401B-1D7D-AA6E381A4DD8}"/>
+                <a16:creationId xmlns:a16="http://schemas.microsoft.com/office/drawing/2014/main" id="{81CF48F8-C48B-B6A3-3D5A-B7F2A07EDE3E}"/>
               </a:ext>
             </a:extLst>
           </p:cNvPr>
@@ -21851,7 +22438,7 @@
           <a:p>
             <a:r>
               <a:rPr lang="en-US" dirty="0"/>
-              <a:t>FPGA Board Components</a:t>
+              <a:t>Vitis HLS</a:t>
             </a:r>
           </a:p>
         </p:txBody>
@@ -21861,7 +22448,7 @@
           <p:cNvPr id="3" name="Content Placeholder 2">
             <a:extLst>
               <a:ext uri="{FF2B5EF4-FFF2-40B4-BE49-F238E27FC236}">
-                <a16:creationId xmlns:a16="http://schemas.microsoft.com/office/drawing/2014/main" id="{6B7D29B0-8410-A491-D94D-5A189BE606BF}"/>
+                <a16:creationId xmlns:a16="http://schemas.microsoft.com/office/drawing/2014/main" id="{399DF1EC-6539-1A86-1043-30C8BBE3A1EF}"/>
               </a:ext>
             </a:extLst>
           </p:cNvPr>
@@ -21872,118 +22459,68 @@
             <p:ph idx="1"/>
           </p:nvPr>
         </p:nvSpPr>
-        <p:spPr>
-          <a:xfrm>
-            <a:off x="1097280" y="1539277"/>
-            <a:ext cx="4998720" cy="4329817"/>
-          </a:xfrm>
-        </p:spPr>
+        <p:spPr/>
         <p:txBody>
           <a:bodyPr/>
           <a:lstStyle/>
           <a:p>
             <a:r>
               <a:rPr lang="en-US" dirty="0"/>
-              <a:t>We target a design on a real FPGA board</a:t>
-            </a:r>
-          </a:p>
-          <a:p>
+              <a:t>Developed by Xilinx (now AMD)</a:t>
+            </a:r>
+          </a:p>
+          <a:p>
+            <a:pPr lvl="1"/>
             <a:r>
               <a:rPr lang="en-US" dirty="0"/>
-              <a:t>Boards have three components</a:t>
-            </a:r>
-          </a:p>
-          <a:p>
-            <a:r>
-              <a:rPr lang="en-US" dirty="0">
-                <a:solidFill>
-                  <a:schemeClr val="tx2">
-                    <a:lumMod val="60000"/>
-                    <a:lumOff val="40000"/>
-                  </a:schemeClr>
-                </a:solidFill>
-              </a:rPr>
-              <a:t>Processing system (PS)</a:t>
+              <a:t>Evolved from </a:t>
+            </a:r>
+            <a:r>
+              <a:rPr lang="en-US" dirty="0" err="1"/>
+              <a:t>Vivado</a:t>
+            </a:r>
+            <a:r>
+              <a:rPr lang="en-US" dirty="0"/>
+              <a:t> HLS </a:t>
+            </a:r>
+          </a:p>
+          <a:p>
+            <a:r>
+              <a:rPr lang="en-US" dirty="0"/>
+              <a:t>Supports C / C++</a:t>
             </a:r>
           </a:p>
           <a:p>
             <a:pPr lvl="1"/>
             <a:r>
               <a:rPr lang="en-US" dirty="0"/>
-              <a:t>A lightweight processor</a:t>
+              <a:t>Simple, common development </a:t>
+            </a:r>
+          </a:p>
+          <a:p>
+            <a:r>
+              <a:rPr lang="en-US" dirty="0"/>
+              <a:t>Some python support for testbenches</a:t>
+            </a:r>
+          </a:p>
+          <a:p>
+            <a:r>
+              <a:rPr lang="en-US" dirty="0"/>
+              <a:t>Ships with Vitis IDE</a:t>
+            </a:r>
+          </a:p>
+          <a:p>
+            <a:r>
+              <a:rPr lang="en-US" dirty="0"/>
+              <a:t>Native support for AXI protocols</a:t>
             </a:r>
           </a:p>
           <a:p>
             <a:pPr lvl="1"/>
             <a:r>
               <a:rPr lang="en-US" dirty="0"/>
-              <a:t>Often an ARM core</a:t>
-            </a:r>
-          </a:p>
-          <a:p>
-            <a:pPr lvl="1"/>
-            <a:r>
-              <a:rPr lang="en-US" dirty="0"/>
-              <a:t>E.g., ARM A9</a:t>
-            </a:r>
-          </a:p>
-          <a:p>
-            <a:r>
-              <a:rPr lang="en-US" dirty="0">
-                <a:solidFill>
-                  <a:schemeClr val="tx2">
-                    <a:lumMod val="60000"/>
-                    <a:lumOff val="40000"/>
-                  </a:schemeClr>
-                </a:solidFill>
-              </a:rPr>
-              <a:t>Programmable logic (PL)</a:t>
-            </a:r>
-          </a:p>
-          <a:p>
-            <a:pPr lvl="1"/>
-            <a:r>
-              <a:rPr lang="en-US" dirty="0"/>
-              <a:t>The programmable fabric</a:t>
-            </a:r>
-          </a:p>
-          <a:p>
-            <a:pPr lvl="1"/>
-            <a:r>
-              <a:rPr lang="en-US" dirty="0"/>
-              <a:t>This is where your IP will reside</a:t>
-            </a:r>
-          </a:p>
-          <a:p>
-            <a:pPr lvl="1"/>
-            <a:r>
-              <a:rPr lang="en-US" dirty="0"/>
-              <a:t>Also contains the registers and internal memory</a:t>
-            </a:r>
-          </a:p>
-          <a:p>
-            <a:r>
-              <a:rPr lang="en-US" dirty="0"/>
-              <a:t>An </a:t>
-            </a:r>
-            <a:r>
-              <a:rPr lang="en-US" dirty="0">
-                <a:solidFill>
-                  <a:schemeClr val="tx2">
-                    <a:lumMod val="60000"/>
-                    <a:lumOff val="40000"/>
-                  </a:schemeClr>
-                </a:solidFill>
-              </a:rPr>
-              <a:t>AXI4 interface</a:t>
-            </a:r>
-          </a:p>
-          <a:p>
-            <a:pPr lvl="1"/>
-            <a:endParaRPr lang="en-US" dirty="0"/>
-          </a:p>
-          <a:p>
-            <a:endParaRPr lang="en-US" dirty="0"/>
+              <a:t>No need to build handshake from scratch</a:t>
+            </a:r>
           </a:p>
         </p:txBody>
       </p:sp>
@@ -21992,7 +22529,7 @@
           <p:cNvPr id="4" name="Slide Number Placeholder 3">
             <a:extLst>
               <a:ext uri="{FF2B5EF4-FFF2-40B4-BE49-F238E27FC236}">
-                <a16:creationId xmlns:a16="http://schemas.microsoft.com/office/drawing/2014/main" id="{F0DAE4B8-3778-3A78-7A19-E818D5CF63B2}"/>
+                <a16:creationId xmlns:a16="http://schemas.microsoft.com/office/drawing/2014/main" id="{E583ABE0-5A9F-4CAD-19C8-CF0A3C5FE5BA}"/>
               </a:ext>
             </a:extLst>
           </p:cNvPr>
@@ -22018,10 +22555,10 @@
       </p:sp>
       <p:pic>
         <p:nvPicPr>
-          <p:cNvPr id="4098" name="Picture 2">
-            <a:extLst>
-              <a:ext uri="{FF2B5EF4-FFF2-40B4-BE49-F238E27FC236}">
-                <a16:creationId xmlns:a16="http://schemas.microsoft.com/office/drawing/2014/main" id="{DB657F65-47BE-0EA1-6784-8FB1C179BDB3}"/>
+          <p:cNvPr id="5" name="Picture 2" descr="Xilinx Vitis HLS introduction - imperix">
+            <a:extLst>
+              <a:ext uri="{FF2B5EF4-FFF2-40B4-BE49-F238E27FC236}">
+                <a16:creationId xmlns:a16="http://schemas.microsoft.com/office/drawing/2014/main" id="{A4ECFD25-23A4-D0BC-58E9-F3DDCC008174}"/>
               </a:ext>
             </a:extLst>
           </p:cNvPr>
@@ -22045,8 +22582,8 @@
         </p:blipFill>
         <p:spPr bwMode="auto">
           <a:xfrm>
-            <a:off x="7084325" y="1712439"/>
-            <a:ext cx="4724400" cy="2505075"/>
+            <a:off x="3886201" y="188576"/>
+            <a:ext cx="1710467" cy="1138238"/>
           </a:xfrm>
           <a:prstGeom prst="rect">
             <a:avLst/>
@@ -22063,57 +22600,12 @@
           </a:extLst>
         </p:spPr>
       </p:pic>
-      <p:sp>
-        <p:nvSpPr>
-          <p:cNvPr id="5" name="TextBox 4">
-            <a:extLst>
-              <a:ext uri="{FF2B5EF4-FFF2-40B4-BE49-F238E27FC236}">
-                <a16:creationId xmlns:a16="http://schemas.microsoft.com/office/drawing/2014/main" id="{92DEB41C-6F1D-0FD1-4603-EB467CA34FF6}"/>
-              </a:ext>
-            </a:extLst>
-          </p:cNvPr>
-          <p:cNvSpPr txBox="1"/>
-          <p:nvPr/>
-        </p:nvSpPr>
-        <p:spPr>
-          <a:xfrm>
-            <a:off x="6892119" y="4499230"/>
-            <a:ext cx="4724401" cy="646331"/>
-          </a:xfrm>
-          <a:prstGeom prst="rect">
-            <a:avLst/>
-          </a:prstGeom>
-          <a:noFill/>
-        </p:spPr>
-        <p:txBody>
-          <a:bodyPr wrap="square" rtlCol="0">
-            <a:spAutoFit/>
-          </a:bodyPr>
-          <a:lstStyle/>
-          <a:p>
-            <a:r>
-              <a:rPr lang="en-US" dirty="0"/>
-              <a:t>Image from MathWorks </a:t>
-            </a:r>
-            <a:r>
-              <a:rPr lang="en-US" dirty="0">
-                <a:hlinkClick r:id="rId3"/>
-              </a:rPr>
-              <a:t>page</a:t>
-            </a:r>
-            <a:r>
-              <a:rPr lang="en-US" dirty="0"/>
-              <a:t> on embedded design</a:t>
-            </a:r>
-          </a:p>
-        </p:txBody>
-      </p:sp>
       <p:pic>
         <p:nvPicPr>
-          <p:cNvPr id="6" name="Picture 5">
-            <a:extLst>
-              <a:ext uri="{FF2B5EF4-FFF2-40B4-BE49-F238E27FC236}">
-                <a16:creationId xmlns:a16="http://schemas.microsoft.com/office/drawing/2014/main" id="{9B968F51-7D3F-092B-95B1-F3C693C2EB06}"/>
+          <p:cNvPr id="7" name="Picture 6">
+            <a:extLst>
+              <a:ext uri="{FF2B5EF4-FFF2-40B4-BE49-F238E27FC236}">
+                <a16:creationId xmlns:a16="http://schemas.microsoft.com/office/drawing/2014/main" id="{9B576598-DEAE-160E-8B78-F1229E723F1C}"/>
               </a:ext>
             </a:extLst>
           </p:cNvPr>
@@ -22123,15 +22615,15 @@
           <p:nvPr/>
         </p:nvPicPr>
         <p:blipFill>
-          <a:blip r:embed="rId4"/>
+          <a:blip r:embed="rId3"/>
           <a:stretch>
             <a:fillRect/>
           </a:stretch>
         </p:blipFill>
         <p:spPr>
           <a:xfrm>
-            <a:off x="9607844" y="4981700"/>
-            <a:ext cx="1436417" cy="1155057"/>
+            <a:off x="5868429" y="1631950"/>
+            <a:ext cx="6004882" cy="4005635"/>
           </a:xfrm>
           <a:prstGeom prst="rect">
             <a:avLst/>
@@ -22141,7 +22633,7 @@
     </p:spTree>
     <p:extLst>
       <p:ext uri="{BB962C8B-B14F-4D97-AF65-F5344CB8AC3E}">
-        <p14:creationId xmlns:p14="http://schemas.microsoft.com/office/powerpoint/2010/main" val="2931553393"/>
+        <p14:creationId xmlns:p14="http://schemas.microsoft.com/office/powerpoint/2010/main" val="3228229021"/>
       </p:ext>
     </p:extLst>
   </p:cSld>
@@ -22170,6 +22662,346 @@
       </p:grpSpPr>
       <p:sp>
         <p:nvSpPr>
+          <p:cNvPr id="2" name="Title 1">
+            <a:extLst>
+              <a:ext uri="{FF2B5EF4-FFF2-40B4-BE49-F238E27FC236}">
+                <a16:creationId xmlns:a16="http://schemas.microsoft.com/office/drawing/2014/main" id="{258E8B9D-0034-401B-1D7D-AA6E381A4DD8}"/>
+              </a:ext>
+            </a:extLst>
+          </p:cNvPr>
+          <p:cNvSpPr>
+            <a:spLocks noGrp="1"/>
+          </p:cNvSpPr>
+          <p:nvPr>
+            <p:ph type="title"/>
+          </p:nvPr>
+        </p:nvSpPr>
+        <p:spPr/>
+        <p:txBody>
+          <a:bodyPr/>
+          <a:lstStyle/>
+          <a:p>
+            <a:r>
+              <a:rPr lang="en-US" dirty="0"/>
+              <a:t>FPGA Board Components</a:t>
+            </a:r>
+          </a:p>
+        </p:txBody>
+      </p:sp>
+      <p:sp>
+        <p:nvSpPr>
+          <p:cNvPr id="3" name="Content Placeholder 2">
+            <a:extLst>
+              <a:ext uri="{FF2B5EF4-FFF2-40B4-BE49-F238E27FC236}">
+                <a16:creationId xmlns:a16="http://schemas.microsoft.com/office/drawing/2014/main" id="{6B7D29B0-8410-A491-D94D-5A189BE606BF}"/>
+              </a:ext>
+            </a:extLst>
+          </p:cNvPr>
+          <p:cNvSpPr>
+            <a:spLocks noGrp="1"/>
+          </p:cNvSpPr>
+          <p:nvPr>
+            <p:ph idx="1"/>
+          </p:nvPr>
+        </p:nvSpPr>
+        <p:spPr>
+          <a:xfrm>
+            <a:off x="1097280" y="1539277"/>
+            <a:ext cx="4998720" cy="4329817"/>
+          </a:xfrm>
+        </p:spPr>
+        <p:txBody>
+          <a:bodyPr/>
+          <a:lstStyle/>
+          <a:p>
+            <a:r>
+              <a:rPr lang="en-US" dirty="0"/>
+              <a:t>We target a design on a real FPGA board</a:t>
+            </a:r>
+          </a:p>
+          <a:p>
+            <a:r>
+              <a:rPr lang="en-US" dirty="0"/>
+              <a:t>Boards have three components</a:t>
+            </a:r>
+          </a:p>
+          <a:p>
+            <a:r>
+              <a:rPr lang="en-US" dirty="0">
+                <a:solidFill>
+                  <a:schemeClr val="tx2">
+                    <a:lumMod val="60000"/>
+                    <a:lumOff val="40000"/>
+                  </a:schemeClr>
+                </a:solidFill>
+              </a:rPr>
+              <a:t>Processing system (PS)</a:t>
+            </a:r>
+          </a:p>
+          <a:p>
+            <a:pPr lvl="1"/>
+            <a:r>
+              <a:rPr lang="en-US" dirty="0"/>
+              <a:t>A lightweight processor</a:t>
+            </a:r>
+          </a:p>
+          <a:p>
+            <a:pPr lvl="1"/>
+            <a:r>
+              <a:rPr lang="en-US" dirty="0"/>
+              <a:t>Often an ARM core</a:t>
+            </a:r>
+          </a:p>
+          <a:p>
+            <a:pPr lvl="1"/>
+            <a:r>
+              <a:rPr lang="en-US" dirty="0"/>
+              <a:t>E.g., ARM A9</a:t>
+            </a:r>
+          </a:p>
+          <a:p>
+            <a:r>
+              <a:rPr lang="en-US" dirty="0">
+                <a:solidFill>
+                  <a:schemeClr val="tx2">
+                    <a:lumMod val="60000"/>
+                    <a:lumOff val="40000"/>
+                  </a:schemeClr>
+                </a:solidFill>
+              </a:rPr>
+              <a:t>Programmable logic (PL)</a:t>
+            </a:r>
+          </a:p>
+          <a:p>
+            <a:pPr lvl="1"/>
+            <a:r>
+              <a:rPr lang="en-US" dirty="0"/>
+              <a:t>The programmable fabric</a:t>
+            </a:r>
+          </a:p>
+          <a:p>
+            <a:pPr lvl="1"/>
+            <a:r>
+              <a:rPr lang="en-US" dirty="0"/>
+              <a:t>This is where your IP will reside</a:t>
+            </a:r>
+          </a:p>
+          <a:p>
+            <a:pPr lvl="1"/>
+            <a:r>
+              <a:rPr lang="en-US" dirty="0"/>
+              <a:t>Also contains the registers and internal memory</a:t>
+            </a:r>
+          </a:p>
+          <a:p>
+            <a:r>
+              <a:rPr lang="en-US" dirty="0"/>
+              <a:t>An </a:t>
+            </a:r>
+            <a:r>
+              <a:rPr lang="en-US" dirty="0">
+                <a:solidFill>
+                  <a:schemeClr val="tx2">
+                    <a:lumMod val="60000"/>
+                    <a:lumOff val="40000"/>
+                  </a:schemeClr>
+                </a:solidFill>
+              </a:rPr>
+              <a:t>AXI4 interface</a:t>
+            </a:r>
+          </a:p>
+          <a:p>
+            <a:pPr lvl="1"/>
+            <a:endParaRPr lang="en-US" dirty="0"/>
+          </a:p>
+          <a:p>
+            <a:endParaRPr lang="en-US" dirty="0"/>
+          </a:p>
+        </p:txBody>
+      </p:sp>
+      <p:sp>
+        <p:nvSpPr>
+          <p:cNvPr id="4" name="Slide Number Placeholder 3">
+            <a:extLst>
+              <a:ext uri="{FF2B5EF4-FFF2-40B4-BE49-F238E27FC236}">
+                <a16:creationId xmlns:a16="http://schemas.microsoft.com/office/drawing/2014/main" id="{F0DAE4B8-3778-3A78-7A19-E818D5CF63B2}"/>
+              </a:ext>
+            </a:extLst>
+          </p:cNvPr>
+          <p:cNvSpPr>
+            <a:spLocks noGrp="1"/>
+          </p:cNvSpPr>
+          <p:nvPr>
+            <p:ph type="sldNum" sz="quarter" idx="12"/>
+          </p:nvPr>
+        </p:nvSpPr>
+        <p:spPr/>
+        <p:txBody>
+          <a:bodyPr/>
+          <a:lstStyle/>
+          <a:p>
+            <a:fld id="{629637A9-119A-49DA-BD12-AAC58B377D80}" type="slidenum">
+              <a:rPr lang="en-US" smtClean="0"/>
+              <a:t>36</a:t>
+            </a:fld>
+            <a:endParaRPr lang="en-US" dirty="0"/>
+          </a:p>
+        </p:txBody>
+      </p:sp>
+      <p:pic>
+        <p:nvPicPr>
+          <p:cNvPr id="4098" name="Picture 2">
+            <a:extLst>
+              <a:ext uri="{FF2B5EF4-FFF2-40B4-BE49-F238E27FC236}">
+                <a16:creationId xmlns:a16="http://schemas.microsoft.com/office/drawing/2014/main" id="{DB657F65-47BE-0EA1-6784-8FB1C179BDB3}"/>
+              </a:ext>
+            </a:extLst>
+          </p:cNvPr>
+          <p:cNvPicPr>
+            <a:picLocks noChangeAspect="1" noChangeArrowheads="1"/>
+          </p:cNvPicPr>
+          <p:nvPr/>
+        </p:nvPicPr>
+        <p:blipFill>
+          <a:blip r:embed="rId2">
+            <a:extLst>
+              <a:ext uri="{28A0092B-C50C-407E-A947-70E740481C1C}">
+                <a14:useLocalDpi xmlns:a14="http://schemas.microsoft.com/office/drawing/2010/main" val="0"/>
+              </a:ext>
+            </a:extLst>
+          </a:blip>
+          <a:srcRect/>
+          <a:stretch>
+            <a:fillRect/>
+          </a:stretch>
+        </p:blipFill>
+        <p:spPr bwMode="auto">
+          <a:xfrm>
+            <a:off x="7084325" y="1712439"/>
+            <a:ext cx="4724400" cy="2505075"/>
+          </a:xfrm>
+          <a:prstGeom prst="rect">
+            <a:avLst/>
+          </a:prstGeom>
+          <a:noFill/>
+          <a:extLst>
+            <a:ext uri="{909E8E84-426E-40DD-AFC4-6F175D3DCCD1}">
+              <a14:hiddenFill xmlns:a14="http://schemas.microsoft.com/office/drawing/2010/main">
+                <a:solidFill>
+                  <a:srgbClr val="FFFFFF"/>
+                </a:solidFill>
+              </a14:hiddenFill>
+            </a:ext>
+          </a:extLst>
+        </p:spPr>
+      </p:pic>
+      <p:sp>
+        <p:nvSpPr>
+          <p:cNvPr id="5" name="TextBox 4">
+            <a:extLst>
+              <a:ext uri="{FF2B5EF4-FFF2-40B4-BE49-F238E27FC236}">
+                <a16:creationId xmlns:a16="http://schemas.microsoft.com/office/drawing/2014/main" id="{92DEB41C-6F1D-0FD1-4603-EB467CA34FF6}"/>
+              </a:ext>
+            </a:extLst>
+          </p:cNvPr>
+          <p:cNvSpPr txBox="1"/>
+          <p:nvPr/>
+        </p:nvSpPr>
+        <p:spPr>
+          <a:xfrm>
+            <a:off x="6892119" y="4499230"/>
+            <a:ext cx="4724401" cy="646331"/>
+          </a:xfrm>
+          <a:prstGeom prst="rect">
+            <a:avLst/>
+          </a:prstGeom>
+          <a:noFill/>
+        </p:spPr>
+        <p:txBody>
+          <a:bodyPr wrap="square" rtlCol="0">
+            <a:spAutoFit/>
+          </a:bodyPr>
+          <a:lstStyle/>
+          <a:p>
+            <a:r>
+              <a:rPr lang="en-US" dirty="0"/>
+              <a:t>Image from MathWorks </a:t>
+            </a:r>
+            <a:r>
+              <a:rPr lang="en-US" dirty="0">
+                <a:hlinkClick r:id="rId3"/>
+              </a:rPr>
+              <a:t>page</a:t>
+            </a:r>
+            <a:r>
+              <a:rPr lang="en-US" dirty="0"/>
+              <a:t> on embedded design</a:t>
+            </a:r>
+          </a:p>
+        </p:txBody>
+      </p:sp>
+      <p:pic>
+        <p:nvPicPr>
+          <p:cNvPr id="6" name="Picture 5">
+            <a:extLst>
+              <a:ext uri="{FF2B5EF4-FFF2-40B4-BE49-F238E27FC236}">
+                <a16:creationId xmlns:a16="http://schemas.microsoft.com/office/drawing/2014/main" id="{9B968F51-7D3F-092B-95B1-F3C693C2EB06}"/>
+              </a:ext>
+            </a:extLst>
+          </p:cNvPr>
+          <p:cNvPicPr>
+            <a:picLocks noChangeAspect="1"/>
+          </p:cNvPicPr>
+          <p:nvPr/>
+        </p:nvPicPr>
+        <p:blipFill>
+          <a:blip r:embed="rId4"/>
+          <a:stretch>
+            <a:fillRect/>
+          </a:stretch>
+        </p:blipFill>
+        <p:spPr>
+          <a:xfrm>
+            <a:off x="9607844" y="4981700"/>
+            <a:ext cx="1436417" cy="1155057"/>
+          </a:xfrm>
+          <a:prstGeom prst="rect">
+            <a:avLst/>
+          </a:prstGeom>
+        </p:spPr>
+      </p:pic>
+    </p:spTree>
+    <p:extLst>
+      <p:ext uri="{BB962C8B-B14F-4D97-AF65-F5344CB8AC3E}">
+        <p14:creationId xmlns:p14="http://schemas.microsoft.com/office/powerpoint/2010/main" val="2931553393"/>
+      </p:ext>
+    </p:extLst>
+  </p:cSld>
+  <p:clrMapOvr>
+    <a:masterClrMapping/>
+  </p:clrMapOvr>
+</p:sld>
+</file>
+
+<file path=ppt/slides/slide37.xml><?xml version="1.0" encoding="utf-8"?>
+<p:sld xmlns:a="http://schemas.openxmlformats.org/drawingml/2006/main" xmlns:r="http://schemas.openxmlformats.org/officeDocument/2006/relationships" xmlns:p="http://schemas.openxmlformats.org/presentationml/2006/main">
+  <p:cSld>
+    <p:spTree>
+      <p:nvGrpSpPr>
+        <p:cNvPr id="1" name=""/>
+        <p:cNvGrpSpPr/>
+        <p:nvPr/>
+      </p:nvGrpSpPr>
+      <p:grpSpPr>
+        <a:xfrm>
+          <a:off x="0" y="0"/>
+          <a:ext cx="0" cy="0"/>
+          <a:chOff x="0" y="0"/>
+          <a:chExt cx="0" cy="0"/>
+        </a:xfrm>
+      </p:grpSpPr>
+      <p:sp>
+        <p:nvSpPr>
           <p:cNvPr id="36" name="Rectangle: Rounded Corners 35">
             <a:extLst>
               <a:ext uri="{FF2B5EF4-FFF2-40B4-BE49-F238E27FC236}">
@@ -22272,7 +23104,7 @@
           <a:p>
             <a:fld id="{629637A9-119A-49DA-BD12-AAC58B377D80}" type="slidenum">
               <a:rPr lang="en-US" smtClean="0"/>
-              <a:t>36</a:t>
+              <a:t>37</a:t>
             </a:fld>
             <a:endParaRPr lang="en-US" dirty="0"/>
           </a:p>
@@ -23836,7 +24668,7 @@
 </p:sld>
 </file>
 
-<file path=ppt/slides/slide37.xml><?xml version="1.0" encoding="utf-8"?>
+<file path=ppt/slides/slide38.xml><?xml version="1.0" encoding="utf-8"?>
 <p:sld xmlns:a="http://schemas.openxmlformats.org/drawingml/2006/main" xmlns:r="http://schemas.openxmlformats.org/officeDocument/2006/relationships" xmlns:p="http://schemas.openxmlformats.org/presentationml/2006/main">
   <p:cSld>
     <p:spTree>
@@ -23964,7 +24796,7 @@
           <a:p>
             <a:fld id="{629637A9-119A-49DA-BD12-AAC58B377D80}" type="slidenum">
               <a:rPr lang="en-US" smtClean="0"/>
-              <a:t>37</a:t>
+              <a:t>38</a:t>
             </a:fld>
             <a:endParaRPr lang="en-US" dirty="0"/>
           </a:p>
@@ -24134,7 +24966,7 @@
 </p:sld>
 </file>
 
-<file path=ppt/slides/slide38.xml><?xml version="1.0" encoding="utf-8"?>
+<file path=ppt/slides/slide39.xml><?xml version="1.0" encoding="utf-8"?>
 <p:sld xmlns:a="http://schemas.openxmlformats.org/drawingml/2006/main" xmlns:r="http://schemas.openxmlformats.org/officeDocument/2006/relationships" xmlns:p="http://schemas.openxmlformats.org/presentationml/2006/main">
   <p:cSld>
     <p:spTree>
@@ -24264,7 +25096,7 @@
           <a:p>
             <a:fld id="{629637A9-119A-49DA-BD12-AAC58B377D80}" type="slidenum">
               <a:rPr lang="en-US" smtClean="0"/>
-              <a:t>38</a:t>
+              <a:t>39</a:t>
             </a:fld>
             <a:endParaRPr lang="en-US" dirty="0"/>
           </a:p>
@@ -24396,378 +25228,6 @@
     <p:extLst>
       <p:ext uri="{BB962C8B-B14F-4D97-AF65-F5344CB8AC3E}">
         <p14:creationId xmlns:p14="http://schemas.microsoft.com/office/powerpoint/2010/main" val="1976264827"/>
-      </p:ext>
-    </p:extLst>
-  </p:cSld>
-  <p:clrMapOvr>
-    <a:masterClrMapping/>
-  </p:clrMapOvr>
-</p:sld>
-</file>
-
-<file path=ppt/slides/slide39.xml><?xml version="1.0" encoding="utf-8"?>
-<p:sld xmlns:a="http://schemas.openxmlformats.org/drawingml/2006/main" xmlns:r="http://schemas.openxmlformats.org/officeDocument/2006/relationships" xmlns:p="http://schemas.openxmlformats.org/presentationml/2006/main">
-  <p:cSld>
-    <p:spTree>
-      <p:nvGrpSpPr>
-        <p:cNvPr id="1" name="">
-          <a:extLst>
-            <a:ext uri="{FF2B5EF4-FFF2-40B4-BE49-F238E27FC236}">
-              <a16:creationId xmlns:a16="http://schemas.microsoft.com/office/drawing/2014/main" id="{10235057-6D65-8131-EC80-44C5609EEE37}"/>
-            </a:ext>
-          </a:extLst>
-        </p:cNvPr>
-        <p:cNvGrpSpPr/>
-        <p:nvPr/>
-      </p:nvGrpSpPr>
-      <p:grpSpPr>
-        <a:xfrm>
-          <a:off x="0" y="0"/>
-          <a:ext cx="0" cy="0"/>
-          <a:chOff x="0" y="0"/>
-          <a:chExt cx="0" cy="0"/>
-        </a:xfrm>
-      </p:grpSpPr>
-      <p:sp>
-        <p:nvSpPr>
-          <p:cNvPr id="2" name="Title 1">
-            <a:extLst>
-              <a:ext uri="{FF2B5EF4-FFF2-40B4-BE49-F238E27FC236}">
-                <a16:creationId xmlns:a16="http://schemas.microsoft.com/office/drawing/2014/main" id="{99DA1A90-F706-1FDE-9222-2BE1FE2CD446}"/>
-              </a:ext>
-            </a:extLst>
-          </p:cNvPr>
-          <p:cNvSpPr>
-            <a:spLocks noGrp="1"/>
-          </p:cNvSpPr>
-          <p:nvPr>
-            <p:ph type="title"/>
-          </p:nvPr>
-        </p:nvSpPr>
-        <p:spPr/>
-        <p:txBody>
-          <a:bodyPr/>
-          <a:lstStyle/>
-          <a:p>
-            <a:r>
-              <a:rPr lang="en-US" dirty="0"/>
-              <a:t>Module Declaration</a:t>
-            </a:r>
-          </a:p>
-        </p:txBody>
-      </p:sp>
-      <p:sp>
-        <p:nvSpPr>
-          <p:cNvPr id="3" name="Content Placeholder 2">
-            <a:extLst>
-              <a:ext uri="{FF2B5EF4-FFF2-40B4-BE49-F238E27FC236}">
-                <a16:creationId xmlns:a16="http://schemas.microsoft.com/office/drawing/2014/main" id="{946209DC-72AA-37E0-C9BA-121241C818A6}"/>
-              </a:ext>
-            </a:extLst>
-          </p:cNvPr>
-          <p:cNvSpPr>
-            <a:spLocks noGrp="1"/>
-          </p:cNvSpPr>
-          <p:nvPr>
-            <p:ph idx="1"/>
-          </p:nvPr>
-        </p:nvSpPr>
-        <p:spPr>
-          <a:xfrm>
-            <a:off x="6475963" y="2054092"/>
-            <a:ext cx="4890370" cy="3815002"/>
-          </a:xfrm>
-        </p:spPr>
-        <p:txBody>
-          <a:bodyPr/>
-          <a:lstStyle/>
-          <a:p>
-            <a:pPr marL="0" indent="0">
-              <a:buNone/>
-            </a:pPr>
-            <a:r>
-              <a:rPr lang="en-US" dirty="0"/>
-              <a:t>Port definitions</a:t>
-            </a:r>
-          </a:p>
-          <a:p>
-            <a:pPr lvl="1"/>
-            <a:r>
-              <a:rPr lang="en-US" dirty="0"/>
-              <a:t>Use pragma statements</a:t>
-            </a:r>
-          </a:p>
-          <a:p>
-            <a:pPr lvl="1"/>
-            <a:r>
-              <a:rPr lang="en-US" dirty="0"/>
-              <a:t>Do not change function</a:t>
-            </a:r>
-          </a:p>
-          <a:p>
-            <a:pPr lvl="1"/>
-            <a:r>
-              <a:rPr lang="en-US" dirty="0"/>
-              <a:t>But tell synthesizer how to map to hardware</a:t>
-            </a:r>
-          </a:p>
-          <a:p>
-            <a:pPr lvl="1"/>
-            <a:r>
-              <a:rPr lang="en-US" dirty="0"/>
-              <a:t>Indicates ports are </a:t>
-            </a:r>
-            <a:r>
-              <a:rPr lang="en-US" dirty="0" err="1"/>
-              <a:t>axislite</a:t>
-            </a:r>
-            <a:r>
-              <a:rPr lang="en-US" dirty="0"/>
-              <a:t> (AXI4-Lite slave)</a:t>
-            </a:r>
-          </a:p>
-          <a:p>
-            <a:pPr lvl="1"/>
-            <a:r>
-              <a:rPr lang="en-US" dirty="0"/>
-              <a:t>Share a common bundle</a:t>
-            </a:r>
-            <a:br>
-              <a:rPr lang="en-US" dirty="0"/>
-            </a:br>
-            <a:r>
-              <a:rPr lang="en-US" dirty="0"/>
-              <a:t>(all on the same AXI4-Lite interface)</a:t>
-            </a:r>
-          </a:p>
-          <a:p>
-            <a:pPr lvl="1"/>
-            <a:r>
-              <a:rPr lang="en-US" dirty="0"/>
-              <a:t>Additional port=return</a:t>
-            </a:r>
-            <a:br>
-              <a:rPr lang="en-US" dirty="0"/>
-            </a:br>
-            <a:r>
-              <a:rPr lang="en-US" dirty="0"/>
-              <a:t>(Provides start, stop, see later)</a:t>
-            </a:r>
-          </a:p>
-          <a:p>
-            <a:pPr marL="0" indent="0">
-              <a:buNone/>
-            </a:pPr>
-            <a:endParaRPr lang="en-US" dirty="0"/>
-          </a:p>
-        </p:txBody>
-      </p:sp>
-      <p:sp>
-        <p:nvSpPr>
-          <p:cNvPr id="4" name="Slide Number Placeholder 3">
-            <a:extLst>
-              <a:ext uri="{FF2B5EF4-FFF2-40B4-BE49-F238E27FC236}">
-                <a16:creationId xmlns:a16="http://schemas.microsoft.com/office/drawing/2014/main" id="{9A27D669-209F-6F29-721A-BCFFDECC718E}"/>
-              </a:ext>
-            </a:extLst>
-          </p:cNvPr>
-          <p:cNvSpPr>
-            <a:spLocks noGrp="1"/>
-          </p:cNvSpPr>
-          <p:nvPr>
-            <p:ph type="sldNum" sz="quarter" idx="12"/>
-          </p:nvPr>
-        </p:nvSpPr>
-        <p:spPr/>
-        <p:txBody>
-          <a:bodyPr/>
-          <a:lstStyle/>
-          <a:p>
-            <a:fld id="{629637A9-119A-49DA-BD12-AAC58B377D80}" type="slidenum">
-              <a:rPr lang="en-US" smtClean="0"/>
-              <a:t>39</a:t>
-            </a:fld>
-            <a:endParaRPr lang="en-US" dirty="0"/>
-          </a:p>
-        </p:txBody>
-      </p:sp>
-      <p:pic>
-        <p:nvPicPr>
-          <p:cNvPr id="10" name="Picture 9">
-            <a:extLst>
-              <a:ext uri="{FF2B5EF4-FFF2-40B4-BE49-F238E27FC236}">
-                <a16:creationId xmlns:a16="http://schemas.microsoft.com/office/drawing/2014/main" id="{FEE01DCF-527D-CD6E-BDBF-CE061165C6AA}"/>
-              </a:ext>
-            </a:extLst>
-          </p:cNvPr>
-          <p:cNvPicPr>
-            <a:picLocks noChangeAspect="1"/>
-          </p:cNvPicPr>
-          <p:nvPr/>
-        </p:nvPicPr>
-        <p:blipFill>
-          <a:blip r:embed="rId2"/>
-          <a:stretch>
-            <a:fillRect/>
-          </a:stretch>
-        </p:blipFill>
-        <p:spPr>
-          <a:xfrm>
-            <a:off x="825667" y="1947390"/>
-            <a:ext cx="4648849" cy="2810267"/>
-          </a:xfrm>
-          <a:prstGeom prst="rect">
-            <a:avLst/>
-          </a:prstGeom>
-        </p:spPr>
-      </p:pic>
-      <p:cxnSp>
-        <p:nvCxnSpPr>
-          <p:cNvPr id="14" name="Straight Arrow Connector 13">
-            <a:extLst>
-              <a:ext uri="{FF2B5EF4-FFF2-40B4-BE49-F238E27FC236}">
-                <a16:creationId xmlns:a16="http://schemas.microsoft.com/office/drawing/2014/main" id="{05DFF853-3C6C-13EA-3696-6DA36BF9F6A3}"/>
-              </a:ext>
-            </a:extLst>
-          </p:cNvPr>
-          <p:cNvCxnSpPr>
-            <a:cxnSpLocks/>
-          </p:cNvCxnSpPr>
-          <p:nvPr/>
-        </p:nvCxnSpPr>
-        <p:spPr>
-          <a:xfrm flipH="1">
-            <a:off x="5557066" y="2534263"/>
-            <a:ext cx="1000611" cy="0"/>
-          </a:xfrm>
-          <a:prstGeom prst="straightConnector1">
-            <a:avLst/>
-          </a:prstGeom>
-          <a:ln w="25400">
-            <a:tailEnd type="triangle"/>
-          </a:ln>
-        </p:spPr>
-        <p:style>
-          <a:lnRef idx="1">
-            <a:schemeClr val="accent1"/>
-          </a:lnRef>
-          <a:fillRef idx="0">
-            <a:schemeClr val="accent1"/>
-          </a:fillRef>
-          <a:effectRef idx="0">
-            <a:schemeClr val="accent1"/>
-          </a:effectRef>
-          <a:fontRef idx="minor">
-            <a:schemeClr val="tx1"/>
-          </a:fontRef>
-        </p:style>
-      </p:cxnSp>
-      <p:sp>
-        <p:nvSpPr>
-          <p:cNvPr id="7" name="Rectangle 6">
-            <a:extLst>
-              <a:ext uri="{FF2B5EF4-FFF2-40B4-BE49-F238E27FC236}">
-                <a16:creationId xmlns:a16="http://schemas.microsoft.com/office/drawing/2014/main" id="{26275978-6B0E-F2ED-922C-0F796A2634DE}"/>
-              </a:ext>
-            </a:extLst>
-          </p:cNvPr>
-          <p:cNvSpPr/>
-          <p:nvPr/>
-        </p:nvSpPr>
-        <p:spPr>
-          <a:xfrm>
-            <a:off x="825667" y="3498574"/>
-            <a:ext cx="4648849" cy="1259082"/>
-          </a:xfrm>
-          <a:prstGeom prst="rect">
-            <a:avLst/>
-          </a:prstGeom>
-          <a:solidFill>
-            <a:srgbClr val="E3DFF7">
-              <a:alpha val="80000"/>
-            </a:srgbClr>
-          </a:solidFill>
-        </p:spPr>
-        <p:style>
-          <a:lnRef idx="2">
-            <a:schemeClr val="accent1">
-              <a:shade val="15000"/>
-            </a:schemeClr>
-          </a:lnRef>
-          <a:fillRef idx="1">
-            <a:schemeClr val="accent1"/>
-          </a:fillRef>
-          <a:effectRef idx="0">
-            <a:schemeClr val="accent1"/>
-          </a:effectRef>
-          <a:fontRef idx="minor">
-            <a:schemeClr val="lt1"/>
-          </a:fontRef>
-        </p:style>
-        <p:txBody>
-          <a:bodyPr rtlCol="0" anchor="ctr"/>
-          <a:lstStyle/>
-          <a:p>
-            <a:pPr algn="ctr"/>
-            <a:endParaRPr lang="en-US"/>
-          </a:p>
-        </p:txBody>
-      </p:sp>
-      <p:sp>
-        <p:nvSpPr>
-          <p:cNvPr id="5" name="Rectangle 4">
-            <a:extLst>
-              <a:ext uri="{FF2B5EF4-FFF2-40B4-BE49-F238E27FC236}">
-                <a16:creationId xmlns:a16="http://schemas.microsoft.com/office/drawing/2014/main" id="{48E16AA5-27DE-CF46-3224-42A15FB7CBFB}"/>
-              </a:ext>
-            </a:extLst>
-          </p:cNvPr>
-          <p:cNvSpPr/>
-          <p:nvPr/>
-        </p:nvSpPr>
-        <p:spPr>
-          <a:xfrm>
-            <a:off x="825667" y="1947389"/>
-            <a:ext cx="4648849" cy="424750"/>
-          </a:xfrm>
-          <a:prstGeom prst="rect">
-            <a:avLst/>
-          </a:prstGeom>
-          <a:solidFill>
-            <a:srgbClr val="E3DFF7">
-              <a:alpha val="80000"/>
-            </a:srgbClr>
-          </a:solidFill>
-        </p:spPr>
-        <p:style>
-          <a:lnRef idx="2">
-            <a:schemeClr val="accent1">
-              <a:shade val="15000"/>
-            </a:schemeClr>
-          </a:lnRef>
-          <a:fillRef idx="1">
-            <a:schemeClr val="accent1"/>
-          </a:fillRef>
-          <a:effectRef idx="0">
-            <a:schemeClr val="accent1"/>
-          </a:effectRef>
-          <a:fontRef idx="minor">
-            <a:schemeClr val="lt1"/>
-          </a:fontRef>
-        </p:style>
-        <p:txBody>
-          <a:bodyPr rtlCol="0" anchor="ctr"/>
-          <a:lstStyle/>
-          <a:p>
-            <a:pPr algn="ctr"/>
-            <a:endParaRPr lang="en-US"/>
-          </a:p>
-        </p:txBody>
-      </p:sp>
-    </p:spTree>
-    <p:extLst>
-      <p:ext uri="{BB962C8B-B14F-4D97-AF65-F5344CB8AC3E}">
-        <p14:creationId xmlns:p14="http://schemas.microsoft.com/office/powerpoint/2010/main" val="2696828932"/>
       </p:ext>
     </p:extLst>
   </p:cSld>
@@ -26351,6 +26811,378 @@
         <p:cNvPr id="1" name="">
           <a:extLst>
             <a:ext uri="{FF2B5EF4-FFF2-40B4-BE49-F238E27FC236}">
+              <a16:creationId xmlns:a16="http://schemas.microsoft.com/office/drawing/2014/main" id="{10235057-6D65-8131-EC80-44C5609EEE37}"/>
+            </a:ext>
+          </a:extLst>
+        </p:cNvPr>
+        <p:cNvGrpSpPr/>
+        <p:nvPr/>
+      </p:nvGrpSpPr>
+      <p:grpSpPr>
+        <a:xfrm>
+          <a:off x="0" y="0"/>
+          <a:ext cx="0" cy="0"/>
+          <a:chOff x="0" y="0"/>
+          <a:chExt cx="0" cy="0"/>
+        </a:xfrm>
+      </p:grpSpPr>
+      <p:sp>
+        <p:nvSpPr>
+          <p:cNvPr id="2" name="Title 1">
+            <a:extLst>
+              <a:ext uri="{FF2B5EF4-FFF2-40B4-BE49-F238E27FC236}">
+                <a16:creationId xmlns:a16="http://schemas.microsoft.com/office/drawing/2014/main" id="{99DA1A90-F706-1FDE-9222-2BE1FE2CD446}"/>
+              </a:ext>
+            </a:extLst>
+          </p:cNvPr>
+          <p:cNvSpPr>
+            <a:spLocks noGrp="1"/>
+          </p:cNvSpPr>
+          <p:nvPr>
+            <p:ph type="title"/>
+          </p:nvPr>
+        </p:nvSpPr>
+        <p:spPr/>
+        <p:txBody>
+          <a:bodyPr/>
+          <a:lstStyle/>
+          <a:p>
+            <a:r>
+              <a:rPr lang="en-US" dirty="0"/>
+              <a:t>Module Declaration</a:t>
+            </a:r>
+          </a:p>
+        </p:txBody>
+      </p:sp>
+      <p:sp>
+        <p:nvSpPr>
+          <p:cNvPr id="3" name="Content Placeholder 2">
+            <a:extLst>
+              <a:ext uri="{FF2B5EF4-FFF2-40B4-BE49-F238E27FC236}">
+                <a16:creationId xmlns:a16="http://schemas.microsoft.com/office/drawing/2014/main" id="{946209DC-72AA-37E0-C9BA-121241C818A6}"/>
+              </a:ext>
+            </a:extLst>
+          </p:cNvPr>
+          <p:cNvSpPr>
+            <a:spLocks noGrp="1"/>
+          </p:cNvSpPr>
+          <p:nvPr>
+            <p:ph idx="1"/>
+          </p:nvPr>
+        </p:nvSpPr>
+        <p:spPr>
+          <a:xfrm>
+            <a:off x="6475963" y="2054092"/>
+            <a:ext cx="4890370" cy="3815002"/>
+          </a:xfrm>
+        </p:spPr>
+        <p:txBody>
+          <a:bodyPr/>
+          <a:lstStyle/>
+          <a:p>
+            <a:pPr marL="0" indent="0">
+              <a:buNone/>
+            </a:pPr>
+            <a:r>
+              <a:rPr lang="en-US" dirty="0"/>
+              <a:t>Port definitions</a:t>
+            </a:r>
+          </a:p>
+          <a:p>
+            <a:pPr lvl="1"/>
+            <a:r>
+              <a:rPr lang="en-US" dirty="0"/>
+              <a:t>Use pragma statements</a:t>
+            </a:r>
+          </a:p>
+          <a:p>
+            <a:pPr lvl="1"/>
+            <a:r>
+              <a:rPr lang="en-US" dirty="0"/>
+              <a:t>Do not change function</a:t>
+            </a:r>
+          </a:p>
+          <a:p>
+            <a:pPr lvl="1"/>
+            <a:r>
+              <a:rPr lang="en-US" dirty="0"/>
+              <a:t>But tell synthesizer how to map to hardware</a:t>
+            </a:r>
+          </a:p>
+          <a:p>
+            <a:pPr lvl="1"/>
+            <a:r>
+              <a:rPr lang="en-US" dirty="0"/>
+              <a:t>Indicates ports are </a:t>
+            </a:r>
+            <a:r>
+              <a:rPr lang="en-US" dirty="0" err="1"/>
+              <a:t>axislite</a:t>
+            </a:r>
+            <a:r>
+              <a:rPr lang="en-US" dirty="0"/>
+              <a:t> (AXI4-Lite slave)</a:t>
+            </a:r>
+          </a:p>
+          <a:p>
+            <a:pPr lvl="1"/>
+            <a:r>
+              <a:rPr lang="en-US" dirty="0"/>
+              <a:t>Share a common bundle</a:t>
+            </a:r>
+            <a:br>
+              <a:rPr lang="en-US" dirty="0"/>
+            </a:br>
+            <a:r>
+              <a:rPr lang="en-US" dirty="0"/>
+              <a:t>(all on the same AXI4-Lite interface)</a:t>
+            </a:r>
+          </a:p>
+          <a:p>
+            <a:pPr lvl="1"/>
+            <a:r>
+              <a:rPr lang="en-US" dirty="0"/>
+              <a:t>Additional port=return</a:t>
+            </a:r>
+            <a:br>
+              <a:rPr lang="en-US" dirty="0"/>
+            </a:br>
+            <a:r>
+              <a:rPr lang="en-US" dirty="0"/>
+              <a:t>(Provides start, stop, see later)</a:t>
+            </a:r>
+          </a:p>
+          <a:p>
+            <a:pPr marL="0" indent="0">
+              <a:buNone/>
+            </a:pPr>
+            <a:endParaRPr lang="en-US" dirty="0"/>
+          </a:p>
+        </p:txBody>
+      </p:sp>
+      <p:sp>
+        <p:nvSpPr>
+          <p:cNvPr id="4" name="Slide Number Placeholder 3">
+            <a:extLst>
+              <a:ext uri="{FF2B5EF4-FFF2-40B4-BE49-F238E27FC236}">
+                <a16:creationId xmlns:a16="http://schemas.microsoft.com/office/drawing/2014/main" id="{9A27D669-209F-6F29-721A-BCFFDECC718E}"/>
+              </a:ext>
+            </a:extLst>
+          </p:cNvPr>
+          <p:cNvSpPr>
+            <a:spLocks noGrp="1"/>
+          </p:cNvSpPr>
+          <p:nvPr>
+            <p:ph type="sldNum" sz="quarter" idx="12"/>
+          </p:nvPr>
+        </p:nvSpPr>
+        <p:spPr/>
+        <p:txBody>
+          <a:bodyPr/>
+          <a:lstStyle/>
+          <a:p>
+            <a:fld id="{629637A9-119A-49DA-BD12-AAC58B377D80}" type="slidenum">
+              <a:rPr lang="en-US" smtClean="0"/>
+              <a:t>40</a:t>
+            </a:fld>
+            <a:endParaRPr lang="en-US" dirty="0"/>
+          </a:p>
+        </p:txBody>
+      </p:sp>
+      <p:pic>
+        <p:nvPicPr>
+          <p:cNvPr id="10" name="Picture 9">
+            <a:extLst>
+              <a:ext uri="{FF2B5EF4-FFF2-40B4-BE49-F238E27FC236}">
+                <a16:creationId xmlns:a16="http://schemas.microsoft.com/office/drawing/2014/main" id="{FEE01DCF-527D-CD6E-BDBF-CE061165C6AA}"/>
+              </a:ext>
+            </a:extLst>
+          </p:cNvPr>
+          <p:cNvPicPr>
+            <a:picLocks noChangeAspect="1"/>
+          </p:cNvPicPr>
+          <p:nvPr/>
+        </p:nvPicPr>
+        <p:blipFill>
+          <a:blip r:embed="rId2"/>
+          <a:stretch>
+            <a:fillRect/>
+          </a:stretch>
+        </p:blipFill>
+        <p:spPr>
+          <a:xfrm>
+            <a:off x="825667" y="1947390"/>
+            <a:ext cx="4648849" cy="2810267"/>
+          </a:xfrm>
+          <a:prstGeom prst="rect">
+            <a:avLst/>
+          </a:prstGeom>
+        </p:spPr>
+      </p:pic>
+      <p:cxnSp>
+        <p:nvCxnSpPr>
+          <p:cNvPr id="14" name="Straight Arrow Connector 13">
+            <a:extLst>
+              <a:ext uri="{FF2B5EF4-FFF2-40B4-BE49-F238E27FC236}">
+                <a16:creationId xmlns:a16="http://schemas.microsoft.com/office/drawing/2014/main" id="{05DFF853-3C6C-13EA-3696-6DA36BF9F6A3}"/>
+              </a:ext>
+            </a:extLst>
+          </p:cNvPr>
+          <p:cNvCxnSpPr>
+            <a:cxnSpLocks/>
+          </p:cNvCxnSpPr>
+          <p:nvPr/>
+        </p:nvCxnSpPr>
+        <p:spPr>
+          <a:xfrm flipH="1">
+            <a:off x="5557066" y="2534263"/>
+            <a:ext cx="1000611" cy="0"/>
+          </a:xfrm>
+          <a:prstGeom prst="straightConnector1">
+            <a:avLst/>
+          </a:prstGeom>
+          <a:ln w="25400">
+            <a:tailEnd type="triangle"/>
+          </a:ln>
+        </p:spPr>
+        <p:style>
+          <a:lnRef idx="1">
+            <a:schemeClr val="accent1"/>
+          </a:lnRef>
+          <a:fillRef idx="0">
+            <a:schemeClr val="accent1"/>
+          </a:fillRef>
+          <a:effectRef idx="0">
+            <a:schemeClr val="accent1"/>
+          </a:effectRef>
+          <a:fontRef idx="minor">
+            <a:schemeClr val="tx1"/>
+          </a:fontRef>
+        </p:style>
+      </p:cxnSp>
+      <p:sp>
+        <p:nvSpPr>
+          <p:cNvPr id="7" name="Rectangle 6">
+            <a:extLst>
+              <a:ext uri="{FF2B5EF4-FFF2-40B4-BE49-F238E27FC236}">
+                <a16:creationId xmlns:a16="http://schemas.microsoft.com/office/drawing/2014/main" id="{26275978-6B0E-F2ED-922C-0F796A2634DE}"/>
+              </a:ext>
+            </a:extLst>
+          </p:cNvPr>
+          <p:cNvSpPr/>
+          <p:nvPr/>
+        </p:nvSpPr>
+        <p:spPr>
+          <a:xfrm>
+            <a:off x="825667" y="3498574"/>
+            <a:ext cx="4648849" cy="1259082"/>
+          </a:xfrm>
+          <a:prstGeom prst="rect">
+            <a:avLst/>
+          </a:prstGeom>
+          <a:solidFill>
+            <a:srgbClr val="E3DFF7">
+              <a:alpha val="80000"/>
+            </a:srgbClr>
+          </a:solidFill>
+        </p:spPr>
+        <p:style>
+          <a:lnRef idx="2">
+            <a:schemeClr val="accent1">
+              <a:shade val="15000"/>
+            </a:schemeClr>
+          </a:lnRef>
+          <a:fillRef idx="1">
+            <a:schemeClr val="accent1"/>
+          </a:fillRef>
+          <a:effectRef idx="0">
+            <a:schemeClr val="accent1"/>
+          </a:effectRef>
+          <a:fontRef idx="minor">
+            <a:schemeClr val="lt1"/>
+          </a:fontRef>
+        </p:style>
+        <p:txBody>
+          <a:bodyPr rtlCol="0" anchor="ctr"/>
+          <a:lstStyle/>
+          <a:p>
+            <a:pPr algn="ctr"/>
+            <a:endParaRPr lang="en-US"/>
+          </a:p>
+        </p:txBody>
+      </p:sp>
+      <p:sp>
+        <p:nvSpPr>
+          <p:cNvPr id="5" name="Rectangle 4">
+            <a:extLst>
+              <a:ext uri="{FF2B5EF4-FFF2-40B4-BE49-F238E27FC236}">
+                <a16:creationId xmlns:a16="http://schemas.microsoft.com/office/drawing/2014/main" id="{48E16AA5-27DE-CF46-3224-42A15FB7CBFB}"/>
+              </a:ext>
+            </a:extLst>
+          </p:cNvPr>
+          <p:cNvSpPr/>
+          <p:nvPr/>
+        </p:nvSpPr>
+        <p:spPr>
+          <a:xfrm>
+            <a:off x="825667" y="1947389"/>
+            <a:ext cx="4648849" cy="424750"/>
+          </a:xfrm>
+          <a:prstGeom prst="rect">
+            <a:avLst/>
+          </a:prstGeom>
+          <a:solidFill>
+            <a:srgbClr val="E3DFF7">
+              <a:alpha val="80000"/>
+            </a:srgbClr>
+          </a:solidFill>
+        </p:spPr>
+        <p:style>
+          <a:lnRef idx="2">
+            <a:schemeClr val="accent1">
+              <a:shade val="15000"/>
+            </a:schemeClr>
+          </a:lnRef>
+          <a:fillRef idx="1">
+            <a:schemeClr val="accent1"/>
+          </a:fillRef>
+          <a:effectRef idx="0">
+            <a:schemeClr val="accent1"/>
+          </a:effectRef>
+          <a:fontRef idx="minor">
+            <a:schemeClr val="lt1"/>
+          </a:fontRef>
+        </p:style>
+        <p:txBody>
+          <a:bodyPr rtlCol="0" anchor="ctr"/>
+          <a:lstStyle/>
+          <a:p>
+            <a:pPr algn="ctr"/>
+            <a:endParaRPr lang="en-US"/>
+          </a:p>
+        </p:txBody>
+      </p:sp>
+    </p:spTree>
+    <p:extLst>
+      <p:ext uri="{BB962C8B-B14F-4D97-AF65-F5344CB8AC3E}">
+        <p14:creationId xmlns:p14="http://schemas.microsoft.com/office/powerpoint/2010/main" val="2696828932"/>
+      </p:ext>
+    </p:extLst>
+  </p:cSld>
+  <p:clrMapOvr>
+    <a:masterClrMapping/>
+  </p:clrMapOvr>
+</p:sld>
+</file>
+
+<file path=ppt/slides/slide41.xml><?xml version="1.0" encoding="utf-8"?>
+<p:sld xmlns:a="http://schemas.openxmlformats.org/drawingml/2006/main" xmlns:r="http://schemas.openxmlformats.org/officeDocument/2006/relationships" xmlns:p="http://schemas.openxmlformats.org/presentationml/2006/main">
+  <p:cSld>
+    <p:spTree>
+      <p:nvGrpSpPr>
+        <p:cNvPr id="1" name="">
+          <a:extLst>
+            <a:ext uri="{FF2B5EF4-FFF2-40B4-BE49-F238E27FC236}">
               <a16:creationId xmlns:a16="http://schemas.microsoft.com/office/drawing/2014/main" id="{15645196-7F2C-5010-64BB-71D3DDFD0396}"/>
             </a:ext>
           </a:extLst>
@@ -26494,7 +27326,7 @@
           <a:p>
             <a:fld id="{629637A9-119A-49DA-BD12-AAC58B377D80}" type="slidenum">
               <a:rPr lang="en-US" smtClean="0"/>
-              <a:t>40</a:t>
+              <a:t>41</a:t>
             </a:fld>
             <a:endParaRPr lang="en-US" dirty="0"/>
           </a:p>
@@ -26626,252 +27458,6 @@
     <p:extLst>
       <p:ext uri="{BB962C8B-B14F-4D97-AF65-F5344CB8AC3E}">
         <p14:creationId xmlns:p14="http://schemas.microsoft.com/office/powerpoint/2010/main" val="1841721819"/>
-      </p:ext>
-    </p:extLst>
-  </p:cSld>
-  <p:clrMapOvr>
-    <a:masterClrMapping/>
-  </p:clrMapOvr>
-</p:sld>
-</file>
-
-<file path=ppt/slides/slide41.xml><?xml version="1.0" encoding="utf-8"?>
-<p:sld xmlns:a="http://schemas.openxmlformats.org/drawingml/2006/main" xmlns:r="http://schemas.openxmlformats.org/officeDocument/2006/relationships" xmlns:p="http://schemas.openxmlformats.org/presentationml/2006/main">
-  <p:cSld>
-    <p:spTree>
-      <p:nvGrpSpPr>
-        <p:cNvPr id="1" name=""/>
-        <p:cNvGrpSpPr/>
-        <p:nvPr/>
-      </p:nvGrpSpPr>
-      <p:grpSpPr>
-        <a:xfrm>
-          <a:off x="0" y="0"/>
-          <a:ext cx="0" cy="0"/>
-          <a:chOff x="0" y="0"/>
-          <a:chExt cx="0" cy="0"/>
-        </a:xfrm>
-      </p:grpSpPr>
-      <p:sp>
-        <p:nvSpPr>
-          <p:cNvPr id="2" name="Title 1">
-            <a:extLst>
-              <a:ext uri="{FF2B5EF4-FFF2-40B4-BE49-F238E27FC236}">
-                <a16:creationId xmlns:a16="http://schemas.microsoft.com/office/drawing/2014/main" id="{FA02E95B-3D65-C876-948A-A739F312D962}"/>
-              </a:ext>
-            </a:extLst>
-          </p:cNvPr>
-          <p:cNvSpPr>
-            <a:spLocks noGrp="1"/>
-          </p:cNvSpPr>
-          <p:nvPr>
-            <p:ph type="title"/>
-          </p:nvPr>
-        </p:nvSpPr>
-        <p:spPr/>
-        <p:txBody>
-          <a:bodyPr/>
-          <a:lstStyle/>
-          <a:p>
-            <a:r>
-              <a:rPr lang="en-US" dirty="0"/>
-              <a:t>Vitis HLS Testbench</a:t>
-            </a:r>
-          </a:p>
-        </p:txBody>
-      </p:sp>
-      <p:sp>
-        <p:nvSpPr>
-          <p:cNvPr id="3" name="Content Placeholder 2">
-            <a:extLst>
-              <a:ext uri="{FF2B5EF4-FFF2-40B4-BE49-F238E27FC236}">
-                <a16:creationId xmlns:a16="http://schemas.microsoft.com/office/drawing/2014/main" id="{C5A00320-83F0-5188-AFFA-87E225021563}"/>
-              </a:ext>
-            </a:extLst>
-          </p:cNvPr>
-          <p:cNvSpPr>
-            <a:spLocks noGrp="1"/>
-          </p:cNvSpPr>
-          <p:nvPr>
-            <p:ph idx="1"/>
-          </p:nvPr>
-        </p:nvSpPr>
-        <p:spPr/>
-        <p:txBody>
-          <a:bodyPr/>
-          <a:lstStyle/>
-          <a:p>
-            <a:r>
-              <a:rPr lang="en-US" dirty="0">
-                <a:solidFill>
-                  <a:schemeClr val="accent1"/>
-                </a:solidFill>
-              </a:rPr>
-              <a:t>Testbench</a:t>
-            </a:r>
-          </a:p>
-          <a:p>
-            <a:pPr lvl="1"/>
-            <a:r>
-              <a:rPr lang="en-US" dirty="0"/>
-              <a:t>Program simulating another unit interacting with IP</a:t>
-            </a:r>
-          </a:p>
-          <a:p>
-            <a:pPr lvl="1"/>
-            <a:r>
-              <a:rPr lang="en-US" dirty="0"/>
-              <a:t>IP is the device-under-test (DUT)</a:t>
-            </a:r>
-          </a:p>
-          <a:p>
-            <a:r>
-              <a:rPr lang="en-US" dirty="0"/>
-              <a:t>In </a:t>
-            </a:r>
-            <a:r>
-              <a:rPr lang="en-US" dirty="0">
-                <a:solidFill>
-                  <a:schemeClr val="accent1"/>
-                </a:solidFill>
-              </a:rPr>
-              <a:t>HLS</a:t>
-            </a:r>
-            <a:r>
-              <a:rPr lang="en-US" dirty="0"/>
-              <a:t>:</a:t>
-            </a:r>
-          </a:p>
-          <a:p>
-            <a:pPr lvl="1"/>
-            <a:r>
-              <a:rPr lang="en-US" dirty="0"/>
-              <a:t>Testbench another C program</a:t>
-            </a:r>
-          </a:p>
-          <a:p>
-            <a:pPr lvl="1"/>
-            <a:r>
-              <a:rPr lang="en-US" dirty="0"/>
-              <a:t>Calls the DUT module like a C function</a:t>
-            </a:r>
-          </a:p>
-          <a:p>
-            <a:pPr lvl="1"/>
-            <a:r>
-              <a:rPr lang="en-US" dirty="0"/>
-              <a:t>Sequential behavior</a:t>
-            </a:r>
-          </a:p>
-          <a:p>
-            <a:pPr lvl="1"/>
-            <a:r>
-              <a:rPr lang="en-US" dirty="0"/>
-              <a:t>Testbench code can use any C / C++ functions</a:t>
-            </a:r>
-          </a:p>
-          <a:p>
-            <a:pPr lvl="1"/>
-            <a:r>
-              <a:rPr lang="en-US" dirty="0"/>
-              <a:t>Does not need to be “synthesizable”</a:t>
-            </a:r>
-          </a:p>
-        </p:txBody>
-      </p:sp>
-      <p:sp>
-        <p:nvSpPr>
-          <p:cNvPr id="4" name="Slide Number Placeholder 3">
-            <a:extLst>
-              <a:ext uri="{FF2B5EF4-FFF2-40B4-BE49-F238E27FC236}">
-                <a16:creationId xmlns:a16="http://schemas.microsoft.com/office/drawing/2014/main" id="{28EF126D-5140-350D-AB28-9670C3A5B750}"/>
-              </a:ext>
-            </a:extLst>
-          </p:cNvPr>
-          <p:cNvSpPr>
-            <a:spLocks noGrp="1"/>
-          </p:cNvSpPr>
-          <p:nvPr>
-            <p:ph type="sldNum" sz="quarter" idx="12"/>
-          </p:nvPr>
-        </p:nvSpPr>
-        <p:spPr/>
-        <p:txBody>
-          <a:bodyPr/>
-          <a:lstStyle/>
-          <a:p>
-            <a:fld id="{629637A9-119A-49DA-BD12-AAC58B377D80}" type="slidenum">
-              <a:rPr lang="en-US" smtClean="0"/>
-              <a:t>41</a:t>
-            </a:fld>
-            <a:endParaRPr lang="en-US" dirty="0"/>
-          </a:p>
-        </p:txBody>
-      </p:sp>
-      <p:pic>
-        <p:nvPicPr>
-          <p:cNvPr id="6" name="Picture 5">
-            <a:extLst>
-              <a:ext uri="{FF2B5EF4-FFF2-40B4-BE49-F238E27FC236}">
-                <a16:creationId xmlns:a16="http://schemas.microsoft.com/office/drawing/2014/main" id="{07C497C0-D417-8945-050F-D9D95EF886E7}"/>
-              </a:ext>
-            </a:extLst>
-          </p:cNvPr>
-          <p:cNvPicPr>
-            <a:picLocks noChangeAspect="1"/>
-          </p:cNvPicPr>
-          <p:nvPr/>
-        </p:nvPicPr>
-        <p:blipFill>
-          <a:blip r:embed="rId2"/>
-          <a:stretch>
-            <a:fillRect/>
-          </a:stretch>
-        </p:blipFill>
-        <p:spPr>
-          <a:xfrm>
-            <a:off x="7441263" y="270035"/>
-            <a:ext cx="1762371" cy="1952898"/>
-          </a:xfrm>
-          <a:prstGeom prst="rect">
-            <a:avLst/>
-          </a:prstGeom>
-        </p:spPr>
-      </p:pic>
-      <p:pic>
-        <p:nvPicPr>
-          <p:cNvPr id="8" name="Picture 7">
-            <a:extLst>
-              <a:ext uri="{FF2B5EF4-FFF2-40B4-BE49-F238E27FC236}">
-                <a16:creationId xmlns:a16="http://schemas.microsoft.com/office/drawing/2014/main" id="{261CD016-A4D5-A17A-AEA2-0C690F17B5E2}"/>
-              </a:ext>
-            </a:extLst>
-          </p:cNvPr>
-          <p:cNvPicPr>
-            <a:picLocks noChangeAspect="1"/>
-          </p:cNvPicPr>
-          <p:nvPr/>
-        </p:nvPicPr>
-        <p:blipFill>
-          <a:blip r:embed="rId3"/>
-          <a:stretch>
-            <a:fillRect/>
-          </a:stretch>
-        </p:blipFill>
-        <p:spPr>
-          <a:xfrm>
-            <a:off x="7441263" y="2368766"/>
-            <a:ext cx="4126033" cy="3722915"/>
-          </a:xfrm>
-          <a:prstGeom prst="rect">
-            <a:avLst/>
-          </a:prstGeom>
-        </p:spPr>
-      </p:pic>
-    </p:spTree>
-    <p:extLst>
-      <p:ext uri="{BB962C8B-B14F-4D97-AF65-F5344CB8AC3E}">
-        <p14:creationId xmlns:p14="http://schemas.microsoft.com/office/powerpoint/2010/main" val="2897174127"/>
       </p:ext>
     </p:extLst>
   </p:cSld>
@@ -26903,7 +27489,7 @@
           <p:cNvPr id="2" name="Title 1">
             <a:extLst>
               <a:ext uri="{FF2B5EF4-FFF2-40B4-BE49-F238E27FC236}">
-                <a16:creationId xmlns:a16="http://schemas.microsoft.com/office/drawing/2014/main" id="{9EFA0A34-25DC-9D16-E2E3-4AF76B084F64}"/>
+                <a16:creationId xmlns:a16="http://schemas.microsoft.com/office/drawing/2014/main" id="{FA02E95B-3D65-C876-948A-A739F312D962}"/>
               </a:ext>
             </a:extLst>
           </p:cNvPr>
@@ -26921,7 +27507,7 @@
           <a:p>
             <a:r>
               <a:rPr lang="en-US" dirty="0"/>
-              <a:t>Vitis HLS Flow Described in Flow Panel</a:t>
+              <a:t>Vitis HLS Testbench</a:t>
             </a:r>
           </a:p>
         </p:txBody>
@@ -26931,7 +27517,7 @@
           <p:cNvPr id="3" name="Content Placeholder 2">
             <a:extLst>
               <a:ext uri="{FF2B5EF4-FFF2-40B4-BE49-F238E27FC236}">
-                <a16:creationId xmlns:a16="http://schemas.microsoft.com/office/drawing/2014/main" id="{7BE3D355-27B1-07F6-265A-75F58CDB46F1}"/>
+                <a16:creationId xmlns:a16="http://schemas.microsoft.com/office/drawing/2014/main" id="{C5A00320-83F0-5188-AFFA-87E225021563}"/>
               </a:ext>
             </a:extLst>
           </p:cNvPr>
@@ -26942,19 +27528,85 @@
             <p:ph idx="1"/>
           </p:nvPr>
         </p:nvSpPr>
-        <p:spPr>
-          <a:xfrm>
-            <a:off x="6196084" y="1539277"/>
-            <a:ext cx="4959596" cy="4329817"/>
-          </a:xfrm>
-        </p:spPr>
+        <p:spPr/>
         <p:txBody>
           <a:bodyPr/>
           <a:lstStyle/>
           <a:p>
             <a:r>
+              <a:rPr lang="en-US" dirty="0">
+                <a:solidFill>
+                  <a:schemeClr val="accent1"/>
+                </a:solidFill>
+              </a:rPr>
+              <a:t>Testbench</a:t>
+            </a:r>
+          </a:p>
+          <a:p>
+            <a:pPr lvl="1"/>
+            <a:r>
               <a:rPr lang="en-US" dirty="0"/>
-              <a:t>Tool follows expected steps for HLS flow</a:t>
+              <a:t>Program simulating another unit interacting with IP</a:t>
+            </a:r>
+          </a:p>
+          <a:p>
+            <a:pPr lvl="1"/>
+            <a:r>
+              <a:rPr lang="en-US" dirty="0"/>
+              <a:t>IP is the device-under-test (DUT)</a:t>
+            </a:r>
+          </a:p>
+          <a:p>
+            <a:r>
+              <a:rPr lang="en-US" dirty="0"/>
+              <a:t>In </a:t>
+            </a:r>
+            <a:r>
+              <a:rPr lang="en-US" dirty="0">
+                <a:solidFill>
+                  <a:schemeClr val="accent1"/>
+                </a:solidFill>
+              </a:rPr>
+              <a:t>HLS</a:t>
+            </a:r>
+            <a:r>
+              <a:rPr lang="en-US" dirty="0"/>
+              <a:t>:</a:t>
+            </a:r>
+          </a:p>
+          <a:p>
+            <a:pPr lvl="1"/>
+            <a:r>
+              <a:rPr lang="en-US" dirty="0"/>
+              <a:t>Testbench another C program</a:t>
+            </a:r>
+          </a:p>
+          <a:p>
+            <a:pPr lvl="1"/>
+            <a:r>
+              <a:rPr lang="en-US" dirty="0"/>
+              <a:t>Calls the DUT module like a C function</a:t>
+            </a:r>
+          </a:p>
+          <a:p>
+            <a:pPr lvl="1"/>
+            <a:r>
+              <a:rPr lang="en-US" dirty="0"/>
+              <a:t>Sequential behavior</a:t>
+            </a:r>
+          </a:p>
+          <a:p>
+            <a:pPr lvl="1"/>
+            <a:r>
+              <a:rPr lang="en-US" dirty="0"/>
+              <a:t>Testbench code can use any C / C++ functions</a:t>
+            </a:r>
+          </a:p>
+          <a:p>
+            <a:pPr lvl="1"/>
+            <a:r>
+              <a:rPr lang="en-US" dirty="0"/>
+              <a:t>Does not need to be “synthesizable”</a:t>
             </a:r>
           </a:p>
         </p:txBody>
@@ -26964,7 +27616,7 @@
           <p:cNvPr id="4" name="Slide Number Placeholder 3">
             <a:extLst>
               <a:ext uri="{FF2B5EF4-FFF2-40B4-BE49-F238E27FC236}">
-                <a16:creationId xmlns:a16="http://schemas.microsoft.com/office/drawing/2014/main" id="{B9D204A0-4263-9C55-1A95-38DF0CF8A1C1}"/>
+                <a16:creationId xmlns:a16="http://schemas.microsoft.com/office/drawing/2014/main" id="{28EF126D-5140-350D-AB28-9670C3A5B750}"/>
               </a:ext>
             </a:extLst>
           </p:cNvPr>
@@ -26993,7 +27645,7 @@
           <p:cNvPr id="6" name="Picture 5">
             <a:extLst>
               <a:ext uri="{FF2B5EF4-FFF2-40B4-BE49-F238E27FC236}">
-                <a16:creationId xmlns:a16="http://schemas.microsoft.com/office/drawing/2014/main" id="{88D61A20-EDD3-B489-FA79-30DD3169DDBA}"/>
+                <a16:creationId xmlns:a16="http://schemas.microsoft.com/office/drawing/2014/main" id="{07C497C0-D417-8945-050F-D9D95EF886E7}"/>
               </a:ext>
             </a:extLst>
           </p:cNvPr>
@@ -27010,604 +27662,48 @@
         </p:blipFill>
         <p:spPr>
           <a:xfrm>
-            <a:off x="1274397" y="1539277"/>
-            <a:ext cx="2505425" cy="4477375"/>
+            <a:off x="7441263" y="270035"/>
+            <a:ext cx="1762371" cy="1952898"/>
           </a:xfrm>
           <a:prstGeom prst="rect">
             <a:avLst/>
           </a:prstGeom>
         </p:spPr>
       </p:pic>
-      <p:sp>
-        <p:nvSpPr>
-          <p:cNvPr id="30" name="Rectangle: Rounded Corners 29">
-            <a:extLst>
-              <a:ext uri="{FF2B5EF4-FFF2-40B4-BE49-F238E27FC236}">
-                <a16:creationId xmlns:a16="http://schemas.microsoft.com/office/drawing/2014/main" id="{4CA205D4-AC6F-E8B9-7DF1-B9BC9334CD7D}"/>
-              </a:ext>
-            </a:extLst>
-          </p:cNvPr>
-          <p:cNvSpPr/>
+      <p:pic>
+        <p:nvPicPr>
+          <p:cNvPr id="8" name="Picture 7">
+            <a:extLst>
+              <a:ext uri="{FF2B5EF4-FFF2-40B4-BE49-F238E27FC236}">
+                <a16:creationId xmlns:a16="http://schemas.microsoft.com/office/drawing/2014/main" id="{261CD016-A4D5-A17A-AEA2-0C690F17B5E2}"/>
+              </a:ext>
+            </a:extLst>
+          </p:cNvPr>
+          <p:cNvPicPr>
+            <a:picLocks noChangeAspect="1"/>
+          </p:cNvPicPr>
           <p:nvPr/>
-        </p:nvSpPr>
-        <p:spPr>
-          <a:xfrm>
-            <a:off x="5661232" y="4714099"/>
-            <a:ext cx="1328648" cy="872422"/>
-          </a:xfrm>
-          <a:prstGeom prst="roundRect">
-            <a:avLst/>
-          </a:prstGeom>
-          <a:solidFill>
-            <a:schemeClr val="accent4">
-              <a:lumMod val="20000"/>
-              <a:lumOff val="80000"/>
-            </a:schemeClr>
-          </a:solidFill>
-          <a:ln>
-            <a:solidFill>
-              <a:schemeClr val="accent5">
-                <a:lumMod val="75000"/>
-              </a:schemeClr>
-            </a:solidFill>
-          </a:ln>
-        </p:spPr>
-        <p:style>
-          <a:lnRef idx="2">
-            <a:schemeClr val="accent1">
-              <a:shade val="15000"/>
-            </a:schemeClr>
-          </a:lnRef>
-          <a:fillRef idx="1">
-            <a:schemeClr val="accent1"/>
-          </a:fillRef>
-          <a:effectRef idx="0">
-            <a:schemeClr val="accent1"/>
-          </a:effectRef>
-          <a:fontRef idx="minor">
-            <a:schemeClr val="lt1"/>
-          </a:fontRef>
-        </p:style>
-        <p:txBody>
-          <a:bodyPr rtlCol="0" anchor="ctr"/>
-          <a:lstStyle/>
-          <a:p>
-            <a:pPr algn="ctr"/>
-            <a:r>
-              <a:rPr lang="en-US" sz="1600" dirty="0">
-                <a:solidFill>
-                  <a:schemeClr val="tx1"/>
-                </a:solidFill>
-              </a:rPr>
-              <a:t>RTL Simulation</a:t>
-            </a:r>
-          </a:p>
-        </p:txBody>
-      </p:sp>
-      <p:sp>
-        <p:nvSpPr>
-          <p:cNvPr id="31" name="Rectangle: Rounded Corners 30">
-            <a:extLst>
-              <a:ext uri="{FF2B5EF4-FFF2-40B4-BE49-F238E27FC236}">
-                <a16:creationId xmlns:a16="http://schemas.microsoft.com/office/drawing/2014/main" id="{5B296190-E8F9-B1C9-3412-5E89562B9483}"/>
-              </a:ext>
-            </a:extLst>
-          </p:cNvPr>
-          <p:cNvSpPr/>
-          <p:nvPr/>
-        </p:nvSpPr>
-        <p:spPr>
-          <a:xfrm>
-            <a:off x="7207199" y="4672121"/>
-            <a:ext cx="1304929" cy="914400"/>
-          </a:xfrm>
-          <a:prstGeom prst="roundRect">
-            <a:avLst/>
-          </a:prstGeom>
-          <a:solidFill>
-            <a:schemeClr val="accent4">
-              <a:lumMod val="20000"/>
-              <a:lumOff val="80000"/>
-            </a:schemeClr>
-          </a:solidFill>
-          <a:ln>
-            <a:solidFill>
-              <a:schemeClr val="accent5">
-                <a:lumMod val="75000"/>
-              </a:schemeClr>
-            </a:solidFill>
-          </a:ln>
-        </p:spPr>
-        <p:style>
-          <a:lnRef idx="2">
-            <a:schemeClr val="accent1">
-              <a:shade val="15000"/>
-            </a:schemeClr>
-          </a:lnRef>
-          <a:fillRef idx="1">
-            <a:schemeClr val="accent1"/>
-          </a:fillRef>
-          <a:effectRef idx="0">
-            <a:schemeClr val="accent1"/>
-          </a:effectRef>
-          <a:fontRef idx="minor">
-            <a:schemeClr val="lt1"/>
-          </a:fontRef>
-        </p:style>
-        <p:txBody>
-          <a:bodyPr rtlCol="0" anchor="ctr"/>
-          <a:lstStyle/>
-          <a:p>
-            <a:pPr algn="ctr"/>
-            <a:r>
-              <a:rPr lang="en-US" sz="1600" dirty="0">
-                <a:solidFill>
-                  <a:schemeClr val="tx1"/>
-                </a:solidFill>
-              </a:rPr>
-              <a:t>Package</a:t>
-            </a:r>
-          </a:p>
-        </p:txBody>
-      </p:sp>
-      <p:sp>
-        <p:nvSpPr>
-          <p:cNvPr id="32" name="Rectangle: Rounded Corners 31">
-            <a:extLst>
-              <a:ext uri="{FF2B5EF4-FFF2-40B4-BE49-F238E27FC236}">
-                <a16:creationId xmlns:a16="http://schemas.microsoft.com/office/drawing/2014/main" id="{E8FF64AC-51C0-2AF5-1E5C-A7EFF236F388}"/>
-              </a:ext>
-            </a:extLst>
-          </p:cNvPr>
-          <p:cNvSpPr/>
-          <p:nvPr/>
-        </p:nvSpPr>
-        <p:spPr>
-          <a:xfrm>
-            <a:off x="6978423" y="2883752"/>
-            <a:ext cx="1133992" cy="893410"/>
-          </a:xfrm>
-          <a:prstGeom prst="roundRect">
-            <a:avLst/>
-          </a:prstGeom>
-          <a:solidFill>
-            <a:srgbClr val="E0F8E0"/>
-          </a:solidFill>
-          <a:ln>
-            <a:solidFill>
-              <a:schemeClr val="accent5">
-                <a:lumMod val="75000"/>
-              </a:schemeClr>
-            </a:solidFill>
-          </a:ln>
-        </p:spPr>
-        <p:style>
-          <a:lnRef idx="2">
-            <a:schemeClr val="accent1">
-              <a:shade val="15000"/>
-            </a:schemeClr>
-          </a:lnRef>
-          <a:fillRef idx="1">
-            <a:schemeClr val="accent1"/>
-          </a:fillRef>
-          <a:effectRef idx="0">
-            <a:schemeClr val="accent1"/>
-          </a:effectRef>
-          <a:fontRef idx="minor">
-            <a:schemeClr val="lt1"/>
-          </a:fontRef>
-        </p:style>
-        <p:txBody>
-          <a:bodyPr rtlCol="0" anchor="ctr"/>
-          <a:lstStyle/>
-          <a:p>
-            <a:pPr algn="ctr"/>
-            <a:r>
-              <a:rPr lang="en-US" sz="1600" dirty="0">
-                <a:solidFill>
-                  <a:schemeClr val="tx1"/>
-                </a:solidFill>
-              </a:rPr>
-              <a:t>C Synthesis</a:t>
-            </a:r>
-          </a:p>
-        </p:txBody>
-      </p:sp>
-      <p:sp>
-        <p:nvSpPr>
-          <p:cNvPr id="33" name="Rectangle: Rounded Corners 32">
-            <a:extLst>
-              <a:ext uri="{FF2B5EF4-FFF2-40B4-BE49-F238E27FC236}">
-                <a16:creationId xmlns:a16="http://schemas.microsoft.com/office/drawing/2014/main" id="{01D3A6D8-27BF-906C-9E4F-B05CE0ADE565}"/>
-              </a:ext>
-            </a:extLst>
-          </p:cNvPr>
-          <p:cNvSpPr/>
-          <p:nvPr/>
-        </p:nvSpPr>
-        <p:spPr>
-          <a:xfrm>
-            <a:off x="5322628" y="2883751"/>
-            <a:ext cx="1328648" cy="872422"/>
-          </a:xfrm>
-          <a:prstGeom prst="roundRect">
-            <a:avLst/>
-          </a:prstGeom>
-          <a:solidFill>
-            <a:srgbClr val="E0F8E0"/>
-          </a:solidFill>
-          <a:ln>
-            <a:solidFill>
-              <a:schemeClr val="accent5">
-                <a:lumMod val="75000"/>
-              </a:schemeClr>
-            </a:solidFill>
-          </a:ln>
-        </p:spPr>
-        <p:style>
-          <a:lnRef idx="2">
-            <a:schemeClr val="accent1">
-              <a:shade val="15000"/>
-            </a:schemeClr>
-          </a:lnRef>
-          <a:fillRef idx="1">
-            <a:schemeClr val="accent1"/>
-          </a:fillRef>
-          <a:effectRef idx="0">
-            <a:schemeClr val="accent1"/>
-          </a:effectRef>
-          <a:fontRef idx="minor">
-            <a:schemeClr val="lt1"/>
-          </a:fontRef>
-        </p:style>
-        <p:txBody>
-          <a:bodyPr rtlCol="0" anchor="ctr"/>
-          <a:lstStyle/>
-          <a:p>
-            <a:pPr algn="ctr"/>
-            <a:r>
-              <a:rPr lang="en-US" sz="1600" dirty="0">
-                <a:solidFill>
-                  <a:schemeClr val="tx1"/>
-                </a:solidFill>
-              </a:rPr>
-              <a:t>C </a:t>
-            </a:r>
-            <a:br>
-              <a:rPr lang="en-US" sz="1600" dirty="0">
-                <a:solidFill>
-                  <a:schemeClr val="tx1"/>
-                </a:solidFill>
-              </a:rPr>
-            </a:br>
-            <a:r>
-              <a:rPr lang="en-US" sz="1600" dirty="0">
-                <a:solidFill>
-                  <a:schemeClr val="tx1"/>
-                </a:solidFill>
-              </a:rPr>
-              <a:t>simulation</a:t>
-            </a:r>
-          </a:p>
-        </p:txBody>
-      </p:sp>
-      <p:sp>
-        <p:nvSpPr>
-          <p:cNvPr id="34" name="Arrow: Right 33">
-            <a:extLst>
-              <a:ext uri="{FF2B5EF4-FFF2-40B4-BE49-F238E27FC236}">
-                <a16:creationId xmlns:a16="http://schemas.microsoft.com/office/drawing/2014/main" id="{ED062EA9-EDAD-B9E3-24BB-586BCA5C738A}"/>
-              </a:ext>
-            </a:extLst>
-          </p:cNvPr>
-          <p:cNvSpPr/>
-          <p:nvPr/>
-        </p:nvSpPr>
-        <p:spPr>
-          <a:xfrm rot="5400000">
-            <a:off x="6209098" y="4310663"/>
-            <a:ext cx="549711" cy="388882"/>
-          </a:xfrm>
-          <a:prstGeom prst="rightArrow">
-            <a:avLst/>
-          </a:prstGeom>
-          <a:solidFill>
-            <a:schemeClr val="accent5">
-              <a:lumMod val="75000"/>
-            </a:schemeClr>
-          </a:solidFill>
-          <a:ln>
-            <a:noFill/>
-          </a:ln>
-        </p:spPr>
-        <p:style>
-          <a:lnRef idx="2">
-            <a:schemeClr val="accent1">
-              <a:shade val="15000"/>
-            </a:schemeClr>
-          </a:lnRef>
-          <a:fillRef idx="1">
-            <a:schemeClr val="accent1"/>
-          </a:fillRef>
-          <a:effectRef idx="0">
-            <a:schemeClr val="accent1"/>
-          </a:effectRef>
-          <a:fontRef idx="minor">
-            <a:schemeClr val="lt1"/>
-          </a:fontRef>
-        </p:style>
-        <p:txBody>
-          <a:bodyPr rtlCol="0" anchor="ctr"/>
-          <a:lstStyle/>
-          <a:p>
-            <a:pPr algn="ctr"/>
-            <a:endParaRPr lang="en-US"/>
-          </a:p>
-        </p:txBody>
-      </p:sp>
-      <p:sp>
-        <p:nvSpPr>
-          <p:cNvPr id="35" name="Arrow: Right 34">
-            <a:extLst>
-              <a:ext uri="{FF2B5EF4-FFF2-40B4-BE49-F238E27FC236}">
-                <a16:creationId xmlns:a16="http://schemas.microsoft.com/office/drawing/2014/main" id="{C978349C-BF94-D587-10F2-EC9AF6CFAD7C}"/>
-              </a:ext>
-            </a:extLst>
-          </p:cNvPr>
-          <p:cNvSpPr/>
-          <p:nvPr/>
-        </p:nvSpPr>
-        <p:spPr>
-          <a:xfrm>
-            <a:off x="6874911" y="4934880"/>
-            <a:ext cx="476718" cy="372574"/>
-          </a:xfrm>
-          <a:prstGeom prst="rightArrow">
-            <a:avLst/>
-          </a:prstGeom>
-          <a:solidFill>
-            <a:schemeClr val="accent5">
-              <a:lumMod val="60000"/>
-              <a:lumOff val="40000"/>
-            </a:schemeClr>
-          </a:solidFill>
-        </p:spPr>
-        <p:style>
-          <a:lnRef idx="2">
-            <a:schemeClr val="accent1">
-              <a:shade val="15000"/>
-            </a:schemeClr>
-          </a:lnRef>
-          <a:fillRef idx="1">
-            <a:schemeClr val="accent1"/>
-          </a:fillRef>
-          <a:effectRef idx="0">
-            <a:schemeClr val="accent1"/>
-          </a:effectRef>
-          <a:fontRef idx="minor">
-            <a:schemeClr val="lt1"/>
-          </a:fontRef>
-        </p:style>
-        <p:txBody>
-          <a:bodyPr rtlCol="0" anchor="ctr"/>
-          <a:lstStyle/>
-          <a:p>
-            <a:pPr algn="ctr"/>
-            <a:endParaRPr lang="en-US"/>
-          </a:p>
-        </p:txBody>
-      </p:sp>
-      <p:sp>
-        <p:nvSpPr>
-          <p:cNvPr id="36" name="Arrow: Right 35">
-            <a:extLst>
-              <a:ext uri="{FF2B5EF4-FFF2-40B4-BE49-F238E27FC236}">
-                <a16:creationId xmlns:a16="http://schemas.microsoft.com/office/drawing/2014/main" id="{97906784-E198-9341-0AB7-AB8911F2C59B}"/>
-              </a:ext>
-            </a:extLst>
-          </p:cNvPr>
-          <p:cNvSpPr/>
-          <p:nvPr/>
-        </p:nvSpPr>
-        <p:spPr>
-          <a:xfrm>
-            <a:off x="6580001" y="3136016"/>
-            <a:ext cx="578644" cy="388882"/>
-          </a:xfrm>
-          <a:prstGeom prst="rightArrow">
-            <a:avLst/>
-          </a:prstGeom>
-          <a:solidFill>
-            <a:srgbClr val="00B050"/>
-          </a:solidFill>
-          <a:ln>
-            <a:solidFill>
-              <a:srgbClr val="00B050"/>
-            </a:solidFill>
-          </a:ln>
-        </p:spPr>
-        <p:style>
-          <a:lnRef idx="2">
-            <a:schemeClr val="accent1">
-              <a:shade val="15000"/>
-            </a:schemeClr>
-          </a:lnRef>
-          <a:fillRef idx="1">
-            <a:schemeClr val="accent1"/>
-          </a:fillRef>
-          <a:effectRef idx="0">
-            <a:schemeClr val="accent1"/>
-          </a:effectRef>
-          <a:fontRef idx="minor">
-            <a:schemeClr val="lt1"/>
-          </a:fontRef>
-        </p:style>
-        <p:txBody>
-          <a:bodyPr rtlCol="0" anchor="ctr"/>
-          <a:lstStyle/>
-          <a:p>
-            <a:pPr algn="ctr"/>
-            <a:endParaRPr lang="en-US"/>
-          </a:p>
-        </p:txBody>
-      </p:sp>
-      <p:sp>
-        <p:nvSpPr>
-          <p:cNvPr id="37" name="Arrow: Right 36">
-            <a:extLst>
-              <a:ext uri="{FF2B5EF4-FFF2-40B4-BE49-F238E27FC236}">
-                <a16:creationId xmlns:a16="http://schemas.microsoft.com/office/drawing/2014/main" id="{163D780A-C78C-4F85-7594-9EC4BDB6ED40}"/>
-              </a:ext>
-            </a:extLst>
-          </p:cNvPr>
-          <p:cNvSpPr/>
-          <p:nvPr/>
-        </p:nvSpPr>
-        <p:spPr>
-          <a:xfrm>
-            <a:off x="4642398" y="3144612"/>
-            <a:ext cx="738928" cy="388882"/>
-          </a:xfrm>
-          <a:prstGeom prst="rightArrow">
-            <a:avLst/>
-          </a:prstGeom>
-          <a:solidFill>
-            <a:srgbClr val="00B050"/>
-          </a:solidFill>
-          <a:ln>
-            <a:solidFill>
-              <a:srgbClr val="00B050"/>
-            </a:solidFill>
-          </a:ln>
-        </p:spPr>
-        <p:style>
-          <a:lnRef idx="2">
-            <a:schemeClr val="accent1">
-              <a:shade val="15000"/>
-            </a:schemeClr>
-          </a:lnRef>
-          <a:fillRef idx="1">
-            <a:schemeClr val="accent1"/>
-          </a:fillRef>
-          <a:effectRef idx="0">
-            <a:schemeClr val="accent1"/>
-          </a:effectRef>
-          <a:fontRef idx="minor">
-            <a:schemeClr val="lt1"/>
-          </a:fontRef>
-        </p:style>
-        <p:txBody>
-          <a:bodyPr rtlCol="0" anchor="ctr"/>
-          <a:lstStyle/>
-          <a:p>
-            <a:pPr algn="ctr"/>
-            <a:endParaRPr lang="en-US"/>
-          </a:p>
-        </p:txBody>
-      </p:sp>
-      <p:sp>
-        <p:nvSpPr>
-          <p:cNvPr id="38" name="TextBox 37">
-            <a:extLst>
-              <a:ext uri="{FF2B5EF4-FFF2-40B4-BE49-F238E27FC236}">
-                <a16:creationId xmlns:a16="http://schemas.microsoft.com/office/drawing/2014/main" id="{D43A3F1F-ABB7-A914-4F56-ACECC9D7C408}"/>
-              </a:ext>
-            </a:extLst>
-          </p:cNvPr>
-          <p:cNvSpPr txBox="1"/>
-          <p:nvPr/>
-        </p:nvSpPr>
-        <p:spPr>
-          <a:xfrm>
-            <a:off x="4738882" y="3979838"/>
-            <a:ext cx="1496692" cy="584775"/>
+        </p:nvPicPr>
+        <p:blipFill>
+          <a:blip r:embed="rId3"/>
+          <a:stretch>
+            <a:fillRect/>
+          </a:stretch>
+        </p:blipFill>
+        <p:spPr>
+          <a:xfrm>
+            <a:off x="7441263" y="2368766"/>
+            <a:ext cx="4126033" cy="3722915"/>
           </a:xfrm>
           <a:prstGeom prst="rect">
             <a:avLst/>
           </a:prstGeom>
-          <a:noFill/>
-        </p:spPr>
-        <p:txBody>
-          <a:bodyPr wrap="none" rtlCol="0">
-            <a:spAutoFit/>
-          </a:bodyPr>
-          <a:lstStyle/>
-          <a:p>
-            <a:r>
-              <a:rPr lang="en-US" sz="1600" dirty="0"/>
-              <a:t>Auto-generated</a:t>
-            </a:r>
-            <a:br>
-              <a:rPr lang="en-US" sz="1600" dirty="0"/>
-            </a:br>
-            <a:r>
-              <a:rPr lang="en-US" sz="1600" dirty="0"/>
-              <a:t>RTL files</a:t>
-            </a:r>
-          </a:p>
-        </p:txBody>
-      </p:sp>
-      <p:sp>
-        <p:nvSpPr>
-          <p:cNvPr id="39" name="L-Shape 38">
-            <a:extLst>
-              <a:ext uri="{FF2B5EF4-FFF2-40B4-BE49-F238E27FC236}">
-                <a16:creationId xmlns:a16="http://schemas.microsoft.com/office/drawing/2014/main" id="{23E1CA6C-D160-9777-AED2-807F591AA08B}"/>
-              </a:ext>
-            </a:extLst>
-          </p:cNvPr>
-          <p:cNvSpPr/>
-          <p:nvPr/>
-        </p:nvSpPr>
-        <p:spPr>
-          <a:xfrm rot="16200000">
-            <a:off x="6717600" y="3465484"/>
-            <a:ext cx="598116" cy="1238536"/>
-          </a:xfrm>
-          <a:prstGeom prst="corner">
-            <a:avLst>
-              <a:gd name="adj1" fmla="val 28277"/>
-              <a:gd name="adj2" fmla="val 30302"/>
-            </a:avLst>
-          </a:prstGeom>
-          <a:solidFill>
-            <a:schemeClr val="accent5">
-              <a:lumMod val="75000"/>
-            </a:schemeClr>
-          </a:solidFill>
-          <a:ln>
-            <a:noFill/>
-          </a:ln>
-        </p:spPr>
-        <p:style>
-          <a:lnRef idx="2">
-            <a:schemeClr val="accent1">
-              <a:shade val="15000"/>
-            </a:schemeClr>
-          </a:lnRef>
-          <a:fillRef idx="1">
-            <a:schemeClr val="accent1"/>
-          </a:fillRef>
-          <a:effectRef idx="0">
-            <a:schemeClr val="accent1"/>
-          </a:effectRef>
-          <a:fontRef idx="minor">
-            <a:schemeClr val="lt1"/>
-          </a:fontRef>
-        </p:style>
-        <p:txBody>
-          <a:bodyPr rtlCol="0" anchor="ctr"/>
-          <a:lstStyle/>
-          <a:p>
-            <a:pPr algn="ctr"/>
-            <a:endParaRPr lang="en-US"/>
-          </a:p>
-        </p:txBody>
-      </p:sp>
+        </p:spPr>
+      </p:pic>
     </p:spTree>
     <p:extLst>
       <p:ext uri="{BB962C8B-B14F-4D97-AF65-F5344CB8AC3E}">
-        <p14:creationId xmlns:p14="http://schemas.microsoft.com/office/powerpoint/2010/main" val="3758559764"/>
+        <p14:creationId xmlns:p14="http://schemas.microsoft.com/office/powerpoint/2010/main" val="2897174127"/>
       </p:ext>
     </p:extLst>
   </p:cSld>
@@ -27639,7 +27735,7 @@
           <p:cNvPr id="2" name="Title 1">
             <a:extLst>
               <a:ext uri="{FF2B5EF4-FFF2-40B4-BE49-F238E27FC236}">
-                <a16:creationId xmlns:a16="http://schemas.microsoft.com/office/drawing/2014/main" id="{066FF4E1-D1EF-6615-0F28-8B33EB420D2C}"/>
+                <a16:creationId xmlns:a16="http://schemas.microsoft.com/office/drawing/2014/main" id="{9EFA0A34-25DC-9D16-E2E3-4AF76B084F64}"/>
               </a:ext>
             </a:extLst>
           </p:cNvPr>
@@ -27657,7 +27753,7 @@
           <a:p>
             <a:r>
               <a:rPr lang="en-US" dirty="0"/>
-              <a:t>Synthesis Output</a:t>
+              <a:t>Vitis HLS Flow Described in Flow Panel</a:t>
             </a:r>
           </a:p>
         </p:txBody>
@@ -27667,7 +27763,7 @@
           <p:cNvPr id="3" name="Content Placeholder 2">
             <a:extLst>
               <a:ext uri="{FF2B5EF4-FFF2-40B4-BE49-F238E27FC236}">
-                <a16:creationId xmlns:a16="http://schemas.microsoft.com/office/drawing/2014/main" id="{BA091796-DBD2-7B96-8E93-B271125FC810}"/>
+                <a16:creationId xmlns:a16="http://schemas.microsoft.com/office/drawing/2014/main" id="{7BE3D355-27B1-07F6-265A-75F58CDB46F1}"/>
               </a:ext>
             </a:extLst>
           </p:cNvPr>
@@ -27678,48 +27774,19 @@
             <p:ph idx="1"/>
           </p:nvPr>
         </p:nvSpPr>
-        <p:spPr/>
+        <p:spPr>
+          <a:xfrm>
+            <a:off x="6196084" y="1539277"/>
+            <a:ext cx="4959596" cy="4329817"/>
+          </a:xfrm>
+        </p:spPr>
         <p:txBody>
           <a:bodyPr/>
           <a:lstStyle/>
           <a:p>
             <a:r>
               <a:rPr lang="en-US" dirty="0"/>
-              <a:t>Resulting Verilog files are massive!</a:t>
-            </a:r>
-          </a:p>
-          <a:p>
-            <a:r>
-              <a:rPr lang="en-US" dirty="0"/>
-              <a:t>Main function in this case:</a:t>
-            </a:r>
-          </a:p>
-          <a:p>
-            <a:pPr lvl="1"/>
-            <a:r>
-              <a:rPr lang="en-US" dirty="0" err="1"/>
-              <a:t>simp_fun.v</a:t>
-            </a:r>
-            <a:endParaRPr lang="en-US" dirty="0"/>
-          </a:p>
-          <a:p>
-            <a:pPr lvl="1"/>
-            <a:r>
-              <a:rPr lang="en-US" dirty="0"/>
-              <a:t>&gt; 200 lines of Verilog</a:t>
-            </a:r>
-          </a:p>
-          <a:p>
-            <a:pPr lvl="1"/>
-            <a:r>
-              <a:rPr lang="en-US" dirty="0"/>
-              <a:t>Hard to read code</a:t>
-            </a:r>
-          </a:p>
-          <a:p>
-            <a:r>
-              <a:rPr lang="en-US" dirty="0"/>
-              <a:t>You saved a lot of time coding</a:t>
+              <a:t>Tool follows expected steps for HLS flow</a:t>
             </a:r>
           </a:p>
         </p:txBody>
@@ -27729,7 +27796,7 @@
           <p:cNvPr id="4" name="Slide Number Placeholder 3">
             <a:extLst>
               <a:ext uri="{FF2B5EF4-FFF2-40B4-BE49-F238E27FC236}">
-                <a16:creationId xmlns:a16="http://schemas.microsoft.com/office/drawing/2014/main" id="{81488459-7410-5142-BA76-8CDC1075987E}"/>
+                <a16:creationId xmlns:a16="http://schemas.microsoft.com/office/drawing/2014/main" id="{B9D204A0-4263-9C55-1A95-38DF0CF8A1C1}"/>
               </a:ext>
             </a:extLst>
           </p:cNvPr>
@@ -27758,7 +27825,7 @@
           <p:cNvPr id="6" name="Picture 5">
             <a:extLst>
               <a:ext uri="{FF2B5EF4-FFF2-40B4-BE49-F238E27FC236}">
-                <a16:creationId xmlns:a16="http://schemas.microsoft.com/office/drawing/2014/main" id="{F43BC554-39B4-F9F3-C222-87DDCA4A01D0}"/>
+                <a16:creationId xmlns:a16="http://schemas.microsoft.com/office/drawing/2014/main" id="{88D61A20-EDD3-B489-FA79-30DD3169DDBA}"/>
               </a:ext>
             </a:extLst>
           </p:cNvPr>
@@ -27775,18 +27842,604 @@
         </p:blipFill>
         <p:spPr>
           <a:xfrm>
-            <a:off x="7137815" y="570605"/>
-            <a:ext cx="2864991" cy="5521076"/>
+            <a:off x="1274397" y="1539277"/>
+            <a:ext cx="2505425" cy="4477375"/>
           </a:xfrm>
           <a:prstGeom prst="rect">
             <a:avLst/>
           </a:prstGeom>
         </p:spPr>
       </p:pic>
+      <p:sp>
+        <p:nvSpPr>
+          <p:cNvPr id="30" name="Rectangle: Rounded Corners 29">
+            <a:extLst>
+              <a:ext uri="{FF2B5EF4-FFF2-40B4-BE49-F238E27FC236}">
+                <a16:creationId xmlns:a16="http://schemas.microsoft.com/office/drawing/2014/main" id="{4CA205D4-AC6F-E8B9-7DF1-B9BC9334CD7D}"/>
+              </a:ext>
+            </a:extLst>
+          </p:cNvPr>
+          <p:cNvSpPr/>
+          <p:nvPr/>
+        </p:nvSpPr>
+        <p:spPr>
+          <a:xfrm>
+            <a:off x="5661232" y="4714099"/>
+            <a:ext cx="1328648" cy="872422"/>
+          </a:xfrm>
+          <a:prstGeom prst="roundRect">
+            <a:avLst/>
+          </a:prstGeom>
+          <a:solidFill>
+            <a:schemeClr val="accent4">
+              <a:lumMod val="20000"/>
+              <a:lumOff val="80000"/>
+            </a:schemeClr>
+          </a:solidFill>
+          <a:ln>
+            <a:solidFill>
+              <a:schemeClr val="accent5">
+                <a:lumMod val="75000"/>
+              </a:schemeClr>
+            </a:solidFill>
+          </a:ln>
+        </p:spPr>
+        <p:style>
+          <a:lnRef idx="2">
+            <a:schemeClr val="accent1">
+              <a:shade val="15000"/>
+            </a:schemeClr>
+          </a:lnRef>
+          <a:fillRef idx="1">
+            <a:schemeClr val="accent1"/>
+          </a:fillRef>
+          <a:effectRef idx="0">
+            <a:schemeClr val="accent1"/>
+          </a:effectRef>
+          <a:fontRef idx="minor">
+            <a:schemeClr val="lt1"/>
+          </a:fontRef>
+        </p:style>
+        <p:txBody>
+          <a:bodyPr rtlCol="0" anchor="ctr"/>
+          <a:lstStyle/>
+          <a:p>
+            <a:pPr algn="ctr"/>
+            <a:r>
+              <a:rPr lang="en-US" sz="1600" dirty="0">
+                <a:solidFill>
+                  <a:schemeClr val="tx1"/>
+                </a:solidFill>
+              </a:rPr>
+              <a:t>RTL Simulation</a:t>
+            </a:r>
+          </a:p>
+        </p:txBody>
+      </p:sp>
+      <p:sp>
+        <p:nvSpPr>
+          <p:cNvPr id="31" name="Rectangle: Rounded Corners 30">
+            <a:extLst>
+              <a:ext uri="{FF2B5EF4-FFF2-40B4-BE49-F238E27FC236}">
+                <a16:creationId xmlns:a16="http://schemas.microsoft.com/office/drawing/2014/main" id="{5B296190-E8F9-B1C9-3412-5E89562B9483}"/>
+              </a:ext>
+            </a:extLst>
+          </p:cNvPr>
+          <p:cNvSpPr/>
+          <p:nvPr/>
+        </p:nvSpPr>
+        <p:spPr>
+          <a:xfrm>
+            <a:off x="7207199" y="4672121"/>
+            <a:ext cx="1304929" cy="914400"/>
+          </a:xfrm>
+          <a:prstGeom prst="roundRect">
+            <a:avLst/>
+          </a:prstGeom>
+          <a:solidFill>
+            <a:schemeClr val="accent4">
+              <a:lumMod val="20000"/>
+              <a:lumOff val="80000"/>
+            </a:schemeClr>
+          </a:solidFill>
+          <a:ln>
+            <a:solidFill>
+              <a:schemeClr val="accent5">
+                <a:lumMod val="75000"/>
+              </a:schemeClr>
+            </a:solidFill>
+          </a:ln>
+        </p:spPr>
+        <p:style>
+          <a:lnRef idx="2">
+            <a:schemeClr val="accent1">
+              <a:shade val="15000"/>
+            </a:schemeClr>
+          </a:lnRef>
+          <a:fillRef idx="1">
+            <a:schemeClr val="accent1"/>
+          </a:fillRef>
+          <a:effectRef idx="0">
+            <a:schemeClr val="accent1"/>
+          </a:effectRef>
+          <a:fontRef idx="minor">
+            <a:schemeClr val="lt1"/>
+          </a:fontRef>
+        </p:style>
+        <p:txBody>
+          <a:bodyPr rtlCol="0" anchor="ctr"/>
+          <a:lstStyle/>
+          <a:p>
+            <a:pPr algn="ctr"/>
+            <a:r>
+              <a:rPr lang="en-US" sz="1600" dirty="0">
+                <a:solidFill>
+                  <a:schemeClr val="tx1"/>
+                </a:solidFill>
+              </a:rPr>
+              <a:t>Package</a:t>
+            </a:r>
+          </a:p>
+        </p:txBody>
+      </p:sp>
+      <p:sp>
+        <p:nvSpPr>
+          <p:cNvPr id="32" name="Rectangle: Rounded Corners 31">
+            <a:extLst>
+              <a:ext uri="{FF2B5EF4-FFF2-40B4-BE49-F238E27FC236}">
+                <a16:creationId xmlns:a16="http://schemas.microsoft.com/office/drawing/2014/main" id="{E8FF64AC-51C0-2AF5-1E5C-A7EFF236F388}"/>
+              </a:ext>
+            </a:extLst>
+          </p:cNvPr>
+          <p:cNvSpPr/>
+          <p:nvPr/>
+        </p:nvSpPr>
+        <p:spPr>
+          <a:xfrm>
+            <a:off x="6978423" y="2883752"/>
+            <a:ext cx="1133992" cy="893410"/>
+          </a:xfrm>
+          <a:prstGeom prst="roundRect">
+            <a:avLst/>
+          </a:prstGeom>
+          <a:solidFill>
+            <a:srgbClr val="E0F8E0"/>
+          </a:solidFill>
+          <a:ln>
+            <a:solidFill>
+              <a:schemeClr val="accent5">
+                <a:lumMod val="75000"/>
+              </a:schemeClr>
+            </a:solidFill>
+          </a:ln>
+        </p:spPr>
+        <p:style>
+          <a:lnRef idx="2">
+            <a:schemeClr val="accent1">
+              <a:shade val="15000"/>
+            </a:schemeClr>
+          </a:lnRef>
+          <a:fillRef idx="1">
+            <a:schemeClr val="accent1"/>
+          </a:fillRef>
+          <a:effectRef idx="0">
+            <a:schemeClr val="accent1"/>
+          </a:effectRef>
+          <a:fontRef idx="minor">
+            <a:schemeClr val="lt1"/>
+          </a:fontRef>
+        </p:style>
+        <p:txBody>
+          <a:bodyPr rtlCol="0" anchor="ctr"/>
+          <a:lstStyle/>
+          <a:p>
+            <a:pPr algn="ctr"/>
+            <a:r>
+              <a:rPr lang="en-US" sz="1600" dirty="0">
+                <a:solidFill>
+                  <a:schemeClr val="tx1"/>
+                </a:solidFill>
+              </a:rPr>
+              <a:t>C Synthesis</a:t>
+            </a:r>
+          </a:p>
+        </p:txBody>
+      </p:sp>
+      <p:sp>
+        <p:nvSpPr>
+          <p:cNvPr id="33" name="Rectangle: Rounded Corners 32">
+            <a:extLst>
+              <a:ext uri="{FF2B5EF4-FFF2-40B4-BE49-F238E27FC236}">
+                <a16:creationId xmlns:a16="http://schemas.microsoft.com/office/drawing/2014/main" id="{01D3A6D8-27BF-906C-9E4F-B05CE0ADE565}"/>
+              </a:ext>
+            </a:extLst>
+          </p:cNvPr>
+          <p:cNvSpPr/>
+          <p:nvPr/>
+        </p:nvSpPr>
+        <p:spPr>
+          <a:xfrm>
+            <a:off x="5322628" y="2883751"/>
+            <a:ext cx="1328648" cy="872422"/>
+          </a:xfrm>
+          <a:prstGeom prst="roundRect">
+            <a:avLst/>
+          </a:prstGeom>
+          <a:solidFill>
+            <a:srgbClr val="E0F8E0"/>
+          </a:solidFill>
+          <a:ln>
+            <a:solidFill>
+              <a:schemeClr val="accent5">
+                <a:lumMod val="75000"/>
+              </a:schemeClr>
+            </a:solidFill>
+          </a:ln>
+        </p:spPr>
+        <p:style>
+          <a:lnRef idx="2">
+            <a:schemeClr val="accent1">
+              <a:shade val="15000"/>
+            </a:schemeClr>
+          </a:lnRef>
+          <a:fillRef idx="1">
+            <a:schemeClr val="accent1"/>
+          </a:fillRef>
+          <a:effectRef idx="0">
+            <a:schemeClr val="accent1"/>
+          </a:effectRef>
+          <a:fontRef idx="minor">
+            <a:schemeClr val="lt1"/>
+          </a:fontRef>
+        </p:style>
+        <p:txBody>
+          <a:bodyPr rtlCol="0" anchor="ctr"/>
+          <a:lstStyle/>
+          <a:p>
+            <a:pPr algn="ctr"/>
+            <a:r>
+              <a:rPr lang="en-US" sz="1600" dirty="0">
+                <a:solidFill>
+                  <a:schemeClr val="tx1"/>
+                </a:solidFill>
+              </a:rPr>
+              <a:t>C </a:t>
+            </a:r>
+            <a:br>
+              <a:rPr lang="en-US" sz="1600" dirty="0">
+                <a:solidFill>
+                  <a:schemeClr val="tx1"/>
+                </a:solidFill>
+              </a:rPr>
+            </a:br>
+            <a:r>
+              <a:rPr lang="en-US" sz="1600" dirty="0">
+                <a:solidFill>
+                  <a:schemeClr val="tx1"/>
+                </a:solidFill>
+              </a:rPr>
+              <a:t>simulation</a:t>
+            </a:r>
+          </a:p>
+        </p:txBody>
+      </p:sp>
+      <p:sp>
+        <p:nvSpPr>
+          <p:cNvPr id="34" name="Arrow: Right 33">
+            <a:extLst>
+              <a:ext uri="{FF2B5EF4-FFF2-40B4-BE49-F238E27FC236}">
+                <a16:creationId xmlns:a16="http://schemas.microsoft.com/office/drawing/2014/main" id="{ED062EA9-EDAD-B9E3-24BB-586BCA5C738A}"/>
+              </a:ext>
+            </a:extLst>
+          </p:cNvPr>
+          <p:cNvSpPr/>
+          <p:nvPr/>
+        </p:nvSpPr>
+        <p:spPr>
+          <a:xfrm rot="5400000">
+            <a:off x="6209098" y="4310663"/>
+            <a:ext cx="549711" cy="388882"/>
+          </a:xfrm>
+          <a:prstGeom prst="rightArrow">
+            <a:avLst/>
+          </a:prstGeom>
+          <a:solidFill>
+            <a:schemeClr val="accent5">
+              <a:lumMod val="75000"/>
+            </a:schemeClr>
+          </a:solidFill>
+          <a:ln>
+            <a:noFill/>
+          </a:ln>
+        </p:spPr>
+        <p:style>
+          <a:lnRef idx="2">
+            <a:schemeClr val="accent1">
+              <a:shade val="15000"/>
+            </a:schemeClr>
+          </a:lnRef>
+          <a:fillRef idx="1">
+            <a:schemeClr val="accent1"/>
+          </a:fillRef>
+          <a:effectRef idx="0">
+            <a:schemeClr val="accent1"/>
+          </a:effectRef>
+          <a:fontRef idx="minor">
+            <a:schemeClr val="lt1"/>
+          </a:fontRef>
+        </p:style>
+        <p:txBody>
+          <a:bodyPr rtlCol="0" anchor="ctr"/>
+          <a:lstStyle/>
+          <a:p>
+            <a:pPr algn="ctr"/>
+            <a:endParaRPr lang="en-US"/>
+          </a:p>
+        </p:txBody>
+      </p:sp>
+      <p:sp>
+        <p:nvSpPr>
+          <p:cNvPr id="35" name="Arrow: Right 34">
+            <a:extLst>
+              <a:ext uri="{FF2B5EF4-FFF2-40B4-BE49-F238E27FC236}">
+                <a16:creationId xmlns:a16="http://schemas.microsoft.com/office/drawing/2014/main" id="{C978349C-BF94-D587-10F2-EC9AF6CFAD7C}"/>
+              </a:ext>
+            </a:extLst>
+          </p:cNvPr>
+          <p:cNvSpPr/>
+          <p:nvPr/>
+        </p:nvSpPr>
+        <p:spPr>
+          <a:xfrm>
+            <a:off x="6874911" y="4934880"/>
+            <a:ext cx="476718" cy="372574"/>
+          </a:xfrm>
+          <a:prstGeom prst="rightArrow">
+            <a:avLst/>
+          </a:prstGeom>
+          <a:solidFill>
+            <a:schemeClr val="accent5">
+              <a:lumMod val="60000"/>
+              <a:lumOff val="40000"/>
+            </a:schemeClr>
+          </a:solidFill>
+        </p:spPr>
+        <p:style>
+          <a:lnRef idx="2">
+            <a:schemeClr val="accent1">
+              <a:shade val="15000"/>
+            </a:schemeClr>
+          </a:lnRef>
+          <a:fillRef idx="1">
+            <a:schemeClr val="accent1"/>
+          </a:fillRef>
+          <a:effectRef idx="0">
+            <a:schemeClr val="accent1"/>
+          </a:effectRef>
+          <a:fontRef idx="minor">
+            <a:schemeClr val="lt1"/>
+          </a:fontRef>
+        </p:style>
+        <p:txBody>
+          <a:bodyPr rtlCol="0" anchor="ctr"/>
+          <a:lstStyle/>
+          <a:p>
+            <a:pPr algn="ctr"/>
+            <a:endParaRPr lang="en-US"/>
+          </a:p>
+        </p:txBody>
+      </p:sp>
+      <p:sp>
+        <p:nvSpPr>
+          <p:cNvPr id="36" name="Arrow: Right 35">
+            <a:extLst>
+              <a:ext uri="{FF2B5EF4-FFF2-40B4-BE49-F238E27FC236}">
+                <a16:creationId xmlns:a16="http://schemas.microsoft.com/office/drawing/2014/main" id="{97906784-E198-9341-0AB7-AB8911F2C59B}"/>
+              </a:ext>
+            </a:extLst>
+          </p:cNvPr>
+          <p:cNvSpPr/>
+          <p:nvPr/>
+        </p:nvSpPr>
+        <p:spPr>
+          <a:xfrm>
+            <a:off x="6580001" y="3136016"/>
+            <a:ext cx="578644" cy="388882"/>
+          </a:xfrm>
+          <a:prstGeom prst="rightArrow">
+            <a:avLst/>
+          </a:prstGeom>
+          <a:solidFill>
+            <a:srgbClr val="00B050"/>
+          </a:solidFill>
+          <a:ln>
+            <a:solidFill>
+              <a:srgbClr val="00B050"/>
+            </a:solidFill>
+          </a:ln>
+        </p:spPr>
+        <p:style>
+          <a:lnRef idx="2">
+            <a:schemeClr val="accent1">
+              <a:shade val="15000"/>
+            </a:schemeClr>
+          </a:lnRef>
+          <a:fillRef idx="1">
+            <a:schemeClr val="accent1"/>
+          </a:fillRef>
+          <a:effectRef idx="0">
+            <a:schemeClr val="accent1"/>
+          </a:effectRef>
+          <a:fontRef idx="minor">
+            <a:schemeClr val="lt1"/>
+          </a:fontRef>
+        </p:style>
+        <p:txBody>
+          <a:bodyPr rtlCol="0" anchor="ctr"/>
+          <a:lstStyle/>
+          <a:p>
+            <a:pPr algn="ctr"/>
+            <a:endParaRPr lang="en-US"/>
+          </a:p>
+        </p:txBody>
+      </p:sp>
+      <p:sp>
+        <p:nvSpPr>
+          <p:cNvPr id="37" name="Arrow: Right 36">
+            <a:extLst>
+              <a:ext uri="{FF2B5EF4-FFF2-40B4-BE49-F238E27FC236}">
+                <a16:creationId xmlns:a16="http://schemas.microsoft.com/office/drawing/2014/main" id="{163D780A-C78C-4F85-7594-9EC4BDB6ED40}"/>
+              </a:ext>
+            </a:extLst>
+          </p:cNvPr>
+          <p:cNvSpPr/>
+          <p:nvPr/>
+        </p:nvSpPr>
+        <p:spPr>
+          <a:xfrm>
+            <a:off x="4642398" y="3144612"/>
+            <a:ext cx="738928" cy="388882"/>
+          </a:xfrm>
+          <a:prstGeom prst="rightArrow">
+            <a:avLst/>
+          </a:prstGeom>
+          <a:solidFill>
+            <a:srgbClr val="00B050"/>
+          </a:solidFill>
+          <a:ln>
+            <a:solidFill>
+              <a:srgbClr val="00B050"/>
+            </a:solidFill>
+          </a:ln>
+        </p:spPr>
+        <p:style>
+          <a:lnRef idx="2">
+            <a:schemeClr val="accent1">
+              <a:shade val="15000"/>
+            </a:schemeClr>
+          </a:lnRef>
+          <a:fillRef idx="1">
+            <a:schemeClr val="accent1"/>
+          </a:fillRef>
+          <a:effectRef idx="0">
+            <a:schemeClr val="accent1"/>
+          </a:effectRef>
+          <a:fontRef idx="minor">
+            <a:schemeClr val="lt1"/>
+          </a:fontRef>
+        </p:style>
+        <p:txBody>
+          <a:bodyPr rtlCol="0" anchor="ctr"/>
+          <a:lstStyle/>
+          <a:p>
+            <a:pPr algn="ctr"/>
+            <a:endParaRPr lang="en-US"/>
+          </a:p>
+        </p:txBody>
+      </p:sp>
+      <p:sp>
+        <p:nvSpPr>
+          <p:cNvPr id="38" name="TextBox 37">
+            <a:extLst>
+              <a:ext uri="{FF2B5EF4-FFF2-40B4-BE49-F238E27FC236}">
+                <a16:creationId xmlns:a16="http://schemas.microsoft.com/office/drawing/2014/main" id="{D43A3F1F-ABB7-A914-4F56-ACECC9D7C408}"/>
+              </a:ext>
+            </a:extLst>
+          </p:cNvPr>
+          <p:cNvSpPr txBox="1"/>
+          <p:nvPr/>
+        </p:nvSpPr>
+        <p:spPr>
+          <a:xfrm>
+            <a:off x="4738882" y="3979838"/>
+            <a:ext cx="1496692" cy="584775"/>
+          </a:xfrm>
+          <a:prstGeom prst="rect">
+            <a:avLst/>
+          </a:prstGeom>
+          <a:noFill/>
+        </p:spPr>
+        <p:txBody>
+          <a:bodyPr wrap="none" rtlCol="0">
+            <a:spAutoFit/>
+          </a:bodyPr>
+          <a:lstStyle/>
+          <a:p>
+            <a:r>
+              <a:rPr lang="en-US" sz="1600" dirty="0"/>
+              <a:t>Auto-generated</a:t>
+            </a:r>
+            <a:br>
+              <a:rPr lang="en-US" sz="1600" dirty="0"/>
+            </a:br>
+            <a:r>
+              <a:rPr lang="en-US" sz="1600" dirty="0"/>
+              <a:t>RTL files</a:t>
+            </a:r>
+          </a:p>
+        </p:txBody>
+      </p:sp>
+      <p:sp>
+        <p:nvSpPr>
+          <p:cNvPr id="39" name="L-Shape 38">
+            <a:extLst>
+              <a:ext uri="{FF2B5EF4-FFF2-40B4-BE49-F238E27FC236}">
+                <a16:creationId xmlns:a16="http://schemas.microsoft.com/office/drawing/2014/main" id="{23E1CA6C-D160-9777-AED2-807F591AA08B}"/>
+              </a:ext>
+            </a:extLst>
+          </p:cNvPr>
+          <p:cNvSpPr/>
+          <p:nvPr/>
+        </p:nvSpPr>
+        <p:spPr>
+          <a:xfrm rot="16200000">
+            <a:off x="6717600" y="3465484"/>
+            <a:ext cx="598116" cy="1238536"/>
+          </a:xfrm>
+          <a:prstGeom prst="corner">
+            <a:avLst>
+              <a:gd name="adj1" fmla="val 28277"/>
+              <a:gd name="adj2" fmla="val 30302"/>
+            </a:avLst>
+          </a:prstGeom>
+          <a:solidFill>
+            <a:schemeClr val="accent5">
+              <a:lumMod val="75000"/>
+            </a:schemeClr>
+          </a:solidFill>
+          <a:ln>
+            <a:noFill/>
+          </a:ln>
+        </p:spPr>
+        <p:style>
+          <a:lnRef idx="2">
+            <a:schemeClr val="accent1">
+              <a:shade val="15000"/>
+            </a:schemeClr>
+          </a:lnRef>
+          <a:fillRef idx="1">
+            <a:schemeClr val="accent1"/>
+          </a:fillRef>
+          <a:effectRef idx="0">
+            <a:schemeClr val="accent1"/>
+          </a:effectRef>
+          <a:fontRef idx="minor">
+            <a:schemeClr val="lt1"/>
+          </a:fontRef>
+        </p:style>
+        <p:txBody>
+          <a:bodyPr rtlCol="0" anchor="ctr"/>
+          <a:lstStyle/>
+          <a:p>
+            <a:pPr algn="ctr"/>
+            <a:endParaRPr lang="en-US"/>
+          </a:p>
+        </p:txBody>
+      </p:sp>
     </p:spTree>
     <p:extLst>
       <p:ext uri="{BB962C8B-B14F-4D97-AF65-F5344CB8AC3E}">
-        <p14:creationId xmlns:p14="http://schemas.microsoft.com/office/powerpoint/2010/main" val="3321271055"/>
+        <p14:creationId xmlns:p14="http://schemas.microsoft.com/office/powerpoint/2010/main" val="3758559764"/>
       </p:ext>
     </p:extLst>
   </p:cSld>
@@ -27818,7 +28471,7 @@
           <p:cNvPr id="2" name="Title 1">
             <a:extLst>
               <a:ext uri="{FF2B5EF4-FFF2-40B4-BE49-F238E27FC236}">
-                <a16:creationId xmlns:a16="http://schemas.microsoft.com/office/drawing/2014/main" id="{38E1485B-0271-D67D-C297-6C04DD4B1BE1}"/>
+                <a16:creationId xmlns:a16="http://schemas.microsoft.com/office/drawing/2014/main" id="{066FF4E1-D1EF-6615-0F28-8B33EB420D2C}"/>
               </a:ext>
             </a:extLst>
           </p:cNvPr>
@@ -27836,7 +28489,7 @@
           <a:p>
             <a:r>
               <a:rPr lang="en-US" dirty="0"/>
-              <a:t>Synthesis Report</a:t>
+              <a:t>Synthesis Output</a:t>
             </a:r>
           </a:p>
         </p:txBody>
@@ -27846,7 +28499,7 @@
           <p:cNvPr id="3" name="Content Placeholder 2">
             <a:extLst>
               <a:ext uri="{FF2B5EF4-FFF2-40B4-BE49-F238E27FC236}">
-                <a16:creationId xmlns:a16="http://schemas.microsoft.com/office/drawing/2014/main" id="{624FDDA9-B77D-3B2F-B126-2A260F81C528}"/>
+                <a16:creationId xmlns:a16="http://schemas.microsoft.com/office/drawing/2014/main" id="{BA091796-DBD2-7B96-8E93-B271125FC810}"/>
               </a:ext>
             </a:extLst>
           </p:cNvPr>
@@ -27864,79 +28517,41 @@
           <a:p>
             <a:r>
               <a:rPr lang="en-US" dirty="0"/>
-              <a:t>Generate a Report in Vitis Tool</a:t>
+              <a:t>Resulting Verilog files are massive!</a:t>
+            </a:r>
+          </a:p>
+          <a:p>
+            <a:r>
+              <a:rPr lang="en-US" dirty="0"/>
+              <a:t>Main function in this case:</a:t>
             </a:r>
           </a:p>
           <a:p>
             <a:pPr lvl="1"/>
             <a:r>
+              <a:rPr lang="en-US" dirty="0" err="1"/>
+              <a:t>simp_fun.v</a:t>
+            </a:r>
+            <a:endParaRPr lang="en-US" dirty="0"/>
+          </a:p>
+          <a:p>
+            <a:pPr lvl="1"/>
+            <a:r>
               <a:rPr lang="en-US" dirty="0"/>
-              <a:t>Later, we will write python to parse these</a:t>
-            </a:r>
-          </a:p>
-          <a:p>
+              <a:t>&gt; 200 lines of Verilog</a:t>
+            </a:r>
+          </a:p>
+          <a:p>
+            <a:pPr lvl="1"/>
             <a:r>
               <a:rPr lang="en-US" dirty="0"/>
-              <a:t>Timing estimate</a:t>
-            </a:r>
-          </a:p>
-          <a:p>
-            <a:pPr lvl="1"/>
+              <a:t>Hard to read code</a:t>
+            </a:r>
+          </a:p>
+          <a:p>
             <a:r>
               <a:rPr lang="en-US" dirty="0"/>
-              <a:t>Timing of critical path</a:t>
-            </a:r>
-          </a:p>
-          <a:p>
-            <a:pPr lvl="1"/>
-            <a:r>
-              <a:rPr lang="en-US" dirty="0"/>
-              <a:t>Can verify that lower than clock period</a:t>
-            </a:r>
-          </a:p>
-          <a:p>
-            <a:r>
-              <a:rPr lang="en-US" dirty="0"/>
-              <a:t>Estimated latency </a:t>
-            </a:r>
-          </a:p>
-          <a:p>
-            <a:pPr lvl="1"/>
-            <a:r>
-              <a:rPr lang="en-US" dirty="0"/>
-              <a:t>In this case = 4 clock </a:t>
-            </a:r>
-            <a:r>
-              <a:rPr lang="en-US" dirty="0" err="1"/>
-              <a:t>cylces</a:t>
-            </a:r>
-            <a:endParaRPr lang="en-US" dirty="0"/>
-          </a:p>
-          <a:p>
-            <a:r>
-              <a:rPr lang="en-US" dirty="0"/>
-              <a:t>Estimate resources</a:t>
-            </a:r>
-          </a:p>
-          <a:p>
-            <a:pPr lvl="1"/>
-            <a:r>
-              <a:rPr lang="en-US" dirty="0"/>
-              <a:t>Amount of each FPGA resources used</a:t>
-            </a:r>
-          </a:p>
-          <a:p>
-            <a:pPr lvl="1"/>
-            <a:r>
-              <a:rPr lang="en-US" dirty="0"/>
-              <a:t>BRAM, DSP, …</a:t>
-            </a:r>
-          </a:p>
-          <a:p>
-            <a:pPr lvl="1"/>
-            <a:r>
-              <a:rPr lang="en-US" dirty="0"/>
-              <a:t>We will discuss these in detail later</a:t>
+              <a:t>You saved a lot of time coding</a:t>
             </a:r>
           </a:p>
         </p:txBody>
@@ -27946,7 +28561,7 @@
           <p:cNvPr id="4" name="Slide Number Placeholder 3">
             <a:extLst>
               <a:ext uri="{FF2B5EF4-FFF2-40B4-BE49-F238E27FC236}">
-                <a16:creationId xmlns:a16="http://schemas.microsoft.com/office/drawing/2014/main" id="{6A4999CB-191F-6878-D0F2-E3774ED46B57}"/>
+                <a16:creationId xmlns:a16="http://schemas.microsoft.com/office/drawing/2014/main" id="{81488459-7410-5142-BA76-8CDC1075987E}"/>
               </a:ext>
             </a:extLst>
           </p:cNvPr>
@@ -27965,6 +28580,223 @@
             <a:fld id="{629637A9-119A-49DA-BD12-AAC58B377D80}" type="slidenum">
               <a:rPr lang="en-US" smtClean="0"/>
               <a:t>44</a:t>
+            </a:fld>
+            <a:endParaRPr lang="en-US" dirty="0"/>
+          </a:p>
+        </p:txBody>
+      </p:sp>
+      <p:pic>
+        <p:nvPicPr>
+          <p:cNvPr id="6" name="Picture 5">
+            <a:extLst>
+              <a:ext uri="{FF2B5EF4-FFF2-40B4-BE49-F238E27FC236}">
+                <a16:creationId xmlns:a16="http://schemas.microsoft.com/office/drawing/2014/main" id="{F43BC554-39B4-F9F3-C222-87DDCA4A01D0}"/>
+              </a:ext>
+            </a:extLst>
+          </p:cNvPr>
+          <p:cNvPicPr>
+            <a:picLocks noChangeAspect="1"/>
+          </p:cNvPicPr>
+          <p:nvPr/>
+        </p:nvPicPr>
+        <p:blipFill>
+          <a:blip r:embed="rId2"/>
+          <a:stretch>
+            <a:fillRect/>
+          </a:stretch>
+        </p:blipFill>
+        <p:spPr>
+          <a:xfrm>
+            <a:off x="7137815" y="570605"/>
+            <a:ext cx="2864991" cy="5521076"/>
+          </a:xfrm>
+          <a:prstGeom prst="rect">
+            <a:avLst/>
+          </a:prstGeom>
+        </p:spPr>
+      </p:pic>
+    </p:spTree>
+    <p:extLst>
+      <p:ext uri="{BB962C8B-B14F-4D97-AF65-F5344CB8AC3E}">
+        <p14:creationId xmlns:p14="http://schemas.microsoft.com/office/powerpoint/2010/main" val="3321271055"/>
+      </p:ext>
+    </p:extLst>
+  </p:cSld>
+  <p:clrMapOvr>
+    <a:masterClrMapping/>
+  </p:clrMapOvr>
+</p:sld>
+</file>
+
+<file path=ppt/slides/slide45.xml><?xml version="1.0" encoding="utf-8"?>
+<p:sld xmlns:a="http://schemas.openxmlformats.org/drawingml/2006/main" xmlns:r="http://schemas.openxmlformats.org/officeDocument/2006/relationships" xmlns:p="http://schemas.openxmlformats.org/presentationml/2006/main">
+  <p:cSld>
+    <p:spTree>
+      <p:nvGrpSpPr>
+        <p:cNvPr id="1" name=""/>
+        <p:cNvGrpSpPr/>
+        <p:nvPr/>
+      </p:nvGrpSpPr>
+      <p:grpSpPr>
+        <a:xfrm>
+          <a:off x="0" y="0"/>
+          <a:ext cx="0" cy="0"/>
+          <a:chOff x="0" y="0"/>
+          <a:chExt cx="0" cy="0"/>
+        </a:xfrm>
+      </p:grpSpPr>
+      <p:sp>
+        <p:nvSpPr>
+          <p:cNvPr id="2" name="Title 1">
+            <a:extLst>
+              <a:ext uri="{FF2B5EF4-FFF2-40B4-BE49-F238E27FC236}">
+                <a16:creationId xmlns:a16="http://schemas.microsoft.com/office/drawing/2014/main" id="{38E1485B-0271-D67D-C297-6C04DD4B1BE1}"/>
+              </a:ext>
+            </a:extLst>
+          </p:cNvPr>
+          <p:cNvSpPr>
+            <a:spLocks noGrp="1"/>
+          </p:cNvSpPr>
+          <p:nvPr>
+            <p:ph type="title"/>
+          </p:nvPr>
+        </p:nvSpPr>
+        <p:spPr/>
+        <p:txBody>
+          <a:bodyPr/>
+          <a:lstStyle/>
+          <a:p>
+            <a:r>
+              <a:rPr lang="en-US" dirty="0"/>
+              <a:t>Synthesis Report</a:t>
+            </a:r>
+          </a:p>
+        </p:txBody>
+      </p:sp>
+      <p:sp>
+        <p:nvSpPr>
+          <p:cNvPr id="3" name="Content Placeholder 2">
+            <a:extLst>
+              <a:ext uri="{FF2B5EF4-FFF2-40B4-BE49-F238E27FC236}">
+                <a16:creationId xmlns:a16="http://schemas.microsoft.com/office/drawing/2014/main" id="{624FDDA9-B77D-3B2F-B126-2A260F81C528}"/>
+              </a:ext>
+            </a:extLst>
+          </p:cNvPr>
+          <p:cNvSpPr>
+            <a:spLocks noGrp="1"/>
+          </p:cNvSpPr>
+          <p:nvPr>
+            <p:ph idx="1"/>
+          </p:nvPr>
+        </p:nvSpPr>
+        <p:spPr/>
+        <p:txBody>
+          <a:bodyPr/>
+          <a:lstStyle/>
+          <a:p>
+            <a:r>
+              <a:rPr lang="en-US" dirty="0"/>
+              <a:t>Generate a Report in Vitis Tool</a:t>
+            </a:r>
+          </a:p>
+          <a:p>
+            <a:pPr lvl="1"/>
+            <a:r>
+              <a:rPr lang="en-US" dirty="0"/>
+              <a:t>Later, we will write python to parse these</a:t>
+            </a:r>
+          </a:p>
+          <a:p>
+            <a:r>
+              <a:rPr lang="en-US" dirty="0"/>
+              <a:t>Timing estimate</a:t>
+            </a:r>
+          </a:p>
+          <a:p>
+            <a:pPr lvl="1"/>
+            <a:r>
+              <a:rPr lang="en-US" dirty="0"/>
+              <a:t>Timing of critical path</a:t>
+            </a:r>
+          </a:p>
+          <a:p>
+            <a:pPr lvl="1"/>
+            <a:r>
+              <a:rPr lang="en-US" dirty="0"/>
+              <a:t>Can verify that lower than clock period</a:t>
+            </a:r>
+          </a:p>
+          <a:p>
+            <a:r>
+              <a:rPr lang="en-US" dirty="0"/>
+              <a:t>Estimated latency </a:t>
+            </a:r>
+          </a:p>
+          <a:p>
+            <a:pPr lvl="1"/>
+            <a:r>
+              <a:rPr lang="en-US" dirty="0"/>
+              <a:t>In this case = 4 clock </a:t>
+            </a:r>
+            <a:r>
+              <a:rPr lang="en-US" dirty="0" err="1"/>
+              <a:t>cylces</a:t>
+            </a:r>
+            <a:endParaRPr lang="en-US" dirty="0"/>
+          </a:p>
+          <a:p>
+            <a:r>
+              <a:rPr lang="en-US" dirty="0"/>
+              <a:t>Estimate resources</a:t>
+            </a:r>
+          </a:p>
+          <a:p>
+            <a:pPr lvl="1"/>
+            <a:r>
+              <a:rPr lang="en-US" dirty="0"/>
+              <a:t>Amount of each FPGA resources used</a:t>
+            </a:r>
+          </a:p>
+          <a:p>
+            <a:pPr lvl="1"/>
+            <a:r>
+              <a:rPr lang="en-US" dirty="0"/>
+              <a:t>BRAM, DSP, …</a:t>
+            </a:r>
+          </a:p>
+          <a:p>
+            <a:pPr lvl="1"/>
+            <a:r>
+              <a:rPr lang="en-US" dirty="0"/>
+              <a:t>We will discuss these in detail later</a:t>
+            </a:r>
+          </a:p>
+        </p:txBody>
+      </p:sp>
+      <p:sp>
+        <p:nvSpPr>
+          <p:cNvPr id="4" name="Slide Number Placeholder 3">
+            <a:extLst>
+              <a:ext uri="{FF2B5EF4-FFF2-40B4-BE49-F238E27FC236}">
+                <a16:creationId xmlns:a16="http://schemas.microsoft.com/office/drawing/2014/main" id="{6A4999CB-191F-6878-D0F2-E3774ED46B57}"/>
+              </a:ext>
+            </a:extLst>
+          </p:cNvPr>
+          <p:cNvSpPr>
+            <a:spLocks noGrp="1"/>
+          </p:cNvSpPr>
+          <p:nvPr>
+            <p:ph type="sldNum" sz="quarter" idx="12"/>
+          </p:nvPr>
+        </p:nvSpPr>
+        <p:spPr/>
+        <p:txBody>
+          <a:bodyPr/>
+          <a:lstStyle/>
+          <a:p>
+            <a:fld id="{629637A9-119A-49DA-BD12-AAC58B377D80}" type="slidenum">
+              <a:rPr lang="en-US" smtClean="0"/>
+              <a:t>45</a:t>
             </a:fld>
             <a:endParaRPr lang="en-US" dirty="0"/>
           </a:p>
@@ -28013,7 +28845,7 @@
 </p:sld>
 </file>
 
-<file path=ppt/slides/slide45.xml><?xml version="1.0" encoding="utf-8"?>
+<file path=ppt/slides/slide46.xml><?xml version="1.0" encoding="utf-8"?>
 <p:sld xmlns:a="http://schemas.openxmlformats.org/drawingml/2006/main" xmlns:r="http://schemas.openxmlformats.org/officeDocument/2006/relationships" xmlns:p="http://schemas.openxmlformats.org/presentationml/2006/main">
   <p:cSld>
     <p:spTree>
@@ -28280,7 +29112,7 @@
           <a:p>
             <a:fld id="{629637A9-119A-49DA-BD12-AAC58B377D80}" type="slidenum">
               <a:rPr lang="en-US" smtClean="0"/>
-              <a:t>45</a:t>
+              <a:t>46</a:t>
             </a:fld>
             <a:endParaRPr lang="en-US" dirty="0"/>
           </a:p>
@@ -28559,7 +29391,7 @@
 </p:sld>
 </file>
 
-<file path=ppt/slides/slide46.xml><?xml version="1.0" encoding="utf-8"?>
+<file path=ppt/slides/slide47.xml><?xml version="1.0" encoding="utf-8"?>
 <p:sld xmlns:a="http://schemas.openxmlformats.org/drawingml/2006/main" xmlns:r="http://schemas.openxmlformats.org/officeDocument/2006/relationships" xmlns:p="http://schemas.openxmlformats.org/presentationml/2006/main">
   <p:cSld>
     <p:spTree>
@@ -28688,7 +29520,7 @@
           <a:p>
             <a:fld id="{629637A9-119A-49DA-BD12-AAC58B377D80}" type="slidenum">
               <a:rPr lang="en-US" smtClean="0"/>
-              <a:t>46</a:t>
+              <a:t>47</a:t>
             </a:fld>
             <a:endParaRPr lang="en-US" dirty="0"/>
           </a:p>
@@ -28809,7 +29641,7 @@
 </p:sld>
 </file>
 
-<file path=ppt/slides/slide47.xml><?xml version="1.0" encoding="utf-8"?>
+<file path=ppt/slides/slide48.xml><?xml version="1.0" encoding="utf-8"?>
 <p:sld xmlns:a="http://schemas.openxmlformats.org/drawingml/2006/main" xmlns:r="http://schemas.openxmlformats.org/officeDocument/2006/relationships" xmlns:p="http://schemas.openxmlformats.org/presentationml/2006/main">
   <p:cSld>
     <p:spTree>
@@ -28969,7 +29801,7 @@
           <a:p>
             <a:fld id="{629637A9-119A-49DA-BD12-AAC58B377D80}" type="slidenum">
               <a:rPr lang="en-US" smtClean="0"/>
-              <a:t>47</a:t>
+              <a:t>48</a:t>
             </a:fld>
             <a:endParaRPr lang="en-US" dirty="0"/>
           </a:p>
@@ -29328,7 +30160,7 @@
 </p:sld>
 </file>
 
-<file path=ppt/slides/slide48.xml><?xml version="1.0" encoding="utf-8"?>
+<file path=ppt/slides/slide49.xml><?xml version="1.0" encoding="utf-8"?>
 <p:sld xmlns:a="http://schemas.openxmlformats.org/drawingml/2006/main" xmlns:r="http://schemas.openxmlformats.org/officeDocument/2006/relationships" xmlns:p="http://schemas.openxmlformats.org/presentationml/2006/main">
   <p:cSld>
     <p:spTree>
@@ -29424,7 +30256,7 @@
           <a:p>
             <a:fld id="{629637A9-119A-49DA-BD12-AAC58B377D80}" type="slidenum">
               <a:rPr lang="en-US" smtClean="0"/>
-              <a:t>48</a:t>
+              <a:t>49</a:t>
             </a:fld>
             <a:endParaRPr lang="en-US" dirty="0"/>
           </a:p>
@@ -30302,8 +31134,8 @@
             </a:p>
           </p:txBody>
         </p:sp>
-        <mc:AlternateContent xmlns:mc="http://schemas.openxmlformats.org/markup-compatibility/2006">
-          <mc:Choice xmlns:a14="http://schemas.microsoft.com/office/drawing/2010/main" Requires="a14">
+        <mc:AlternateContent xmlns:mc="http://schemas.openxmlformats.org/markup-compatibility/2006" xmlns:a14="http://schemas.microsoft.com/office/drawing/2010/main">
+          <mc:Choice Requires="a14">
             <p:sp>
               <p:nvSpPr>
                 <p:cNvPr id="8" name="TextBox 7">
@@ -30422,7 +31254,7 @@
               </p:txBody>
             </p:sp>
           </mc:Choice>
-          <mc:Fallback>
+          <mc:Fallback xmlns="">
             <p:sp>
               <p:nvSpPr>
                 <p:cNvPr id="8" name="TextBox 7">
@@ -30556,8 +31388,8 @@
             </a:fontRef>
           </p:style>
         </p:cxnSp>
-        <mc:AlternateContent xmlns:mc="http://schemas.openxmlformats.org/markup-compatibility/2006">
-          <mc:Choice xmlns:a14="http://schemas.microsoft.com/office/drawing/2010/main" Requires="a14">
+        <mc:AlternateContent xmlns:mc="http://schemas.openxmlformats.org/markup-compatibility/2006" xmlns:a14="http://schemas.microsoft.com/office/drawing/2010/main">
+          <mc:Choice Requires="a14">
             <p:sp>
               <p:nvSpPr>
                 <p:cNvPr id="24" name="TextBox 23">
@@ -30652,7 +31484,7 @@
               </p:txBody>
             </p:sp>
           </mc:Choice>
-          <mc:Fallback>
+          <mc:Fallback xmlns="">
             <p:sp>
               <p:nvSpPr>
                 <p:cNvPr id="24" name="TextBox 23">
@@ -30697,8 +31529,8 @@
             </p:sp>
           </mc:Fallback>
         </mc:AlternateContent>
-        <mc:AlternateContent xmlns:mc="http://schemas.openxmlformats.org/markup-compatibility/2006">
-          <mc:Choice xmlns:a14="http://schemas.microsoft.com/office/drawing/2010/main" Requires="a14">
+        <mc:AlternateContent xmlns:mc="http://schemas.openxmlformats.org/markup-compatibility/2006" xmlns:a14="http://schemas.microsoft.com/office/drawing/2010/main">
+          <mc:Choice Requires="a14">
             <p:sp>
               <p:nvSpPr>
                 <p:cNvPr id="25" name="TextBox 24">
@@ -30755,7 +31587,7 @@
               </p:txBody>
             </p:sp>
           </mc:Choice>
-          <mc:Fallback>
+          <mc:Fallback xmlns="">
             <p:sp>
               <p:nvSpPr>
                 <p:cNvPr id="25" name="TextBox 24">
@@ -30800,8 +31632,8 @@
             </p:sp>
           </mc:Fallback>
         </mc:AlternateContent>
-        <mc:AlternateContent xmlns:mc="http://schemas.openxmlformats.org/markup-compatibility/2006">
-          <mc:Choice xmlns:a14="http://schemas.microsoft.com/office/drawing/2010/main" Requires="a14">
+        <mc:AlternateContent xmlns:mc="http://schemas.openxmlformats.org/markup-compatibility/2006" xmlns:a14="http://schemas.microsoft.com/office/drawing/2010/main">
+          <mc:Choice Requires="a14">
             <p:sp>
               <p:nvSpPr>
                 <p:cNvPr id="33" name="TextBox 32">
@@ -30864,7 +31696,7 @@
               </p:txBody>
             </p:sp>
           </mc:Choice>
-          <mc:Fallback>
+          <mc:Fallback xmlns="">
             <p:sp>
               <p:nvSpPr>
                 <p:cNvPr id="33" name="TextBox 32">
@@ -30909,8 +31741,8 @@
             </p:sp>
           </mc:Fallback>
         </mc:AlternateContent>
-        <mc:AlternateContent xmlns:mc="http://schemas.openxmlformats.org/markup-compatibility/2006">
-          <mc:Choice xmlns:a14="http://schemas.microsoft.com/office/drawing/2010/main" Requires="a14">
+        <mc:AlternateContent xmlns:mc="http://schemas.openxmlformats.org/markup-compatibility/2006" xmlns:a14="http://schemas.microsoft.com/office/drawing/2010/main">
+          <mc:Choice Requires="a14">
             <p:sp>
               <p:nvSpPr>
                 <p:cNvPr id="34" name="TextBox 33">
@@ -30973,7 +31805,7 @@
               </p:txBody>
             </p:sp>
           </mc:Choice>
-          <mc:Fallback>
+          <mc:Fallback xmlns="">
             <p:sp>
               <p:nvSpPr>
                 <p:cNvPr id="34" name="TextBox 33">
@@ -31919,8 +32751,8 @@
             </p:style>
           </p:cxnSp>
         </p:grpSp>
-        <mc:AlternateContent xmlns:mc="http://schemas.openxmlformats.org/markup-compatibility/2006">
-          <mc:Choice xmlns:a14="http://schemas.microsoft.com/office/drawing/2010/main" Requires="a14">
+        <mc:AlternateContent xmlns:mc="http://schemas.openxmlformats.org/markup-compatibility/2006" xmlns:a14="http://schemas.microsoft.com/office/drawing/2010/main">
+          <mc:Choice Requires="a14">
             <p:sp>
               <p:nvSpPr>
                 <p:cNvPr id="81" name="TextBox 80">
@@ -31997,7 +32829,7 @@
               </p:txBody>
             </p:sp>
           </mc:Choice>
-          <mc:Fallback>
+          <mc:Fallback xmlns="">
             <p:sp>
               <p:nvSpPr>
                 <p:cNvPr id="81" name="TextBox 80">
